--- a/票券-自己架一套/安裝說明.pptx
+++ b/票券-自己架一套/安裝說明.pptx
@@ -9,11 +9,9 @@
     <p:sldId id="257" r:id="rId3"/>
     <p:sldId id="258" r:id="rId4"/>
     <p:sldId id="259" r:id="rId5"/>
-    <p:sldId id="260" r:id="rId6"/>
     <p:sldId id="261" r:id="rId7"/>
     <p:sldId id="262" r:id="rId8"/>
     <p:sldId id="263" r:id="rId9"/>
-    <p:sldId id="264" r:id="rId10"/>
     <p:sldId id="265" r:id="rId11"/>
     <p:sldId id="266" r:id="rId12"/>
     <p:sldId id="267" r:id="rId13"/>
@@ -1261,94 +1259,6 @@
 </p:notes>
 </file>
 
-<file path=ppt/notesSlides/notesSlide5.xml><?xml version="1.0" encoding="utf-8"?>
-<p:notes xmlns:a="http://schemas.openxmlformats.org/drawingml/2006/main" xmlns:r="http://schemas.openxmlformats.org/officeDocument/2006/relationships" xmlns:p="http://schemas.openxmlformats.org/presentationml/2006/main">
-  <p:cSld>
-    <p:spTree>
-      <p:nvGrpSpPr>
-        <p:cNvPr id="1" name=""/>
-        <p:cNvGrpSpPr/>
-        <p:nvPr/>
-      </p:nvGrpSpPr>
-      <p:grpSpPr>
-        <a:xfrm>
-          <a:off x="0" y="0"/>
-          <a:ext cx="0" cy="0"/>
-          <a:chOff x="0" y="0"/>
-          <a:chExt cx="0" cy="0"/>
-        </a:xfrm>
-      </p:grpSpPr>
-      <p:sp>
-        <p:nvSpPr>
-          <p:cNvPr id="2" name="Slide Image Placeholder 1"/>
-          <p:cNvSpPr>
-            <a:spLocks noGrp="1" noRot="1" noChangeAspect="1"/>
-          </p:cNvSpPr>
-          <p:nvPr>
-            <p:ph type="sldImg"/>
-          </p:nvPr>
-        </p:nvSpPr>
-        <p:spPr/>
-      </p:sp>
-      <p:sp>
-        <p:nvSpPr>
-          <p:cNvPr id="3" name="Notes Placeholder 2"/>
-          <p:cNvSpPr>
-            <a:spLocks noGrp="1"/>
-          </p:cNvSpPr>
-          <p:nvPr>
-            <p:ph type="body" idx="1"/>
-          </p:nvPr>
-        </p:nvSpPr>
-        <p:spPr/>
-        <p:txBody>
-          <a:bodyPr/>
-          <a:lstStyle/>
-          <a:p>
-            <a:r>
-              <a:rPr lang="en-US" dirty="0"/>
-              <a:t/>
-            </a:r>
-            <a:endParaRPr lang="en-US" dirty="0"/>
-          </a:p>
-        </p:txBody>
-      </p:sp>
-      <p:sp>
-        <p:nvSpPr>
-          <p:cNvPr id="4" name="Slide Number Placeholder 3"/>
-          <p:cNvSpPr>
-            <a:spLocks noGrp="1"/>
-          </p:cNvSpPr>
-          <p:nvPr>
-            <p:ph type="sldNum" sz="quarter" idx="10"/>
-          </p:nvPr>
-        </p:nvSpPr>
-        <p:spPr/>
-        <p:txBody>
-          <a:bodyPr/>
-          <a:lstStyle/>
-          <a:p>
-            <a:fld id="{F7021451-1387-4CA6-816F-3879F97B5CBC}" type="slidenum">
-              <a:rPr lang="en-US"/>
-              <a:t>5</a:t>
-            </a:fld>
-            <a:endParaRPr lang="en-US"/>
-          </a:p>
-        </p:txBody>
-      </p:sp>
-    </p:spTree>
-    <p:extLst>
-      <p:ext uri="{BB962C8B-B14F-4D97-AF65-F5344CB8AC3E}">
-        <p14:creationId xmlns:p14="http://schemas.microsoft.com/office/powerpoint/2010/main" val="1024086991"/>
-      </p:ext>
-    </p:extLst>
-  </p:cSld>
-  <p:clrMapOvr>
-    <a:masterClrMapping/>
-  </p:clrMapOvr>
-</p:notes>
-</file>
-
 <file path=ppt/notesSlides/notesSlide6.xml><?xml version="1.0" encoding="utf-8"?>
 <p:notes xmlns:a="http://schemas.openxmlformats.org/drawingml/2006/main" xmlns:r="http://schemas.openxmlformats.org/officeDocument/2006/relationships" xmlns:p="http://schemas.openxmlformats.org/presentationml/2006/main">
   <p:cSld>
@@ -1595,94 +1505,6 @@
             <a:fld id="{F7021451-1387-4CA6-816F-3879F97B5CBC}" type="slidenum">
               <a:rPr lang="en-US"/>
               <a:t>8</a:t>
-            </a:fld>
-            <a:endParaRPr lang="en-US"/>
-          </a:p>
-        </p:txBody>
-      </p:sp>
-    </p:spTree>
-    <p:extLst>
-      <p:ext uri="{BB962C8B-B14F-4D97-AF65-F5344CB8AC3E}">
-        <p14:creationId xmlns:p14="http://schemas.microsoft.com/office/powerpoint/2010/main" val="1024086991"/>
-      </p:ext>
-    </p:extLst>
-  </p:cSld>
-  <p:clrMapOvr>
-    <a:masterClrMapping/>
-  </p:clrMapOvr>
-</p:notes>
-</file>
-
-<file path=ppt/notesSlides/notesSlide9.xml><?xml version="1.0" encoding="utf-8"?>
-<p:notes xmlns:a="http://schemas.openxmlformats.org/drawingml/2006/main" xmlns:r="http://schemas.openxmlformats.org/officeDocument/2006/relationships" xmlns:p="http://schemas.openxmlformats.org/presentationml/2006/main">
-  <p:cSld>
-    <p:spTree>
-      <p:nvGrpSpPr>
-        <p:cNvPr id="1" name=""/>
-        <p:cNvGrpSpPr/>
-        <p:nvPr/>
-      </p:nvGrpSpPr>
-      <p:grpSpPr>
-        <a:xfrm>
-          <a:off x="0" y="0"/>
-          <a:ext cx="0" cy="0"/>
-          <a:chOff x="0" y="0"/>
-          <a:chExt cx="0" cy="0"/>
-        </a:xfrm>
-      </p:grpSpPr>
-      <p:sp>
-        <p:nvSpPr>
-          <p:cNvPr id="2" name="Slide Image Placeholder 1"/>
-          <p:cNvSpPr>
-            <a:spLocks noGrp="1" noRot="1" noChangeAspect="1"/>
-          </p:cNvSpPr>
-          <p:nvPr>
-            <p:ph type="sldImg"/>
-          </p:nvPr>
-        </p:nvSpPr>
-        <p:spPr/>
-      </p:sp>
-      <p:sp>
-        <p:nvSpPr>
-          <p:cNvPr id="3" name="Notes Placeholder 2"/>
-          <p:cNvSpPr>
-            <a:spLocks noGrp="1"/>
-          </p:cNvSpPr>
-          <p:nvPr>
-            <p:ph type="body" idx="1"/>
-          </p:nvPr>
-        </p:nvSpPr>
-        <p:spPr/>
-        <p:txBody>
-          <a:bodyPr/>
-          <a:lstStyle/>
-          <a:p>
-            <a:r>
-              <a:rPr lang="en-US" dirty="0"/>
-              <a:t/>
-            </a:r>
-            <a:endParaRPr lang="en-US" dirty="0"/>
-          </a:p>
-        </p:txBody>
-      </p:sp>
-      <p:sp>
-        <p:nvSpPr>
-          <p:cNvPr id="4" name="Slide Number Placeholder 3"/>
-          <p:cNvSpPr>
-            <a:spLocks noGrp="1"/>
-          </p:cNvSpPr>
-          <p:nvPr>
-            <p:ph type="sldNum" sz="quarter" idx="10"/>
-          </p:nvPr>
-        </p:nvSpPr>
-        <p:spPr/>
-        <p:txBody>
-          <a:bodyPr/>
-          <a:lstStyle/>
-          <a:p>
-            <a:fld id="{F7021451-1387-4CA6-816F-3879F97B5CBC}" type="slidenum">
-              <a:rPr lang="en-US"/>
-              <a:t>9</a:t>
             </a:fld>
             <a:endParaRPr lang="en-US"/>
           </a:p>
@@ -2531,7 +2353,7 @@
                 <a:ea typeface="Microsoft JhengHei" pitchFamily="34" charset="-122"/>
                 <a:cs typeface="Microsoft JhengHei" pitchFamily="34" charset="-120"/>
               </a:rPr>
-              <a:t>照順序做步驟 1～7，每一步都在電腦的瀏覽器裡完成</a:t>
+              <a:t>照順序做 3 大步，每一步都在電腦的瀏覽器裡完成</a:t>
             </a:r>
             <a:endParaRPr lang="en-US" sz="1300" dirty="0"/>
           </a:p>
@@ -2670,7 +2492,7 @@
                 <a:ea typeface="Microsoft JhengHei" pitchFamily="34" charset="-122"/>
                 <a:cs typeface="Microsoft JhengHei" pitchFamily="34" charset="-120"/>
               </a:rPr>
-              <a:t>7</a:t>
+              <a:t>3</a:t>
             </a:r>
             <a:endParaRPr lang="en-US" sz="2800" dirty="0"/>
           </a:p>
@@ -2712,7 +2534,7 @@
                 <a:ea typeface="Microsoft JhengHei" pitchFamily="34" charset="-122"/>
                 <a:cs typeface="Microsoft JhengHei" pitchFamily="34" charset="-120"/>
               </a:rPr>
-              <a:t>步驟 7 / 7</a:t>
+              <a:t>第三步　打開你的網址</a:t>
             </a:r>
             <a:endParaRPr lang="en-US" sz="1200" dirty="0"/>
           </a:p>
@@ -2754,7 +2576,7 @@
                 <a:ea typeface="Microsoft JhengHei" pitchFamily="34" charset="-122"/>
                 <a:cs typeface="Microsoft JhengHei" pitchFamily="34" charset="-120"/>
               </a:rPr>
-              <a:t>手機接上，加到主畫面</a:t>
+              <a:t>貼上存取碼和金鑰，加到主畫面</a:t>
             </a:r>
             <a:endParaRPr lang="en-US" sz="3000" dirty="0"/>
           </a:p>
@@ -2810,7 +2632,7 @@
         </p:nvSpPr>
         <p:spPr>
           <a:xfrm>
-            <a:off x="548640" y="1847088"/>
+            <a:off x="548640" y="1854200"/>
             <a:ext cx="329184" cy="329184"/>
           </a:xfrm>
           <a:prstGeom prst="ellipse">
@@ -2830,7 +2652,7 @@
         </p:nvSpPr>
         <p:spPr>
           <a:xfrm>
-            <a:off x="548640" y="1847088"/>
+            <a:off x="548640" y="1854200"/>
             <a:ext cx="329184" cy="329184"/>
           </a:xfrm>
           <a:prstGeom prst="rect">
@@ -2869,8 +2691,8 @@
         </p:nvSpPr>
         <p:spPr>
           <a:xfrm>
-            <a:off x="1060704" y="1828800"/>
-            <a:ext cx="6071616" cy="586740"/>
+            <a:off x="1060704" y="1841500"/>
+            <a:ext cx="6071616" cy="584200"/>
           </a:xfrm>
           <a:prstGeom prst="rect">
             <a:avLst/>
@@ -2897,14 +2719,248 @@
                 <a:ea typeface="Microsoft JhengHei" pitchFamily="34" charset="-122"/>
                 <a:cs typeface="Microsoft JhengHei" pitchFamily="34" charset="-120"/>
               </a:rPr>
-              <a:t>手機打開你的網址（例如 </a:t>
-            </a:r>
-            <a:pPr algn="l" indent="0" marL="0">
-              <a:lnSpc>
-                <a:spcPct val="112000"/>
-              </a:lnSpc>
-              <a:buNone/>
-            </a:pPr>
+              <a:t>電腦瀏覽器打開你的網址 → 按「</a:t>
+            </a:r>
+            <a:r>
+              <a:rPr lang="en-US" sz="1500" b="1" dirty="0">
+                <a:solidFill>
+                  <a:srgbClr val="1E1A26"/>
+                </a:solidFill>
+                <a:latin typeface="Microsoft JhengHei" pitchFamily="34" charset="0"/>
+                <a:ea typeface="Microsoft JhengHei" pitchFamily="34" charset="-122"/>
+                <a:cs typeface="Microsoft JhengHei" pitchFamily="34" charset="-120"/>
+              </a:rPr>
+              <a:t>貼上存取碼</a:t>
+            </a:r>
+            <a:r>
+              <a:rPr lang="en-US" sz="1500" dirty="0">
+                <a:solidFill>
+                  <a:srgbClr val="1E1A26"/>
+                </a:solidFill>
+                <a:latin typeface="Microsoft JhengHei" pitchFamily="34" charset="0"/>
+                <a:ea typeface="Microsoft JhengHei" pitchFamily="34" charset="-122"/>
+                <a:cs typeface="Microsoft JhengHei" pitchFamily="34" charset="-120"/>
+              </a:rPr>
+              <a:t>」</a:t>
+            </a:r>
+            <a:endParaRPr lang="en-US" sz="1500" dirty="0"/>
+          </a:p>
+          <a:p>
+            <a:pPr algn="l" indent="0" marL="0">
+              <a:lnSpc>
+                <a:spcPct val="112000"/>
+              </a:lnSpc>
+              <a:buNone/>
+            </a:pPr>
+            <a:r>
+              <a:rPr lang="en-US" sz="1500" dirty="0">
+                <a:solidFill>
+                  <a:srgbClr val="1E1A26"/>
+                </a:solidFill>
+                <a:latin typeface="Microsoft JhengHei" pitchFamily="34" charset="0"/>
+                <a:ea typeface="Microsoft JhengHei" pitchFamily="34" charset="-122"/>
+                <a:cs typeface="Microsoft JhengHei" pitchFamily="34" charset="-120"/>
+              </a:rPr>
+              <a:t xml:space="preserve">貼上 </a:t>
+            </a:r>
+            <a:r>
+              <a:rPr lang="en-US" sz="1500" b="1" dirty="0">
+                <a:solidFill>
+                  <a:srgbClr val="1E1A26"/>
+                </a:solidFill>
+                <a:latin typeface="Microsoft JhengHei" pitchFamily="34" charset="0"/>
+                <a:ea typeface="Microsoft JhengHei" pitchFamily="34" charset="-122"/>
+                <a:cs typeface="Microsoft JhengHei" pitchFamily="34" charset="-120"/>
+              </a:rPr>
+              <a:t>OWNER_KEY</a:t>
+            </a:r>
+            <a:r>
+              <a:rPr lang="en-US" sz="1500" dirty="0">
+                <a:solidFill>
+                  <a:srgbClr val="1E1A26"/>
+                </a:solidFill>
+                <a:latin typeface="Microsoft JhengHei" pitchFamily="34" charset="0"/>
+                <a:ea typeface="Microsoft JhengHei" pitchFamily="34" charset="-122"/>
+                <a:cs typeface="Microsoft JhengHei" pitchFamily="34" charset="-120"/>
+              </a:rPr>
+              <a:t xml:space="preserve"> →「</a:t>
+            </a:r>
+            <a:r>
+              <a:rPr lang="en-US" sz="1500" b="1" dirty="0">
+                <a:solidFill>
+                  <a:srgbClr val="1E1A26"/>
+                </a:solidFill>
+                <a:latin typeface="Microsoft JhengHei" pitchFamily="34" charset="0"/>
+                <a:ea typeface="Microsoft JhengHei" pitchFamily="34" charset="-122"/>
+                <a:cs typeface="Microsoft JhengHei" pitchFamily="34" charset="-120"/>
+              </a:rPr>
+              <a:t>儲存</a:t>
+            </a:r>
+            <a:r>
+              <a:rPr lang="en-US" sz="1500" dirty="0">
+                <a:solidFill>
+                  <a:srgbClr val="1E1A26"/>
+                </a:solidFill>
+                <a:latin typeface="Microsoft JhengHei" pitchFamily="34" charset="0"/>
+                <a:ea typeface="Microsoft JhengHei" pitchFamily="34" charset="-122"/>
+                <a:cs typeface="Microsoft JhengHei" pitchFamily="34" charset="-120"/>
+              </a:rPr>
+              <a:t>」</a:t>
+            </a:r>
+            <a:endParaRPr lang="en-US" sz="1500" dirty="0"/>
+          </a:p>
+        </p:txBody>
+      </p:sp>
+      <p:sp>
+        <p:nvSpPr>
+          <p:cNvPr id="10" name="Shape 8"/>
+          <p:cNvSpPr/>
+          <p:nvPr/>
+        </p:nvSpPr>
+        <p:spPr>
+          <a:xfrm>
+            <a:off x="548640" y="2578100"/>
+            <a:ext cx="329184" cy="329184"/>
+          </a:xfrm>
+          <a:prstGeom prst="ellipse">
+            <a:avLst/>
+          </a:prstGeom>
+          <a:solidFill>
+            <a:srgbClr val="F1EBFA"/>
+          </a:solidFill>
+          <a:ln/>
+        </p:spPr>
+      </p:sp>
+      <p:sp>
+        <p:nvSpPr>
+          <p:cNvPr id="11" name="Text 9"/>
+          <p:cNvSpPr txBox="1"/>
+          <p:nvPr/>
+        </p:nvSpPr>
+        <p:spPr>
+          <a:xfrm>
+            <a:off x="548640" y="2578100"/>
+            <a:ext cx="329184" cy="329184"/>
+          </a:xfrm>
+          <a:prstGeom prst="rect">
+            <a:avLst/>
+          </a:prstGeom>
+          <a:noFill/>
+          <a:ln/>
+        </p:spPr>
+        <p:txBody>
+          <a:bodyPr wrap="square" lIns="0" tIns="0" rIns="0" bIns="0" rtlCol="0" anchor="ctr"/>
+          <a:lstStyle/>
+          <a:p>
+            <a:pPr algn="ctr" indent="0" marL="0">
+              <a:buNone/>
+            </a:pPr>
+            <a:r>
+              <a:rPr lang="en-US" sz="1300" b="1" dirty="0">
+                <a:solidFill>
+                  <a:srgbClr val="6A35A8"/>
+                </a:solidFill>
+                <a:latin typeface="Microsoft JhengHei" pitchFamily="34" charset="0"/>
+                <a:ea typeface="Microsoft JhengHei" pitchFamily="34" charset="-122"/>
+                <a:cs typeface="Microsoft JhengHei" pitchFamily="34" charset="-120"/>
+              </a:rPr>
+              <a:t>2</a:t>
+            </a:r>
+            <a:endParaRPr lang="en-US" sz="1300" dirty="0"/>
+          </a:p>
+        </p:txBody>
+      </p:sp>
+      <p:sp>
+        <p:nvSpPr>
+          <p:cNvPr id="12" name="Text 10"/>
+          <p:cNvSpPr txBox="1"/>
+          <p:nvPr/>
+        </p:nvSpPr>
+        <p:spPr>
+          <a:xfrm>
+            <a:off x="1060704" y="2565400"/>
+            <a:ext cx="6071616" cy="584200"/>
+          </a:xfrm>
+          <a:prstGeom prst="rect">
+            <a:avLst/>
+          </a:prstGeom>
+          <a:noFill/>
+          <a:ln/>
+        </p:spPr>
+        <p:txBody>
+          <a:bodyPr wrap="square" lIns="0" tIns="0" rIns="0" bIns="0" rtlCol="0" anchor="t"/>
+          <a:lstStyle/>
+          <a:p>
+            <a:pPr algn="l" indent="0" marL="0">
+              <a:lnSpc>
+                <a:spcPct val="112000"/>
+              </a:lnSpc>
+              <a:buNone/>
+            </a:pPr>
+            <a:r>
+              <a:rPr lang="en-US" sz="1500" dirty="0">
+                <a:solidFill>
+                  <a:srgbClr val="1E1A26"/>
+                </a:solidFill>
+                <a:latin typeface="Microsoft JhengHei" pitchFamily="34" charset="0"/>
+                <a:ea typeface="Microsoft JhengHei" pitchFamily="34" charset="-122"/>
+                <a:cs typeface="Microsoft JhengHei" pitchFamily="34" charset="-120"/>
+              </a:rPr>
+              <a:t xml:space="preserve">申請辨識金鑰（免費）：打開 </a:t>
+            </a:r>
+            <a:r>
+              <a:rPr lang="en-US" sz="1500" b="1" dirty="0">
+                <a:solidFill>
+                  <a:srgbClr val="1E1A26"/>
+                </a:solidFill>
+                <a:latin typeface="Microsoft JhengHei" pitchFamily="34" charset="0"/>
+                <a:ea typeface="Microsoft JhengHei" pitchFamily="34" charset="-122"/>
+                <a:cs typeface="Microsoft JhengHei" pitchFamily="34" charset="-120"/>
+              </a:rPr>
+              <a:t>aistudio.google.com/apikey</a:t>
+            </a:r>
+            <a:endParaRPr lang="en-US" sz="1500" dirty="0"/>
+          </a:p>
+          <a:p>
+            <a:pPr algn="l" indent="0" marL="0">
+              <a:lnSpc>
+                <a:spcPct val="112000"/>
+              </a:lnSpc>
+              <a:buNone/>
+            </a:pPr>
+            <a:r>
+              <a:rPr lang="en-US" sz="1500" dirty="0">
+                <a:solidFill>
+                  <a:srgbClr val="1E1A26"/>
+                </a:solidFill>
+                <a:latin typeface="Microsoft JhengHei" pitchFamily="34" charset="0"/>
+                <a:ea typeface="Microsoft JhengHei" pitchFamily="34" charset="-122"/>
+                <a:cs typeface="Microsoft JhengHei" pitchFamily="34" charset="-120"/>
+              </a:rPr>
+              <a:t>按「</a:t>
+            </a:r>
+            <a:r>
+              <a:rPr lang="en-US" sz="1500" b="1" dirty="0">
+                <a:solidFill>
+                  <a:srgbClr val="1E1A26"/>
+                </a:solidFill>
+                <a:latin typeface="Microsoft JhengHei" pitchFamily="34" charset="0"/>
+                <a:ea typeface="Microsoft JhengHei" pitchFamily="34" charset="-122"/>
+                <a:cs typeface="Microsoft JhengHei" pitchFamily="34" charset="-120"/>
+              </a:rPr>
+              <a:t>建立 API 金鑰</a:t>
+            </a:r>
+            <a:r>
+              <a:rPr lang="en-US" sz="1500" dirty="0">
+                <a:solidFill>
+                  <a:srgbClr val="1E1A26"/>
+                </a:solidFill>
+                <a:latin typeface="Microsoft JhengHei" pitchFamily="34" charset="0"/>
+                <a:ea typeface="Microsoft JhengHei" pitchFamily="34" charset="-122"/>
+                <a:cs typeface="Microsoft JhengHei" pitchFamily="34" charset="-120"/>
+              </a:rPr>
+              <a:t xml:space="preserve">」，複製 </a:t>
+            </a:r>
             <a:r>
               <a:rPr lang="en-US" sz="1500" b="1" dirty="0">
                 <a:solidFill>
@@ -2914,14 +2970,8 @@
                 <a:ea typeface="Courier New" pitchFamily="34" charset="-122"/>
                 <a:cs typeface="Courier New" pitchFamily="34" charset="-120"/>
               </a:rPr>
-              <a:t>https://my-tickets.pages.dev</a:t>
-            </a:r>
-            <a:pPr algn="l" indent="0" marL="0">
-              <a:lnSpc>
-                <a:spcPct val="112000"/>
-              </a:lnSpc>
-              <a:buNone/>
-            </a:pPr>
+              <a:t>AIza</a:t>
+            </a:r>
             <a:r>
               <a:rPr lang="en-US" sz="1500" dirty="0">
                 <a:solidFill>
@@ -2931,7 +2981,7 @@
                 <a:ea typeface="Microsoft JhengHei" pitchFamily="34" charset="-122"/>
                 <a:cs typeface="Microsoft JhengHei" pitchFamily="34" charset="-120"/>
               </a:rPr>
-              <a:t>），一開始會是示範模式</a:t>
+              <a:t xml:space="preserve"> 開頭那串</a:t>
             </a:r>
             <a:endParaRPr lang="en-US" sz="1500" dirty="0"/>
           </a:p>
@@ -2939,13 +2989,13 @@
       </p:sp>
       <p:sp>
         <p:nvSpPr>
-          <p:cNvPr id="10" name="Shape 8"/>
+          <p:cNvPr id="13" name="Shape 11"/>
           <p:cNvSpPr/>
           <p:nvPr/>
         </p:nvSpPr>
         <p:spPr>
           <a:xfrm>
-            <a:off x="548640" y="2570988"/>
+            <a:off x="548640" y="3302000"/>
             <a:ext cx="329184" cy="329184"/>
           </a:xfrm>
           <a:prstGeom prst="ellipse">
@@ -2959,13 +3009,13 @@
       </p:sp>
       <p:sp>
         <p:nvSpPr>
-          <p:cNvPr id="11" name="Text 9"/>
-          <p:cNvSpPr txBox="1"/>
-          <p:nvPr/>
-        </p:nvSpPr>
-        <p:spPr>
-          <a:xfrm>
-            <a:off x="548640" y="2570988"/>
+          <p:cNvPr id="14" name="Text 12"/>
+          <p:cNvSpPr txBox="1"/>
+          <p:nvPr/>
+        </p:nvSpPr>
+        <p:spPr>
+          <a:xfrm>
+            <a:off x="548640" y="3302000"/>
             <a:ext cx="329184" cy="329184"/>
           </a:xfrm>
           <a:prstGeom prst="rect">
@@ -2990,7 +3040,7 @@
                 <a:ea typeface="Microsoft JhengHei" pitchFamily="34" charset="-122"/>
                 <a:cs typeface="Microsoft JhengHei" pitchFamily="34" charset="-120"/>
               </a:rPr>
-              <a:t>2</a:t>
+              <a:t>3</a:t>
             </a:r>
             <a:endParaRPr lang="en-US" sz="1300" dirty="0"/>
           </a:p>
@@ -2998,14 +3048,14 @@
       </p:sp>
       <p:sp>
         <p:nvSpPr>
-          <p:cNvPr id="12" name="Text 10"/>
-          <p:cNvSpPr txBox="1"/>
-          <p:nvPr/>
-        </p:nvSpPr>
-        <p:spPr>
-          <a:xfrm>
-            <a:off x="1060704" y="2552700"/>
-            <a:ext cx="6071616" cy="586740"/>
+          <p:cNvPr id="15" name="Text 13"/>
+          <p:cNvSpPr txBox="1"/>
+          <p:nvPr/>
+        </p:nvSpPr>
+        <p:spPr>
+          <a:xfrm>
+            <a:off x="1060704" y="3289300"/>
+            <a:ext cx="6071616" cy="584200"/>
           </a:xfrm>
           <a:prstGeom prst="rect">
             <a:avLst/>
@@ -3032,14 +3082,8 @@
                 <a:ea typeface="Microsoft JhengHei" pitchFamily="34" charset="-122"/>
                 <a:cs typeface="Microsoft JhengHei" pitchFamily="34" charset="-120"/>
               </a:rPr>
-              <a:t>右上齒輪 →「</a:t>
-            </a:r>
-            <a:pPr algn="l" indent="0" marL="0">
-              <a:lnSpc>
-                <a:spcPct val="112000"/>
-              </a:lnSpc>
-              <a:buNone/>
-            </a:pPr>
+              <a:t>回到 App 貼進「</a:t>
+            </a:r>
             <a:r>
               <a:rPr lang="en-US" sz="1500" b="1" dirty="0">
                 <a:solidFill>
@@ -3049,14 +3093,8 @@
                 <a:ea typeface="Microsoft JhengHei" pitchFamily="34" charset="-122"/>
                 <a:cs typeface="Microsoft JhengHei" pitchFamily="34" charset="-120"/>
               </a:rPr>
-              <a:t>後端與存取碼</a:t>
-            </a:r>
-            <a:pPr algn="l" indent="0" marL="0">
-              <a:lnSpc>
-                <a:spcPct val="112000"/>
-              </a:lnSpc>
-              <a:buNone/>
-            </a:pPr>
+              <a:t>辨識金鑰</a:t>
+            </a:r>
             <a:r>
               <a:rPr lang="en-US" sz="1500" dirty="0">
                 <a:solidFill>
@@ -3066,14 +3104,8 @@
                 <a:ea typeface="Microsoft JhengHei" pitchFamily="34" charset="-122"/>
                 <a:cs typeface="Microsoft JhengHei" pitchFamily="34" charset="-120"/>
               </a:rPr>
-              <a:t>」：後端網址貼 </a:t>
-            </a:r>
-            <a:pPr algn="l" indent="0" marL="0">
-              <a:lnSpc>
-                <a:spcPct val="112000"/>
-              </a:lnSpc>
-              <a:buNone/>
-            </a:pPr>
+              <a:t>」→「</a:t>
+            </a:r>
             <a:r>
               <a:rPr lang="en-US" sz="1500" b="1" dirty="0">
                 <a:solidFill>
@@ -3083,14 +3115,8 @@
                 <a:ea typeface="Microsoft JhengHei" pitchFamily="34" charset="-122"/>
                 <a:cs typeface="Microsoft JhengHei" pitchFamily="34" charset="-120"/>
               </a:rPr>
-              <a:t>/exec 網址</a:t>
-            </a:r>
-            <a:pPr algn="l" indent="0" marL="0">
-              <a:lnSpc>
-                <a:spcPct val="112000"/>
-              </a:lnSpc>
-              <a:buNone/>
-            </a:pPr>
+              <a:t>儲存金鑰</a:t>
+            </a:r>
             <a:r>
               <a:rPr lang="en-US" sz="1500" dirty="0">
                 <a:solidFill>
@@ -3100,16 +3126,19 @@
                 <a:ea typeface="Microsoft JhengHei" pitchFamily="34" charset="-122"/>
                 <a:cs typeface="Microsoft JhengHei" pitchFamily="34" charset="-120"/>
               </a:rPr>
-              <a:t>，存取碼貼 </a:t>
-            </a:r>
-            <a:pPr algn="l" indent="0" marL="0">
-              <a:lnSpc>
-                <a:spcPct val="112000"/>
-              </a:lnSpc>
-              <a:buNone/>
-            </a:pPr>
-            <a:r>
-              <a:rPr lang="en-US" sz="1500" b="1" dirty="0">
+              <a:t>」</a:t>
+            </a:r>
+            <a:endParaRPr lang="en-US" sz="1500" dirty="0"/>
+          </a:p>
+          <a:p>
+            <a:pPr algn="l" indent="0" marL="0">
+              <a:lnSpc>
+                <a:spcPct val="112000"/>
+              </a:lnSpc>
+              <a:buNone/>
+            </a:pPr>
+            <a:r>
+              <a:rPr lang="en-US" sz="1500" dirty="0">
                 <a:solidFill>
                   <a:srgbClr val="1E1A26"/>
                 </a:solidFill>
@@ -3117,7 +3146,7 @@
                 <a:ea typeface="Microsoft JhengHei" pitchFamily="34" charset="-122"/>
                 <a:cs typeface="Microsoft JhengHei" pitchFamily="34" charset="-120"/>
               </a:rPr>
-              <a:t>OWNER_KEY</a:t>
+              <a:t>（想用 Claude 也可以：在同一格選 Claude）</a:t>
             </a:r>
             <a:endParaRPr lang="en-US" sz="1500" dirty="0"/>
           </a:p>
@@ -3125,13 +3154,13 @@
       </p:sp>
       <p:sp>
         <p:nvSpPr>
-          <p:cNvPr id="13" name="Shape 11"/>
+          <p:cNvPr id="16" name="Shape 14"/>
           <p:cNvSpPr/>
           <p:nvPr/>
         </p:nvSpPr>
         <p:spPr>
           <a:xfrm>
-            <a:off x="548640" y="3294888"/>
+            <a:off x="548640" y="4025900"/>
             <a:ext cx="329184" cy="329184"/>
           </a:xfrm>
           <a:prstGeom prst="ellipse">
@@ -3145,13 +3174,13 @@
       </p:sp>
       <p:sp>
         <p:nvSpPr>
-          <p:cNvPr id="14" name="Text 12"/>
-          <p:cNvSpPr txBox="1"/>
-          <p:nvPr/>
-        </p:nvSpPr>
-        <p:spPr>
-          <a:xfrm>
-            <a:off x="548640" y="3294888"/>
+          <p:cNvPr id="17" name="Text 15"/>
+          <p:cNvSpPr txBox="1"/>
+          <p:nvPr/>
+        </p:nvSpPr>
+        <p:spPr>
+          <a:xfrm>
+            <a:off x="548640" y="4025900"/>
             <a:ext cx="329184" cy="329184"/>
           </a:xfrm>
           <a:prstGeom prst="rect">
@@ -3176,7 +3205,7 @@
                 <a:ea typeface="Microsoft JhengHei" pitchFamily="34" charset="-122"/>
                 <a:cs typeface="Microsoft JhengHei" pitchFamily="34" charset="-120"/>
               </a:rPr>
-              <a:t>3</a:t>
+              <a:t>4</a:t>
             </a:r>
             <a:endParaRPr lang="en-US" sz="1300" dirty="0"/>
           </a:p>
@@ -3184,14 +3213,14 @@
       </p:sp>
       <p:sp>
         <p:nvSpPr>
-          <p:cNvPr id="15" name="Text 13"/>
-          <p:cNvSpPr txBox="1"/>
-          <p:nvPr/>
-        </p:nvSpPr>
-        <p:spPr>
-          <a:xfrm>
-            <a:off x="1060704" y="3276600"/>
-            <a:ext cx="6071616" cy="316230"/>
+          <p:cNvPr id="18" name="Text 16"/>
+          <p:cNvSpPr txBox="1"/>
+          <p:nvPr/>
+        </p:nvSpPr>
+        <p:spPr>
+          <a:xfrm>
+            <a:off x="1060704" y="4013200"/>
+            <a:ext cx="6071616" cy="584200"/>
           </a:xfrm>
           <a:prstGeom prst="rect">
             <a:avLst/>
@@ -3218,14 +3247,8 @@
                 <a:ea typeface="Microsoft JhengHei" pitchFamily="34" charset="-122"/>
                 <a:cs typeface="Microsoft JhengHei" pitchFamily="34" charset="-120"/>
               </a:rPr>
-              <a:t>按「</a:t>
-            </a:r>
-            <a:pPr algn="l" indent="0" marL="0">
-              <a:lnSpc>
-                <a:spcPct val="112000"/>
-              </a:lnSpc>
-              <a:buNone/>
-            </a:pPr>
+              <a:t>電腦上會出現「</a:t>
+            </a:r>
             <a:r>
               <a:rPr lang="en-US" sz="1500" b="1" dirty="0">
                 <a:solidFill>
@@ -3235,14 +3258,8 @@
                 <a:ea typeface="Microsoft JhengHei" pitchFamily="34" charset="-122"/>
                 <a:cs typeface="Microsoft JhengHei" pitchFamily="34" charset="-120"/>
               </a:rPr>
-              <a:t>測試連線</a:t>
-            </a:r>
-            <a:pPr algn="l" indent="0" marL="0">
-              <a:lnSpc>
-                <a:spcPct val="112000"/>
-              </a:lnSpc>
-              <a:buNone/>
-            </a:pPr>
+              <a:t>換到另一台裝置</a:t>
+            </a:r>
             <a:r>
               <a:rPr lang="en-US" sz="1500" dirty="0">
                 <a:solidFill>
@@ -3252,16 +3269,19 @@
                 <a:ea typeface="Microsoft JhengHei" pitchFamily="34" charset="-122"/>
                 <a:cs typeface="Microsoft JhengHei" pitchFamily="34" charset="-120"/>
               </a:rPr>
-              <a:t>」，成功後按「</a:t>
-            </a:r>
-            <a:pPr algn="l" indent="0" marL="0">
-              <a:lnSpc>
-                <a:spcPct val="112000"/>
-              </a:lnSpc>
-              <a:buNone/>
-            </a:pPr>
-            <a:r>
-              <a:rPr lang="en-US" sz="1500" b="1" dirty="0">
+              <a:t>」的 QR</a:t>
+            </a:r>
+            <a:endParaRPr lang="en-US" sz="1500" dirty="0"/>
+          </a:p>
+          <a:p>
+            <a:pPr algn="l" indent="0" marL="0">
+              <a:lnSpc>
+                <a:spcPct val="112000"/>
+              </a:lnSpc>
+              <a:buNone/>
+            </a:pPr>
+            <a:r>
+              <a:rPr lang="en-US" sz="1500" dirty="0">
                 <a:solidFill>
                   <a:srgbClr val="1E1A26"/>
                 </a:solidFill>
@@ -3269,24 +3289,7 @@
                 <a:ea typeface="Microsoft JhengHei" pitchFamily="34" charset="-122"/>
                 <a:cs typeface="Microsoft JhengHei" pitchFamily="34" charset="-120"/>
               </a:rPr>
-              <a:t>儲存</a:t>
-            </a:r>
-            <a:pPr algn="l" indent="0" marL="0">
-              <a:lnSpc>
-                <a:spcPct val="112000"/>
-              </a:lnSpc>
-              <a:buNone/>
-            </a:pPr>
-            <a:r>
-              <a:rPr lang="en-US" sz="1500" dirty="0">
-                <a:solidFill>
-                  <a:srgbClr val="1E1A26"/>
-                </a:solidFill>
-                <a:latin typeface="Microsoft JhengHei" pitchFamily="34" charset="0"/>
-                <a:ea typeface="Microsoft JhengHei" pitchFamily="34" charset="-122"/>
-                <a:cs typeface="Microsoft JhengHei" pitchFamily="34" charset="-120"/>
-              </a:rPr>
-              <a:t>」</a:t>
+              <a:t>用手機掃一下，手機就設定好了</a:t>
             </a:r>
             <a:endParaRPr lang="en-US" sz="1500" dirty="0"/>
           </a:p>
@@ -3294,13 +3297,13 @@
       </p:sp>
       <p:sp>
         <p:nvSpPr>
-          <p:cNvPr id="16" name="Shape 14"/>
+          <p:cNvPr id="19" name="Shape 17"/>
           <p:cNvSpPr/>
           <p:nvPr/>
         </p:nvSpPr>
         <p:spPr>
           <a:xfrm>
-            <a:off x="548640" y="3806952"/>
+            <a:off x="548640" y="4749800"/>
             <a:ext cx="329184" cy="329184"/>
           </a:xfrm>
           <a:prstGeom prst="ellipse">
@@ -3314,13 +3317,13 @@
       </p:sp>
       <p:sp>
         <p:nvSpPr>
-          <p:cNvPr id="17" name="Text 15"/>
-          <p:cNvSpPr txBox="1"/>
-          <p:nvPr/>
-        </p:nvSpPr>
-        <p:spPr>
-          <a:xfrm>
-            <a:off x="548640" y="3806952"/>
+          <p:cNvPr id="20" name="Text 18"/>
+          <p:cNvSpPr txBox="1"/>
+          <p:nvPr/>
+        </p:nvSpPr>
+        <p:spPr>
+          <a:xfrm>
+            <a:off x="548640" y="4749800"/>
             <a:ext cx="329184" cy="329184"/>
           </a:xfrm>
           <a:prstGeom prst="rect">
@@ -3345,7 +3348,7 @@
                 <a:ea typeface="Microsoft JhengHei" pitchFamily="34" charset="-122"/>
                 <a:cs typeface="Microsoft JhengHei" pitchFamily="34" charset="-120"/>
               </a:rPr>
-              <a:t>4</a:t>
+              <a:t>5</a:t>
             </a:r>
             <a:endParaRPr lang="en-US" sz="1300" dirty="0"/>
           </a:p>
@@ -3353,14 +3356,14 @@
       </p:sp>
       <p:sp>
         <p:nvSpPr>
-          <p:cNvPr id="18" name="Text 16"/>
-          <p:cNvSpPr txBox="1"/>
-          <p:nvPr/>
-        </p:nvSpPr>
-        <p:spPr>
-          <a:xfrm>
-            <a:off x="1060704" y="3788664"/>
-            <a:ext cx="6071616" cy="586740"/>
+          <p:cNvPr id="21" name="Text 19"/>
+          <p:cNvSpPr txBox="1"/>
+          <p:nvPr/>
+        </p:nvSpPr>
+        <p:spPr>
+          <a:xfrm>
+            <a:off x="1060704" y="4737100"/>
+            <a:ext cx="6071616" cy="584200"/>
           </a:xfrm>
           <a:prstGeom prst="rect">
             <a:avLst/>
@@ -3387,14 +3390,8 @@
                 <a:ea typeface="Microsoft JhengHei" pitchFamily="34" charset="-122"/>
                 <a:cs typeface="Microsoft JhengHei" pitchFamily="34" charset="-120"/>
               </a:rPr>
-              <a:t>加到主畫面：iPhone 用 </a:t>
-            </a:r>
-            <a:pPr algn="l" indent="0" marL="0">
-              <a:lnSpc>
-                <a:spcPct val="112000"/>
-              </a:lnSpc>
-              <a:buNone/>
-            </a:pPr>
+              <a:t xml:space="preserve">加到主畫面：iPhone 用 </a:t>
+            </a:r>
             <a:r>
               <a:rPr lang="en-US" sz="1500" b="1" dirty="0">
                 <a:solidFill>
@@ -3406,12 +3403,6 @@
               </a:rPr>
               <a:t>Safari</a:t>
             </a:r>
-            <a:pPr algn="l" indent="0" marL="0">
-              <a:lnSpc>
-                <a:spcPct val="112000"/>
-              </a:lnSpc>
-              <a:buNone/>
-            </a:pPr>
             <a:r>
               <a:rPr lang="en-US" sz="1500" dirty="0">
                 <a:solidFill>
@@ -3421,14 +3412,28 @@
                 <a:ea typeface="Microsoft JhengHei" pitchFamily="34" charset="-122"/>
                 <a:cs typeface="Microsoft JhengHei" pitchFamily="34" charset="-120"/>
               </a:rPr>
-              <a:t> 的分享鈕 →「加入主畫面」；Android 用 </a:t>
-            </a:r>
-            <a:pPr algn="l" indent="0" marL="0">
-              <a:lnSpc>
-                <a:spcPct val="112000"/>
-              </a:lnSpc>
-              <a:buNone/>
-            </a:pPr>
+              <a:t xml:space="preserve"> 的分享鈕 →「加入主畫面」</a:t>
+            </a:r>
+            <a:endParaRPr lang="en-US" sz="1500" dirty="0"/>
+          </a:p>
+          <a:p>
+            <a:pPr algn="l" indent="0" marL="0">
+              <a:lnSpc>
+                <a:spcPct val="112000"/>
+              </a:lnSpc>
+              <a:buNone/>
+            </a:pPr>
+            <a:r>
+              <a:rPr lang="en-US" sz="1500" dirty="0">
+                <a:solidFill>
+                  <a:srgbClr val="1E1A26"/>
+                </a:solidFill>
+                <a:latin typeface="Microsoft JhengHei" pitchFamily="34" charset="0"/>
+                <a:ea typeface="Microsoft JhengHei" pitchFamily="34" charset="-122"/>
+                <a:cs typeface="Microsoft JhengHei" pitchFamily="34" charset="-120"/>
+              </a:rPr>
+              <a:t xml:space="preserve">Android 用 </a:t>
+            </a:r>
             <a:r>
               <a:rPr lang="en-US" sz="1500" b="1" dirty="0">
                 <a:solidFill>
@@ -3440,12 +3445,6 @@
               </a:rPr>
               <a:t>Chrome</a:t>
             </a:r>
-            <a:pPr algn="l" indent="0" marL="0">
-              <a:lnSpc>
-                <a:spcPct val="112000"/>
-              </a:lnSpc>
-              <a:buNone/>
-            </a:pPr>
             <a:r>
               <a:rPr lang="en-US" sz="1500" dirty="0">
                 <a:solidFill>
@@ -3455,7 +3454,7 @@
                 <a:ea typeface="Microsoft JhengHei" pitchFamily="34" charset="-122"/>
                 <a:cs typeface="Microsoft JhengHei" pitchFamily="34" charset="-120"/>
               </a:rPr>
-              <a:t> 選單 →「安裝應用程式」</a:t>
+              <a:t xml:space="preserve"> 選單 →「安裝應用程式」</a:t>
             </a:r>
             <a:endParaRPr lang="en-US" sz="1500" dirty="0"/>
           </a:p>
@@ -3463,17 +3462,61 @@
       </p:sp>
       <p:sp>
         <p:nvSpPr>
-          <p:cNvPr id="19" name="Shape 17"/>
+          <p:cNvPr id="23" name="Text 20"/>
+          <p:cNvSpPr txBox="1"/>
+          <p:nvPr/>
+        </p:nvSpPr>
+        <p:spPr>
+          <a:xfrm>
+            <a:off x="7632700" y="4927600"/>
+            <a:ext cx="4025900" cy="279400"/>
+          </a:xfrm>
+          <a:prstGeom prst="rect">
+            <a:avLst/>
+          </a:prstGeom>
+          <a:noFill/>
+          <a:ln/>
+        </p:spPr>
+        <p:txBody>
+          <a:bodyPr wrap="square" lIns="0" tIns="0" rIns="0" bIns="0" rtlCol="0" anchor="t"/>
+          <a:lstStyle/>
+          <a:p>
+            <a:pPr algn="ctr" indent="0" marL="0">
+              <a:lnSpc>
+                <a:spcPct val="112000"/>
+              </a:lnSpc>
+              <a:buNone/>
+            </a:pPr>
+            <a:r>
+              <a:rPr lang="en-US" sz="1200" dirty="0">
+                <a:solidFill>
+                  <a:srgbClr val="5F586C"/>
+                </a:solidFill>
+                <a:latin typeface="Microsoft JhengHei" pitchFamily="34" charset="0"/>
+                <a:ea typeface="Microsoft JhengHei" pitchFamily="34" charset="-122"/>
+                <a:cs typeface="Microsoft JhengHei" pitchFamily="34" charset="-120"/>
+              </a:rPr>
+              <a:t>第一次打開時，App 會一步一步帶你做</a:t>
+            </a:r>
+            <a:endParaRPr lang="en-US" sz="1200" dirty="0"/>
+          </a:p>
+        </p:txBody>
+      </p:sp>
+      <p:sp>
+        <p:nvSpPr>
+          <p:cNvPr id="101" name="Card Bg"/>
           <p:cNvSpPr/>
           <p:nvPr/>
         </p:nvSpPr>
         <p:spPr>
           <a:xfrm>
-            <a:off x="548640" y="4530852"/>
-            <a:ext cx="329184" cy="329184"/>
-          </a:xfrm>
-          <a:prstGeom prst="ellipse">
-            <a:avLst/>
+            <a:off x="7635240" y="1874520"/>
+            <a:ext cx="4023360" cy="2926080"/>
+          </a:xfrm>
+          <a:prstGeom prst="roundRect">
+            <a:avLst>
+              <a:gd name="adj" fmla="val 5000"/>
+            </a:avLst>
           </a:prstGeom>
           <a:solidFill>
             <a:srgbClr val="F1EBFA"/>
@@ -3483,14 +3526,83 @@
       </p:sp>
       <p:sp>
         <p:nvSpPr>
-          <p:cNvPr id="20" name="Text 18"/>
-          <p:cNvSpPr txBox="1"/>
-          <p:nvPr/>
-        </p:nvSpPr>
-        <p:spPr>
-          <a:xfrm>
-            <a:off x="548640" y="4530852"/>
-            <a:ext cx="329184" cy="329184"/>
+          <p:cNvPr id="102" name="Card Title"/>
+          <p:cNvSpPr txBox="1"/>
+          <p:nvPr/>
+        </p:nvSpPr>
+        <p:spPr>
+          <a:xfrm>
+            <a:off x="7909560" y="2057400"/>
+            <a:ext cx="3474720" cy="320040"/>
+          </a:xfrm>
+          <a:prstGeom prst="rect">
+            <a:avLst/>
+          </a:prstGeom>
+          <a:noFill/>
+          <a:ln/>
+        </p:spPr>
+        <p:txBody>
+          <a:bodyPr wrap="square" lIns="0" tIns="0" rIns="0" bIns="0" rtlCol="0" anchor="t"/>
+          <a:lstStyle/>
+          <a:p>
+            <a:pPr algn="l" indent="0" marL="0">
+              <a:lnSpc>
+                <a:spcPct val="112000"/>
+              </a:lnSpc>
+              <a:buNone/>
+            </a:pPr>
+            <a:r>
+              <a:rPr lang="en-US" sz="1400" b="1" dirty="0">
+                <a:solidFill>
+                  <a:srgbClr val="6A35A8"/>
+                </a:solidFill>
+                <a:latin typeface="Microsoft JhengHei" pitchFamily="34" charset="0"/>
+                <a:ea typeface="Microsoft JhengHei" pitchFamily="34" charset="-122"/>
+                <a:cs typeface="Microsoft JhengHei" pitchFamily="34" charset="-120"/>
+              </a:rPr>
+              <a:t>打開網址後會依序看到</a:t>
+            </a:r>
+            <a:endParaRPr lang="en-US" sz="1400" dirty="0"/>
+          </a:p>
+        </p:txBody>
+      </p:sp>
+      <p:sp>
+        <p:nvSpPr>
+          <p:cNvPr id="110" name="Row0"/>
+          <p:cNvSpPr/>
+          <p:nvPr/>
+        </p:nvSpPr>
+        <p:spPr>
+          <a:xfrm>
+            <a:off x="7909560" y="2514600"/>
+            <a:ext cx="3474720" cy="603504"/>
+          </a:xfrm>
+          <a:prstGeom prst="roundRect">
+            <a:avLst>
+              <a:gd name="adj" fmla="val 12121"/>
+            </a:avLst>
+          </a:prstGeom>
+          <a:solidFill>
+            <a:srgbClr val="FFFFFF"/>
+          </a:solidFill>
+          <a:ln w="12700">
+            <a:solidFill>
+              <a:srgbClr val="E4D9F5"/>
+            </a:solidFill>
+            <a:prstDash val="solid"/>
+          </a:ln>
+        </p:spPr>
+      </p:sp>
+      <p:sp>
+        <p:nvSpPr>
+          <p:cNvPr id="111" name="Row0 Key"/>
+          <p:cNvSpPr txBox="1"/>
+          <p:nvPr/>
+        </p:nvSpPr>
+        <p:spPr>
+          <a:xfrm>
+            <a:off x="8092440" y="2514600"/>
+            <a:ext cx="1371600" cy="603504"/>
           </a:xfrm>
           <a:prstGeom prst="rect">
             <a:avLst/>
@@ -3502,19 +3614,22 @@
           <a:bodyPr wrap="square" lIns="0" tIns="0" rIns="0" bIns="0" rtlCol="0" anchor="ctr"/>
           <a:lstStyle/>
           <a:p>
-            <a:pPr algn="ctr" indent="0" marL="0">
-              <a:buNone/>
-            </a:pPr>
-            <a:r>
-              <a:rPr lang="en-US" sz="1300" b="1" dirty="0">
-                <a:solidFill>
-                  <a:srgbClr val="6A35A8"/>
-                </a:solidFill>
-                <a:latin typeface="Microsoft JhengHei" pitchFamily="34" charset="0"/>
-                <a:ea typeface="Microsoft JhengHei" pitchFamily="34" charset="-122"/>
-                <a:cs typeface="Microsoft JhengHei" pitchFamily="34" charset="-120"/>
-              </a:rPr>
-              <a:t>5</a:t>
+            <a:pPr algn="l" indent="0" marL="0">
+              <a:lnSpc>
+                <a:spcPct val="112000"/>
+              </a:lnSpc>
+              <a:buNone/>
+            </a:pPr>
+            <a:r>
+              <a:rPr lang="en-US" sz="1300" dirty="0">
+                <a:solidFill>
+                  <a:srgbClr val="5F586C"/>
+                </a:solidFill>
+                <a:latin typeface="Microsoft JhengHei" pitchFamily="34" charset="0"/>
+                <a:ea typeface="Microsoft JhengHei" pitchFamily="34" charset="-122"/>
+                <a:cs typeface="Microsoft JhengHei" pitchFamily="34" charset="-120"/>
+              </a:rPr>
+              <a:t>貼上存取碼</a:t>
             </a:r>
             <a:endParaRPr lang="en-US" sz="1300" dirty="0"/>
           </a:p>
@@ -3522,33 +3637,33 @@
       </p:sp>
       <p:sp>
         <p:nvSpPr>
-          <p:cNvPr id="21" name="Text 19"/>
-          <p:cNvSpPr txBox="1"/>
-          <p:nvPr/>
-        </p:nvSpPr>
-        <p:spPr>
-          <a:xfrm>
-            <a:off x="1060704" y="4512564"/>
-            <a:ext cx="6071616" cy="586740"/>
-          </a:xfrm>
-          <a:prstGeom prst="rect">
-            <a:avLst/>
-          </a:prstGeom>
-          <a:noFill/>
-          <a:ln/>
-        </p:spPr>
-        <p:txBody>
-          <a:bodyPr wrap="square" lIns="0" tIns="0" rIns="0" bIns="0" rtlCol="0" anchor="t"/>
-          <a:lstStyle/>
-          <a:p>
-            <a:pPr algn="l" indent="0" marL="0">
-              <a:lnSpc>
-                <a:spcPct val="112000"/>
-              </a:lnSpc>
-              <a:buNone/>
-            </a:pPr>
-            <a:r>
-              <a:rPr lang="en-US" sz="1500" dirty="0">
+          <p:cNvPr id="112" name="Row0 Val"/>
+          <p:cNvSpPr txBox="1"/>
+          <p:nvPr/>
+        </p:nvSpPr>
+        <p:spPr>
+          <a:xfrm>
+            <a:off x="9464040" y="2514600"/>
+            <a:ext cx="1737360" cy="603504"/>
+          </a:xfrm>
+          <a:prstGeom prst="rect">
+            <a:avLst/>
+          </a:prstGeom>
+          <a:noFill/>
+          <a:ln/>
+        </p:spPr>
+        <p:txBody>
+          <a:bodyPr wrap="square" lIns="0" tIns="0" rIns="0" bIns="0" rtlCol="0" anchor="ctr"/>
+          <a:lstStyle/>
+          <a:p>
+            <a:pPr algn="l" indent="0" marL="0">
+              <a:lnSpc>
+                <a:spcPct val="112000"/>
+              </a:lnSpc>
+              <a:buNone/>
+            </a:pPr>
+            <a:r>
+              <a:rPr lang="en-US" sz="1600" b="1" dirty="0">
                 <a:solidFill>
                   <a:srgbClr val="1E1A26"/>
                 </a:solidFill>
@@ -3556,16 +3671,110 @@
                 <a:ea typeface="Microsoft JhengHei" pitchFamily="34" charset="-122"/>
                 <a:cs typeface="Microsoft JhengHei" pitchFamily="34" charset="-120"/>
               </a:rPr>
-              <a:t>家人的手機：在設定的「</a:t>
-            </a:r>
-            <a:pPr algn="l" indent="0" marL="0">
-              <a:lnSpc>
-                <a:spcPct val="112000"/>
-              </a:lnSpc>
-              <a:buNone/>
-            </a:pPr>
-            <a:r>
-              <a:rPr lang="en-US" sz="1500" b="1" dirty="0">
+              <a:t>OWNER_KEY</a:t>
+            </a:r>
+            <a:endParaRPr lang="en-US" sz="1600" dirty="0"/>
+          </a:p>
+        </p:txBody>
+      </p:sp>
+      <p:sp>
+        <p:nvSpPr>
+          <p:cNvPr id="113" name="Row1"/>
+          <p:cNvSpPr/>
+          <p:nvPr/>
+        </p:nvSpPr>
+        <p:spPr>
+          <a:xfrm>
+            <a:off x="7909560" y="3225800"/>
+            <a:ext cx="3474720" cy="603504"/>
+          </a:xfrm>
+          <a:prstGeom prst="roundRect">
+            <a:avLst>
+              <a:gd name="adj" fmla="val 12121"/>
+            </a:avLst>
+          </a:prstGeom>
+          <a:solidFill>
+            <a:srgbClr val="FFFFFF"/>
+          </a:solidFill>
+          <a:ln w="12700">
+            <a:solidFill>
+              <a:srgbClr val="E4D9F5"/>
+            </a:solidFill>
+            <a:prstDash val="solid"/>
+          </a:ln>
+        </p:spPr>
+      </p:sp>
+      <p:sp>
+        <p:nvSpPr>
+          <p:cNvPr id="114" name="Row1 Key"/>
+          <p:cNvSpPr txBox="1"/>
+          <p:nvPr/>
+        </p:nvSpPr>
+        <p:spPr>
+          <a:xfrm>
+            <a:off x="8092440" y="3225800"/>
+            <a:ext cx="1371600" cy="603504"/>
+          </a:xfrm>
+          <a:prstGeom prst="rect">
+            <a:avLst/>
+          </a:prstGeom>
+          <a:noFill/>
+          <a:ln/>
+        </p:spPr>
+        <p:txBody>
+          <a:bodyPr wrap="square" lIns="0" tIns="0" rIns="0" bIns="0" rtlCol="0" anchor="ctr"/>
+          <a:lstStyle/>
+          <a:p>
+            <a:pPr algn="l" indent="0" marL="0">
+              <a:lnSpc>
+                <a:spcPct val="112000"/>
+              </a:lnSpc>
+              <a:buNone/>
+            </a:pPr>
+            <a:r>
+              <a:rPr lang="en-US" sz="1300" dirty="0">
+                <a:solidFill>
+                  <a:srgbClr val="5F586C"/>
+                </a:solidFill>
+                <a:latin typeface="Microsoft JhengHei" pitchFamily="34" charset="0"/>
+                <a:ea typeface="Microsoft JhengHei" pitchFamily="34" charset="-122"/>
+                <a:cs typeface="Microsoft JhengHei" pitchFamily="34" charset="-120"/>
+              </a:rPr>
+              <a:t>辨識金鑰</a:t>
+            </a:r>
+            <a:endParaRPr lang="en-US" sz="1300" dirty="0"/>
+          </a:p>
+        </p:txBody>
+      </p:sp>
+      <p:sp>
+        <p:nvSpPr>
+          <p:cNvPr id="115" name="Row1 Val"/>
+          <p:cNvSpPr txBox="1"/>
+          <p:nvPr/>
+        </p:nvSpPr>
+        <p:spPr>
+          <a:xfrm>
+            <a:off x="9464040" y="3225800"/>
+            <a:ext cx="1737360" cy="603504"/>
+          </a:xfrm>
+          <a:prstGeom prst="rect">
+            <a:avLst/>
+          </a:prstGeom>
+          <a:noFill/>
+          <a:ln/>
+        </p:spPr>
+        <p:txBody>
+          <a:bodyPr wrap="square" lIns="0" tIns="0" rIns="0" bIns="0" rtlCol="0" anchor="ctr"/>
+          <a:lstStyle/>
+          <a:p>
+            <a:pPr algn="l" indent="0" marL="0">
+              <a:lnSpc>
+                <a:spcPct val="112000"/>
+              </a:lnSpc>
+              <a:buNone/>
+            </a:pPr>
+            <a:r>
+              <a:rPr lang="en-US" sz="1600" b="1" dirty="0">
                 <a:solidFill>
                   <a:srgbClr val="1E1A26"/>
                 </a:solidFill>
@@ -3573,16 +3782,110 @@
                 <a:ea typeface="Microsoft JhengHei" pitchFamily="34" charset="-122"/>
                 <a:cs typeface="Microsoft JhengHei" pitchFamily="34" charset="-120"/>
               </a:rPr>
-              <a:t>換裝置</a:t>
-            </a:r>
-            <a:pPr algn="l" indent="0" marL="0">
-              <a:lnSpc>
-                <a:spcPct val="112000"/>
-              </a:lnSpc>
-              <a:buNone/>
-            </a:pPr>
-            <a:r>
-              <a:rPr lang="en-US" sz="1500" dirty="0">
+              <a:t>AIza…（Gemini）</a:t>
+            </a:r>
+            <a:endParaRPr lang="en-US" sz="1600" dirty="0"/>
+          </a:p>
+        </p:txBody>
+      </p:sp>
+      <p:sp>
+        <p:nvSpPr>
+          <p:cNvPr id="116" name="Row2"/>
+          <p:cNvSpPr/>
+          <p:nvPr/>
+        </p:nvSpPr>
+        <p:spPr>
+          <a:xfrm>
+            <a:off x="7909560" y="3937000"/>
+            <a:ext cx="3474720" cy="603504"/>
+          </a:xfrm>
+          <a:prstGeom prst="roundRect">
+            <a:avLst>
+              <a:gd name="adj" fmla="val 12121"/>
+            </a:avLst>
+          </a:prstGeom>
+          <a:solidFill>
+            <a:srgbClr val="FFFFFF"/>
+          </a:solidFill>
+          <a:ln w="12700">
+            <a:solidFill>
+              <a:srgbClr val="E4D9F5"/>
+            </a:solidFill>
+            <a:prstDash val="solid"/>
+          </a:ln>
+        </p:spPr>
+      </p:sp>
+      <p:sp>
+        <p:nvSpPr>
+          <p:cNvPr id="117" name="Row2 Key"/>
+          <p:cNvSpPr txBox="1"/>
+          <p:nvPr/>
+        </p:nvSpPr>
+        <p:spPr>
+          <a:xfrm>
+            <a:off x="8092440" y="3937000"/>
+            <a:ext cx="1371600" cy="603504"/>
+          </a:xfrm>
+          <a:prstGeom prst="rect">
+            <a:avLst/>
+          </a:prstGeom>
+          <a:noFill/>
+          <a:ln/>
+        </p:spPr>
+        <p:txBody>
+          <a:bodyPr wrap="square" lIns="0" tIns="0" rIns="0" bIns="0" rtlCol="0" anchor="ctr"/>
+          <a:lstStyle/>
+          <a:p>
+            <a:pPr algn="l" indent="0" marL="0">
+              <a:lnSpc>
+                <a:spcPct val="112000"/>
+              </a:lnSpc>
+              <a:buNone/>
+            </a:pPr>
+            <a:r>
+              <a:rPr lang="en-US" sz="1300" dirty="0">
+                <a:solidFill>
+                  <a:srgbClr val="5F586C"/>
+                </a:solidFill>
+                <a:latin typeface="Microsoft JhengHei" pitchFamily="34" charset="0"/>
+                <a:ea typeface="Microsoft JhengHei" pitchFamily="34" charset="-122"/>
+                <a:cs typeface="Microsoft JhengHei" pitchFamily="34" charset="-120"/>
+              </a:rPr>
+              <a:t>換到另一台裝置</a:t>
+            </a:r>
+            <a:endParaRPr lang="en-US" sz="1300" dirty="0"/>
+          </a:p>
+        </p:txBody>
+      </p:sp>
+      <p:sp>
+        <p:nvSpPr>
+          <p:cNvPr id="118" name="Row2 Val"/>
+          <p:cNvSpPr txBox="1"/>
+          <p:nvPr/>
+        </p:nvSpPr>
+        <p:spPr>
+          <a:xfrm>
+            <a:off x="9464040" y="3937000"/>
+            <a:ext cx="1737360" cy="603504"/>
+          </a:xfrm>
+          <a:prstGeom prst="rect">
+            <a:avLst/>
+          </a:prstGeom>
+          <a:noFill/>
+          <a:ln/>
+        </p:spPr>
+        <p:txBody>
+          <a:bodyPr wrap="square" lIns="0" tIns="0" rIns="0" bIns="0" rtlCol="0" anchor="ctr"/>
+          <a:lstStyle/>
+          <a:p>
+            <a:pPr algn="l" indent="0" marL="0">
+              <a:lnSpc>
+                <a:spcPct val="112000"/>
+              </a:lnSpc>
+              <a:buNone/>
+            </a:pPr>
+            <a:r>
+              <a:rPr lang="en-US" sz="1600" b="1" dirty="0">
                 <a:solidFill>
                   <a:srgbClr val="1E1A26"/>
                 </a:solidFill>
@@ -3590,75 +3893,9 @@
                 <a:ea typeface="Microsoft JhengHei" pitchFamily="34" charset="-122"/>
                 <a:cs typeface="Microsoft JhengHei" pitchFamily="34" charset="-120"/>
               </a:rPr>
-              <a:t>」掃 QR 就接上了（這個 QR 等於鑰匙，只給自己人）</a:t>
-            </a:r>
-            <a:endParaRPr lang="en-US" sz="1500" dirty="0"/>
-          </a:p>
-        </p:txBody>
-      </p:sp>
-      <p:pic>
-        <p:nvPicPr>
-          <p:cNvPr id="22" name="Image 0" descr="preencoded.png">    </p:cNvPr>
-          <p:cNvPicPr>
-            <a:picLocks noChangeAspect="1"/>
-          </p:cNvPicPr>
-          <p:nvPr/>
-        </p:nvPicPr>
-        <p:blipFill>
-          <a:blip r:embed="rId1"/>
-          <a:stretch>
-            <a:fillRect/>
-          </a:stretch>
-        </p:blipFill>
-        <p:spPr>
-          <a:xfrm>
-            <a:off x="7726680" y="1828800"/>
-            <a:ext cx="3931920" cy="3611623"/>
-          </a:xfrm>
-          <a:prstGeom prst="rect">
-            <a:avLst/>
-          </a:prstGeom>
-        </p:spPr>
-      </p:pic>
-      <p:sp>
-        <p:nvSpPr>
-          <p:cNvPr id="23" name="Text 20"/>
-          <p:cNvSpPr txBox="1"/>
-          <p:nvPr/>
-        </p:nvSpPr>
-        <p:spPr>
-          <a:xfrm>
-            <a:off x="7726680" y="5550151"/>
-            <a:ext cx="3931920" cy="274320"/>
-          </a:xfrm>
-          <a:prstGeom prst="rect">
-            <a:avLst/>
-          </a:prstGeom>
-          <a:noFill/>
-          <a:ln/>
-        </p:spPr>
-        <p:txBody>
-          <a:bodyPr wrap="square" lIns="0" tIns="0" rIns="0" bIns="0" rtlCol="0" anchor="t"/>
-          <a:lstStyle/>
-          <a:p>
-            <a:pPr algn="ctr" indent="0" marL="0">
-              <a:lnSpc>
-                <a:spcPct val="112000"/>
-              </a:lnSpc>
-              <a:buNone/>
-            </a:pPr>
-            <a:r>
-              <a:rPr lang="en-US" sz="1200" dirty="0">
-                <a:solidFill>
-                  <a:srgbClr val="5F586C"/>
-                </a:solidFill>
-                <a:latin typeface="Microsoft JhengHei" pitchFamily="34" charset="0"/>
-                <a:ea typeface="Microsoft JhengHei" pitchFamily="34" charset="-122"/>
-                <a:cs typeface="Microsoft JhengHei" pitchFamily="34" charset="-120"/>
-              </a:rPr>
-              <a:t>App 的「設定 → 後端與存取碼」</a:t>
-            </a:r>
-            <a:endParaRPr lang="en-US" sz="1200" dirty="0"/>
+              <a:t>手機掃 QR</a:t>
+            </a:r>
+            <a:endParaRPr lang="en-US" sz="1600" dirty="0"/>
           </a:p>
         </p:txBody>
       </p:sp>
@@ -3772,7 +4009,7 @@
                 <a:ea typeface="Microsoft JhengHei" pitchFamily="34" charset="-122"/>
                 <a:cs typeface="Microsoft JhengHei" pitchFamily="34" charset="-120"/>
               </a:rPr>
-              <a:t>匯入：下方「拍照或匯入」選截圖，自動讀出商家、券名、到期日和序號，確認後存入</a:t>
+              <a:t>匯入：按最下面的 ＋ 選截圖，背景自動讀出商家、券名、到期日和序號，列表上方出現「辨識好了」再確認存入</a:t>
             </a:r>
             <a:endParaRPr lang="en-US" sz="1500" dirty="0"/>
           </a:p>
@@ -4738,7 +4975,51 @@
                 <a:ea typeface="Microsoft JhengHei" pitchFamily="34" charset="-122"/>
                 <a:cs typeface="Microsoft JhengHei" pitchFamily="34" charset="-120"/>
               </a:rPr>
-              <a:t>App 最上面會出現「有新版本」，點開看每一版改了什麼、下載更新包。更新兩步：Apps Script 把 Code.gs 換成新的 →「部署 → 管理部署作業 → 鉛筆 → 新版本」；Cloudflare「Create new deployment」拖入新的 web 資料夾。最後按「強制更新到最新版」。</a:t>
+              <a:t>App 最上面會出現「有新版本」，點開看每一版改了什麼。後端有改時：Code.gs 換成新的 →「部署 → 管理部署作業 → 鉛筆 → 新版本」。網站：App「更新」頁按「</a:t>
+            </a:r>
+            <a:r>
+              <a:rPr lang="en-US" sz="1400" b="1" dirty="0">
+                <a:solidFill>
+                  <a:srgbClr val="3D3548"/>
+                </a:solidFill>
+                <a:latin typeface="Microsoft JhengHei" pitchFamily="34" charset="0"/>
+                <a:ea typeface="Microsoft JhengHei" pitchFamily="34" charset="-122"/>
+                <a:cs typeface="Microsoft JhengHei" pitchFamily="34" charset="-120"/>
+              </a:rPr>
+              <a:t>只下載網站</a:t>
+            </a:r>
+            <a:r>
+              <a:rPr lang="en-US" sz="1400" dirty="0">
+                <a:solidFill>
+                  <a:srgbClr val="3D3548"/>
+                </a:solidFill>
+                <a:latin typeface="Microsoft JhengHei" pitchFamily="34" charset="0"/>
+                <a:ea typeface="Microsoft JhengHei" pitchFamily="34" charset="-122"/>
+                <a:cs typeface="Microsoft JhengHei" pitchFamily="34" charset="-120"/>
+              </a:rPr>
+              <a:t>」，到 Cloudflare 專案右上角「</a:t>
+            </a:r>
+            <a:r>
+              <a:rPr lang="en-US" sz="1400" b="1" dirty="0">
+                <a:solidFill>
+                  <a:srgbClr val="3D3548"/>
+                </a:solidFill>
+                <a:latin typeface="Microsoft JhengHei" pitchFamily="34" charset="0"/>
+                <a:ea typeface="Microsoft JhengHei" pitchFamily="34" charset="-122"/>
+                <a:cs typeface="Microsoft JhengHei" pitchFamily="34" charset="-120"/>
+              </a:rPr>
+              <a:t>建立部署</a:t>
+            </a:r>
+            <a:r>
+              <a:rPr lang="en-US" sz="1400" dirty="0">
+                <a:solidFill>
+                  <a:srgbClr val="3D3548"/>
+                </a:solidFill>
+                <a:latin typeface="Microsoft JhengHei" pitchFamily="34" charset="0"/>
+                <a:ea typeface="Microsoft JhengHei" pitchFamily="34" charset="-122"/>
+                <a:cs typeface="Microsoft JhengHei" pitchFamily="34" charset="-120"/>
+              </a:rPr>
+              <a:t>」拖進去。最後按「強制更新」。</a:t>
             </a:r>
             <a:endParaRPr lang="en-US" sz="1400" dirty="0"/>
           </a:p>
@@ -4918,7 +5199,7 @@
         </p:nvGraphicFramePr>
         <p:xfrm>
           <a:off x="548640" y="1783080"/>
-          <a:ext cx="11109960" cy="914400"/>
+          <a:ext cx="11109960" cy="4540250"/>
         </p:xfrm>
         <a:graphic>
           <a:graphicData uri="http://schemas.openxmlformats.org/drawingml/2006/table">
@@ -4928,7 +5209,7 @@
                 <a:gridCol w="4206240"/>
                 <a:gridCol w="6903720"/>
               </a:tblGrid>
-              <a:tr h="530352">
+              <a:tr h="412750">
                 <a:tc>
                   <a:txBody>
                     <a:bodyPr/>
@@ -5066,7 +5347,7 @@
                   </a:tcPr>
                 </a:tc>
               </a:tr>
-              <a:tr h="530352">
+              <a:tr h="412750">
                 <a:tc>
                   <a:txBody>
                     <a:bodyPr/>
@@ -5152,7 +5433,7 @@
                           <a:ea typeface="Microsoft JhengHei" pitchFamily="34" charset="-122"/>
                           <a:cs typeface="Microsoft JhengHei" pitchFamily="34" charset="-120"/>
                         </a:rPr>
-                        <a:t>部署的「誰可以存取」不是「所有人」，或網址不是 /exec 結尾</a:t>
+                        <a:t>部署的「誰可以存取」不是「所有人」，或網址少了 /exec</a:t>
                       </a:r>
                       <a:endParaRPr lang="en-US" sz="1350" dirty="0">
                         <a:latin typeface="Microsoft JhengHei" charset="0"/>
@@ -5204,7 +5485,7 @@
                   </a:tcPr>
                 </a:tc>
               </a:tr>
-              <a:tr h="530352">
+              <a:tr h="412750">
                 <a:tc>
                   <a:txBody>
                     <a:bodyPr/>
@@ -5290,7 +5571,7 @@
                           <a:ea typeface="Microsoft JhengHei" pitchFamily="34" charset="-122"/>
                           <a:cs typeface="Microsoft JhengHei" pitchFamily="34" charset="-120"/>
                         </a:rPr>
-                        <a:t>OWNER_KEY 貼錯，或前後多了空白</a:t>
+                        <a:t>OWNER_KEY 貼錯，或後端換了新的指令碼屬性</a:t>
                       </a:r>
                       <a:endParaRPr lang="en-US" sz="1350" dirty="0">
                         <a:latin typeface="Microsoft JhengHei" charset="0"/>
@@ -5342,7 +5623,7 @@
                   </a:tcPr>
                 </a:tc>
               </a:tr>
-              <a:tr h="530352">
+              <a:tr h="412750">
                 <a:tc>
                   <a:txBody>
                     <a:bodyPr/>
@@ -5360,7 +5641,7 @@
                           <a:ea typeface="Microsoft JhengHei" pitchFamily="34" charset="-122"/>
                           <a:cs typeface="Microsoft JhengHei" pitchFamily="34" charset="-120"/>
                         </a:rPr>
-                        <a:t>匯入時說還沒設定金鑰</a:t>
+                        <a:t>匯入前說「還沒設定辨識金鑰」</a:t>
                       </a:r>
                       <a:endParaRPr lang="en-US" sz="1350" dirty="0">
                         <a:latin typeface="Microsoft JhengHei" charset="0"/>
@@ -5428,7 +5709,7 @@
                           <a:ea typeface="Microsoft JhengHei" pitchFamily="34" charset="-122"/>
                           <a:cs typeface="Microsoft JhengHei" pitchFamily="34" charset="-120"/>
                         </a:rPr>
-                        <a:t>指令碼屬性的名稱要全大寫 GEMINI_KEY</a:t>
+                        <a:t>到 App「設定 → 右上角鈴鐺 → 辨識金鑰」貼上</a:t>
                       </a:r>
                       <a:endParaRPr lang="en-US" sz="1350" dirty="0">
                         <a:latin typeface="Microsoft JhengHei" charset="0"/>
@@ -5480,7 +5761,7 @@
                   </a:tcPr>
                 </a:tc>
               </a:tr>
-              <a:tr h="530352">
+              <a:tr h="412750">
                 <a:tc>
                   <a:txBody>
                     <a:bodyPr/>
@@ -5498,7 +5779,7 @@
                           <a:ea typeface="Microsoft JhengHei" pitchFamily="34" charset="-122"/>
                           <a:cs typeface="Microsoft JhengHei" pitchFamily="34" charset="-120"/>
                         </a:rPr>
-                        <a:t>匯入時說沒有這個模型</a:t>
+                        <a:t>存金鑰時說「這支金鑰不能用」</a:t>
                       </a:r>
                       <a:endParaRPr lang="en-US" sz="1350" dirty="0">
                         <a:latin typeface="Microsoft JhengHei" charset="0"/>
@@ -5566,7 +5847,7 @@
                           <a:ea typeface="Microsoft JhengHei" pitchFamily="34" charset="-122"/>
                           <a:cs typeface="Microsoft JhengHei" pitchFamily="34" charset="-120"/>
                         </a:rPr>
-                        <a:t>Gemini 換型號了：改 Code.gs 最上面的 MODEL，再部署新版本</a:t>
+                        <a:t>回 aistudio.google.com/apikey 重新複製，前後不要多空白</a:t>
                       </a:r>
                       <a:endParaRPr lang="en-US" sz="1350" dirty="0">
                         <a:latin typeface="Microsoft JhengHei" charset="0"/>
@@ -5618,7 +5899,7 @@
                   </a:tcPr>
                 </a:tc>
               </a:tr>
-              <a:tr h="530352">
+              <a:tr h="412750">
                 <a:tc>
                   <a:txBody>
                     <a:bodyPr/>
@@ -5636,7 +5917,7 @@
                           <a:ea typeface="Microsoft JhengHei" pitchFamily="34" charset="-122"/>
                           <a:cs typeface="Microsoft JhengHei" pitchFamily="34" charset="-120"/>
                         </a:rPr>
-                        <a:t>分享連結打開寫「還沒設定好」</a:t>
+                        <a:t>列表上方說「分享出去的連結現在打不開」</a:t>
                       </a:r>
                       <a:endParaRPr lang="en-US" sz="1350" dirty="0">
                         <a:latin typeface="Microsoft JhengHei" charset="0"/>
@@ -5704,7 +5985,7 @@
                           <a:ea typeface="Microsoft JhengHei" pitchFamily="34" charset="-122"/>
                           <a:cs typeface="Microsoft JhengHei" pitchFamily="34" charset="-120"/>
                         </a:rPr>
-                        <a:t>Cloudflare 的 EXEC_URL 還沒設，或設了之後沒有重新部署一次</a:t>
+                        <a:t>「設定 → 右上角鈴鐺 → 分享短網址」按「下載填好的網站」，再建立部署</a:t>
                       </a:r>
                       <a:endParaRPr lang="en-US" sz="1350" dirty="0">
                         <a:latin typeface="Microsoft JhengHei" charset="0"/>
@@ -5756,7 +6037,7 @@
                   </a:tcPr>
                 </a:tc>
               </a:tr>
-              <a:tr h="530352">
+              <a:tr h="412750">
                 <a:tc>
                   <a:txBody>
                     <a:bodyPr/>
@@ -5842,7 +6123,7 @@
                           <a:ea typeface="Microsoft JhengHei" pitchFamily="34" charset="-122"/>
                           <a:cs typeface="Microsoft JhengHei" pitchFamily="34" charset="-120"/>
                         </a:rPr>
-                        <a:t>沒設 SHORT_BASE，或結尾少了 /s/</a:t>
+                        <a:t>還在用 Google 的長網址：看「設定 → 右上角鈴鐺 → 分享短網址」</a:t>
                       </a:r>
                       <a:endParaRPr lang="en-US" sz="1350" dirty="0">
                         <a:latin typeface="Microsoft JhengHei" charset="0"/>
@@ -5894,7 +6175,7 @@
                   </a:tcPr>
                 </a:tc>
               </a:tr>
-              <a:tr h="530352">
+              <a:tr h="412750">
                 <a:tc>
                   <a:txBody>
                     <a:bodyPr/>
@@ -5912,7 +6193,7 @@
                           <a:ea typeface="Microsoft JhengHei" pitchFamily="34" charset="-122"/>
                           <a:cs typeface="Microsoft JhengHei" pitchFamily="34" charset="-120"/>
                         </a:rPr>
-                        <a:t>iPhone 沒有「加入主畫面」</a:t>
+                        <a:t>分享連結打開是空白或 404</a:t>
                       </a:r>
                       <a:endParaRPr lang="en-US" sz="1350" dirty="0">
                         <a:latin typeface="Microsoft JhengHei" charset="0"/>
@@ -5980,7 +6261,7 @@
                           <a:ea typeface="Microsoft JhengHei" pitchFamily="34" charset="-122"/>
                           <a:cs typeface="Microsoft JhengHei" pitchFamily="34" charset="-120"/>
                         </a:rPr>
-                        <a:t>要用 Safari 打開，Chrome 沒有這個選項</a:t>
+                        <a:t>部署後網址變了；或在指令碼屬性加 WEBAPP_URL（你的 /exec 網址）</a:t>
                       </a:r>
                       <a:endParaRPr lang="en-US" sz="1350" dirty="0">
                         <a:latin typeface="Microsoft JhengHei" charset="0"/>
@@ -6032,6 +6313,420 @@
                   </a:tcPr>
                 </a:tc>
               </a:tr>
+              <a:tr h="412750">
+                <a:tc>
+                  <a:txBody>
+                    <a:bodyPr/>
+                    <a:lstStyle/>
+                    <a:p>
+                      <a:pPr indent="0" marL="0">
+                        <a:buNone/>
+                      </a:pPr>
+                      <a:r>
+                        <a:rPr lang="en-US" sz="1350" b="1" dirty="0">
+                          <a:solidFill>
+                            <a:srgbClr val="1E1A26"/>
+                          </a:solidFill>
+                          <a:latin typeface="Microsoft JhengHei" pitchFamily="34" charset="0"/>
+                          <a:ea typeface="Microsoft JhengHei" pitchFamily="34" charset="-122"/>
+                          <a:cs typeface="Microsoft JhengHei" pitchFamily="34" charset="-120"/>
+                        </a:rPr>
+                        <a:t>辨識好的一直沒出現</a:t>
+                      </a:r>
+                      <a:endParaRPr lang="en-US" sz="1350" dirty="0">
+                        <a:latin typeface="Microsoft JhengHei" charset="0"/>
+                        <a:ea typeface="Microsoft JhengHei" charset="0"/>
+                        <a:cs typeface="Microsoft JhengHei" charset="0"/>
+                      </a:endParaRPr>
+                    </a:p>
+                  </a:txBody>
+                  <a:tcPr marL="164592" marR="164592" marT="54864" marB="54864" anchor="ctr">
+                    <a:lnL w="12700" cap="flat" cmpd="sng" algn="ctr">
+                      <a:solidFill>
+                        <a:srgbClr val="E4DDF0"/>
+                      </a:solidFill>
+                      <a:prstDash val="solid"/>
+                      <a:round/>
+                      <a:headEnd type="none" w="med" len="med"/>
+                      <a:tailEnd type="none" w="med" len="med"/>
+                    </a:lnL>
+                    <a:lnR w="12700" cap="flat" cmpd="sng" algn="ctr">
+                      <a:solidFill>
+                        <a:srgbClr val="E4DDF0"/>
+                      </a:solidFill>
+                      <a:prstDash val="solid"/>
+                      <a:round/>
+                      <a:headEnd type="none" w="med" len="med"/>
+                      <a:tailEnd type="none" w="med" len="med"/>
+                    </a:lnR>
+                    <a:lnT w="12700" cap="flat" cmpd="sng" algn="ctr">
+                      <a:solidFill>
+                        <a:srgbClr val="E4DDF0"/>
+                      </a:solidFill>
+                      <a:prstDash val="solid"/>
+                      <a:round/>
+                      <a:headEnd type="none" w="med" len="med"/>
+                      <a:tailEnd type="none" w="med" len="med"/>
+                    </a:lnT>
+                    <a:lnB w="12700" cap="flat" cmpd="sng" algn="ctr">
+                      <a:solidFill>
+                        <a:srgbClr val="E4DDF0"/>
+                      </a:solidFill>
+                      <a:prstDash val="solid"/>
+                      <a:round/>
+                      <a:headEnd type="none" w="med" len="med"/>
+                      <a:tailEnd type="none" w="med" len="med"/>
+                    </a:lnB>
+                    <a:solidFill>
+                      <a:srgbClr val="F8F5FC"/>
+                    </a:solidFill>
+                  </a:tcPr>
+                </a:tc>
+                <a:tc>
+                  <a:txBody>
+                    <a:bodyPr/>
+                    <a:lstStyle/>
+                    <a:p>
+                      <a:pPr indent="0" marL="0">
+                        <a:buNone/>
+                      </a:pPr>
+                      <a:r>
+                        <a:rPr lang="en-US" sz="1350" dirty="0">
+                          <a:solidFill>
+                            <a:srgbClr val="1E1A26"/>
+                          </a:solidFill>
+                          <a:latin typeface="Microsoft JhengHei" pitchFamily="34" charset="0"/>
+                          <a:ea typeface="Microsoft JhengHei" pitchFamily="34" charset="-122"/>
+                          <a:cs typeface="Microsoft JhengHei" pitchFamily="34" charset="-120"/>
+                        </a:rPr>
+                        <a:t>列表上方寫「辨識中」就是還在跑；Gemini 額度滿了會等 15 分鐘</a:t>
+                      </a:r>
+                      <a:endParaRPr lang="en-US" sz="1350" dirty="0">
+                        <a:latin typeface="Microsoft JhengHei" charset="0"/>
+                        <a:ea typeface="Microsoft JhengHei" charset="0"/>
+                        <a:cs typeface="Microsoft JhengHei" charset="0"/>
+                      </a:endParaRPr>
+                    </a:p>
+                  </a:txBody>
+                  <a:tcPr marL="164592" marR="164592" marT="54864" marB="54864" anchor="ctr">
+                    <a:lnL w="12700" cap="flat" cmpd="sng" algn="ctr">
+                      <a:solidFill>
+                        <a:srgbClr val="E4DDF0"/>
+                      </a:solidFill>
+                      <a:prstDash val="solid"/>
+                      <a:round/>
+                      <a:headEnd type="none" w="med" len="med"/>
+                      <a:tailEnd type="none" w="med" len="med"/>
+                    </a:lnL>
+                    <a:lnR w="12700" cap="flat" cmpd="sng" algn="ctr">
+                      <a:solidFill>
+                        <a:srgbClr val="E4DDF0"/>
+                      </a:solidFill>
+                      <a:prstDash val="solid"/>
+                      <a:round/>
+                      <a:headEnd type="none" w="med" len="med"/>
+                      <a:tailEnd type="none" w="med" len="med"/>
+                    </a:lnR>
+                    <a:lnT w="12700" cap="flat" cmpd="sng" algn="ctr">
+                      <a:solidFill>
+                        <a:srgbClr val="E4DDF0"/>
+                      </a:solidFill>
+                      <a:prstDash val="solid"/>
+                      <a:round/>
+                      <a:headEnd type="none" w="med" len="med"/>
+                      <a:tailEnd type="none" w="med" len="med"/>
+                    </a:lnT>
+                    <a:lnB w="12700" cap="flat" cmpd="sng" algn="ctr">
+                      <a:solidFill>
+                        <a:srgbClr val="E4DDF0"/>
+                      </a:solidFill>
+                      <a:prstDash val="solid"/>
+                      <a:round/>
+                      <a:headEnd type="none" w="med" len="med"/>
+                      <a:tailEnd type="none" w="med" len="med"/>
+                    </a:lnB>
+                    <a:solidFill>
+                      <a:srgbClr val="F8F5FC"/>
+                    </a:solidFill>
+                  </a:tcPr>
+                </a:tc>
+              </a:tr>
+              <a:tr h="412750">
+                <a:tc>
+                  <a:txBody>
+                    <a:bodyPr/>
+                    <a:lstStyle/>
+                    <a:p>
+                      <a:pPr indent="0" marL="0">
+                        <a:buNone/>
+                      </a:pPr>
+                      <a:r>
+                        <a:rPr lang="en-US" sz="1350" b="1" dirty="0">
+                          <a:solidFill>
+                            <a:srgbClr val="1E1A26"/>
+                          </a:solidFill>
+                          <a:latin typeface="Microsoft JhengHei" pitchFamily="34" charset="0"/>
+                          <a:ea typeface="Microsoft JhengHei" pitchFamily="34" charset="-122"/>
+                          <a:cs typeface="Microsoft JhengHei" pitchFamily="34" charset="-120"/>
+                        </a:rPr>
+                        <a:t>匯入時說「存不進雲端硬碟」</a:t>
+                      </a:r>
+                      <a:endParaRPr lang="en-US" sz="1350" dirty="0">
+                        <a:latin typeface="Microsoft JhengHei" charset="0"/>
+                        <a:ea typeface="Microsoft JhengHei" charset="0"/>
+                        <a:cs typeface="Microsoft JhengHei" charset="0"/>
+                      </a:endParaRPr>
+                    </a:p>
+                  </a:txBody>
+                  <a:tcPr marL="164592" marR="164592" marT="54864" marB="54864" anchor="ctr">
+                    <a:lnL w="12700" cap="flat" cmpd="sng" algn="ctr">
+                      <a:solidFill>
+                        <a:srgbClr val="E4DDF0"/>
+                      </a:solidFill>
+                      <a:prstDash val="solid"/>
+                      <a:round/>
+                      <a:headEnd type="none" w="med" len="med"/>
+                      <a:tailEnd type="none" w="med" len="med"/>
+                    </a:lnL>
+                    <a:lnR w="12700" cap="flat" cmpd="sng" algn="ctr">
+                      <a:solidFill>
+                        <a:srgbClr val="E4DDF0"/>
+                      </a:solidFill>
+                      <a:prstDash val="solid"/>
+                      <a:round/>
+                      <a:headEnd type="none" w="med" len="med"/>
+                      <a:tailEnd type="none" w="med" len="med"/>
+                    </a:lnR>
+                    <a:lnT w="12700" cap="flat" cmpd="sng" algn="ctr">
+                      <a:solidFill>
+                        <a:srgbClr val="E4DDF0"/>
+                      </a:solidFill>
+                      <a:prstDash val="solid"/>
+                      <a:round/>
+                      <a:headEnd type="none" w="med" len="med"/>
+                      <a:tailEnd type="none" w="med" len="med"/>
+                    </a:lnT>
+                    <a:lnB w="12700" cap="flat" cmpd="sng" algn="ctr">
+                      <a:solidFill>
+                        <a:srgbClr val="E4DDF0"/>
+                      </a:solidFill>
+                      <a:prstDash val="solid"/>
+                      <a:round/>
+                      <a:headEnd type="none" w="med" len="med"/>
+                      <a:tailEnd type="none" w="med" len="med"/>
+                    </a:lnB>
+                    <a:solidFill>
+                      <a:srgbClr val="FFFFFF"/>
+                    </a:solidFill>
+                  </a:tcPr>
+                </a:tc>
+                <a:tc>
+                  <a:txBody>
+                    <a:bodyPr/>
+                    <a:lstStyle/>
+                    <a:p>
+                      <a:pPr indent="0" marL="0">
+                        <a:buNone/>
+                      </a:pPr>
+                      <a:r>
+                        <a:rPr lang="en-US" sz="1350" dirty="0">
+                          <a:solidFill>
+                            <a:srgbClr val="1E1A26"/>
+                          </a:solidFill>
+                          <a:latin typeface="Microsoft JhengHei" pitchFamily="34" charset="0"/>
+                          <a:ea typeface="Microsoft JhengHei" pitchFamily="34" charset="-122"/>
+                          <a:cs typeface="Microsoft JhengHei" pitchFamily="34" charset="-120"/>
+                        </a:rPr>
+                        <a:t>FOLDER_ID 那個資料夾被刪了：把屬性清掉，再執行一次 setup</a:t>
+                      </a:r>
+                      <a:endParaRPr lang="en-US" sz="1350" dirty="0">
+                        <a:latin typeface="Microsoft JhengHei" charset="0"/>
+                        <a:ea typeface="Microsoft JhengHei" charset="0"/>
+                        <a:cs typeface="Microsoft JhengHei" charset="0"/>
+                      </a:endParaRPr>
+                    </a:p>
+                  </a:txBody>
+                  <a:tcPr marL="164592" marR="164592" marT="54864" marB="54864" anchor="ctr">
+                    <a:lnL w="12700" cap="flat" cmpd="sng" algn="ctr">
+                      <a:solidFill>
+                        <a:srgbClr val="E4DDF0"/>
+                      </a:solidFill>
+                      <a:prstDash val="solid"/>
+                      <a:round/>
+                      <a:headEnd type="none" w="med" len="med"/>
+                      <a:tailEnd type="none" w="med" len="med"/>
+                    </a:lnL>
+                    <a:lnR w="12700" cap="flat" cmpd="sng" algn="ctr">
+                      <a:solidFill>
+                        <a:srgbClr val="E4DDF0"/>
+                      </a:solidFill>
+                      <a:prstDash val="solid"/>
+                      <a:round/>
+                      <a:headEnd type="none" w="med" len="med"/>
+                      <a:tailEnd type="none" w="med" len="med"/>
+                    </a:lnR>
+                    <a:lnT w="12700" cap="flat" cmpd="sng" algn="ctr">
+                      <a:solidFill>
+                        <a:srgbClr val="E4DDF0"/>
+                      </a:solidFill>
+                      <a:prstDash val="solid"/>
+                      <a:round/>
+                      <a:headEnd type="none" w="med" len="med"/>
+                      <a:tailEnd type="none" w="med" len="med"/>
+                    </a:lnT>
+                    <a:lnB w="12700" cap="flat" cmpd="sng" algn="ctr">
+                      <a:solidFill>
+                        <a:srgbClr val="E4DDF0"/>
+                      </a:solidFill>
+                      <a:prstDash val="solid"/>
+                      <a:round/>
+                      <a:headEnd type="none" w="med" len="med"/>
+                      <a:tailEnd type="none" w="med" len="med"/>
+                    </a:lnB>
+                    <a:solidFill>
+                      <a:srgbClr val="FFFFFF"/>
+                    </a:solidFill>
+                  </a:tcPr>
+                </a:tc>
+              </a:tr>
+              <a:tr h="412750">
+                <a:tc>
+                  <a:txBody>
+                    <a:bodyPr/>
+                    <a:lstStyle/>
+                    <a:p>
+                      <a:pPr indent="0" marL="0">
+                        <a:buNone/>
+                      </a:pPr>
+                      <a:r>
+                        <a:rPr lang="en-US" sz="1350" b="1" dirty="0">
+                          <a:solidFill>
+                            <a:srgbClr val="1E1A26"/>
+                          </a:solidFill>
+                          <a:latin typeface="Microsoft JhengHei" pitchFamily="34" charset="0"/>
+                          <a:ea typeface="Microsoft JhengHei" pitchFamily="34" charset="-122"/>
+                          <a:cs typeface="Microsoft JhengHei" pitchFamily="34" charset="-120"/>
+                        </a:rPr>
+                        <a:t>iPhone 上沒有「加入主畫面」</a:t>
+                      </a:r>
+                      <a:endParaRPr lang="en-US" sz="1350" dirty="0">
+                        <a:latin typeface="Microsoft JhengHei" charset="0"/>
+                        <a:ea typeface="Microsoft JhengHei" charset="0"/>
+                        <a:cs typeface="Microsoft JhengHei" charset="0"/>
+                      </a:endParaRPr>
+                    </a:p>
+                  </a:txBody>
+                  <a:tcPr marL="164592" marR="164592" marT="54864" marB="54864" anchor="ctr">
+                    <a:lnL w="12700" cap="flat" cmpd="sng" algn="ctr">
+                      <a:solidFill>
+                        <a:srgbClr val="E4DDF0"/>
+                      </a:solidFill>
+                      <a:prstDash val="solid"/>
+                      <a:round/>
+                      <a:headEnd type="none" w="med" len="med"/>
+                      <a:tailEnd type="none" w="med" len="med"/>
+                    </a:lnL>
+                    <a:lnR w="12700" cap="flat" cmpd="sng" algn="ctr">
+                      <a:solidFill>
+                        <a:srgbClr val="E4DDF0"/>
+                      </a:solidFill>
+                      <a:prstDash val="solid"/>
+                      <a:round/>
+                      <a:headEnd type="none" w="med" len="med"/>
+                      <a:tailEnd type="none" w="med" len="med"/>
+                    </a:lnR>
+                    <a:lnT w="12700" cap="flat" cmpd="sng" algn="ctr">
+                      <a:solidFill>
+                        <a:srgbClr val="E4DDF0"/>
+                      </a:solidFill>
+                      <a:prstDash val="solid"/>
+                      <a:round/>
+                      <a:headEnd type="none" w="med" len="med"/>
+                      <a:tailEnd type="none" w="med" len="med"/>
+                    </a:lnT>
+                    <a:lnB w="12700" cap="flat" cmpd="sng" algn="ctr">
+                      <a:solidFill>
+                        <a:srgbClr val="E4DDF0"/>
+                      </a:solidFill>
+                      <a:prstDash val="solid"/>
+                      <a:round/>
+                      <a:headEnd type="none" w="med" len="med"/>
+                      <a:tailEnd type="none" w="med" len="med"/>
+                    </a:lnB>
+                    <a:solidFill>
+                      <a:srgbClr val="F8F5FC"/>
+                    </a:solidFill>
+                  </a:tcPr>
+                </a:tc>
+                <a:tc>
+                  <a:txBody>
+                    <a:bodyPr/>
+                    <a:lstStyle/>
+                    <a:p>
+                      <a:pPr indent="0" marL="0">
+                        <a:buNone/>
+                      </a:pPr>
+                      <a:r>
+                        <a:rPr lang="en-US" sz="1350" dirty="0">
+                          <a:solidFill>
+                            <a:srgbClr val="1E1A26"/>
+                          </a:solidFill>
+                          <a:latin typeface="Microsoft JhengHei" pitchFamily="34" charset="0"/>
+                          <a:ea typeface="Microsoft JhengHei" pitchFamily="34" charset="-122"/>
+                          <a:cs typeface="Microsoft JhengHei" pitchFamily="34" charset="-120"/>
+                        </a:rPr>
+                        <a:t>要用 Safari 打開，Chrome 沒有這個選項</a:t>
+                      </a:r>
+                      <a:endParaRPr lang="en-US" sz="1350" dirty="0">
+                        <a:latin typeface="Microsoft JhengHei" charset="0"/>
+                        <a:ea typeface="Microsoft JhengHei" charset="0"/>
+                        <a:cs typeface="Microsoft JhengHei" charset="0"/>
+                      </a:endParaRPr>
+                    </a:p>
+                  </a:txBody>
+                  <a:tcPr marL="164592" marR="164592" marT="54864" marB="54864" anchor="ctr">
+                    <a:lnL w="12700" cap="flat" cmpd="sng" algn="ctr">
+                      <a:solidFill>
+                        <a:srgbClr val="E4DDF0"/>
+                      </a:solidFill>
+                      <a:prstDash val="solid"/>
+                      <a:round/>
+                      <a:headEnd type="none" w="med" len="med"/>
+                      <a:tailEnd type="none" w="med" len="med"/>
+                    </a:lnL>
+                    <a:lnR w="12700" cap="flat" cmpd="sng" algn="ctr">
+                      <a:solidFill>
+                        <a:srgbClr val="E4DDF0"/>
+                      </a:solidFill>
+                      <a:prstDash val="solid"/>
+                      <a:round/>
+                      <a:headEnd type="none" w="med" len="med"/>
+                      <a:tailEnd type="none" w="med" len="med"/>
+                    </a:lnR>
+                    <a:lnT w="12700" cap="flat" cmpd="sng" algn="ctr">
+                      <a:solidFill>
+                        <a:srgbClr val="E4DDF0"/>
+                      </a:solidFill>
+                      <a:prstDash val="solid"/>
+                      <a:round/>
+                      <a:headEnd type="none" w="med" len="med"/>
+                      <a:tailEnd type="none" w="med" len="med"/>
+                    </a:lnT>
+                    <a:lnB w="12700" cap="flat" cmpd="sng" algn="ctr">
+                      <a:solidFill>
+                        <a:srgbClr val="E4DDF0"/>
+                      </a:solidFill>
+                      <a:prstDash val="solid"/>
+                      <a:round/>
+                      <a:headEnd type="none" w="med" len="med"/>
+                      <a:tailEnd type="none" w="med" len="med"/>
+                    </a:lnB>
+                    <a:solidFill>
+                      <a:srgbClr val="F8F5FC"/>
+                    </a:solidFill>
+                  </a:tcPr>
+                </a:tc>
+              </a:tr>
             </a:tbl>
           </a:graphicData>
         </a:graphic>
@@ -6232,7 +6927,7 @@
                 <a:ea typeface="Microsoft JhengHei" pitchFamily="34" charset="-122"/>
                 <a:cs typeface="Microsoft JhengHei" pitchFamily="34" charset="-120"/>
               </a:rPr>
-              <a:t>存取碼（OWNER_KEY）和設定裡「換裝置」的 QR 碼，等於你票券的鑰匙，只給自己的裝置。</a:t>
+              <a:t>存取碼（OWNER_KEY）和「換到另一台裝置」的 QR 碼，等於你票券的鑰匙，只給自己的裝置。</a:t>
             </a:r>
             <a:endParaRPr lang="en-US" sz="1600" dirty="0"/>
           </a:p>
@@ -8710,7 +9405,7 @@
                 <a:ea typeface="Microsoft JhengHei" pitchFamily="34" charset="-122"/>
                 <a:cs typeface="Microsoft JhengHei" pitchFamily="34" charset="-120"/>
               </a:rPr>
-              <a:t>解壓縮後有 Code.gs 和 web 資料夾</a:t>
+              <a:t>解壓縮後有 Code.gs（網站之後用網站產生器下載）</a:t>
             </a:r>
             <a:endParaRPr lang="en-US" sz="1400" dirty="0"/>
           </a:p>
@@ -8939,7 +9634,7 @@
                 <a:ea typeface="Microsoft JhengHei" pitchFamily="34" charset="-122"/>
                 <a:cs typeface="Microsoft JhengHei" pitchFamily="34" charset="-120"/>
               </a:rPr>
-              <a:t>Gemini 金鑰</a:t>
+              <a:t>OWNER_KEY（存取碼）</a:t>
             </a:r>
             <a:endParaRPr lang="en-US" sz="1500" dirty="0"/>
           </a:p>
@@ -8981,7 +9676,7 @@
                 <a:ea typeface="Microsoft JhengHei" pitchFamily="34" charset="-122"/>
                 <a:cs typeface="Microsoft JhengHei" pitchFamily="34" charset="-120"/>
               </a:rPr>
-              <a:t>步驟 2</a:t>
+              <a:t>第一步</a:t>
             </a:r>
             <a:endParaRPr lang="en-US" sz="1300" dirty="0"/>
           </a:p>
@@ -9104,7 +9799,7 @@
                 <a:ea typeface="Microsoft JhengHei" pitchFamily="34" charset="-122"/>
                 <a:cs typeface="Microsoft JhengHei" pitchFamily="34" charset="-120"/>
               </a:rPr>
-              <a:t>OWNER_KEY（存取碼）</a:t>
+              <a:t>/exec 網址</a:t>
             </a:r>
             <a:endParaRPr lang="en-US" sz="1500" dirty="0"/>
           </a:p>
@@ -9146,7 +9841,7 @@
                 <a:ea typeface="Microsoft JhengHei" pitchFamily="34" charset="-122"/>
                 <a:cs typeface="Microsoft JhengHei" pitchFamily="34" charset="-120"/>
               </a:rPr>
-              <a:t>步驟 3</a:t>
+              <a:t>第一步</a:t>
             </a:r>
             <a:endParaRPr lang="en-US" sz="1300" dirty="0"/>
           </a:p>
@@ -9269,7 +9964,7 @@
                 <a:ea typeface="Microsoft JhengHei" pitchFamily="34" charset="-122"/>
                 <a:cs typeface="Microsoft JhengHei" pitchFamily="34" charset="-120"/>
               </a:rPr>
-              <a:t>/exec 網址</a:t>
+              <a:t>Gemini 金鑰</a:t>
             </a:r>
             <a:endParaRPr lang="en-US" sz="1500" dirty="0"/>
           </a:p>
@@ -9311,7 +10006,7 @@
                 <a:ea typeface="Microsoft JhengHei" pitchFamily="34" charset="-122"/>
                 <a:cs typeface="Microsoft JhengHei" pitchFamily="34" charset="-120"/>
               </a:rPr>
-              <a:t>步驟 4</a:t>
+              <a:t>第三步</a:t>
             </a:r>
             <a:endParaRPr lang="en-US" sz="1300" dirty="0"/>
           </a:p>
@@ -9549,7 +10244,7 @@
                 <a:ea typeface="Microsoft JhengHei" pitchFamily="34" charset="-122"/>
                 <a:cs typeface="Microsoft JhengHei" pitchFamily="34" charset="-120"/>
               </a:rPr>
-              <a:t>步驟 1 / 7</a:t>
+              <a:t>第一步　後端（1/3）</a:t>
             </a:r>
             <a:endParaRPr lang="en-US" sz="1200" dirty="0"/>
           </a:p>
@@ -10276,158 +10971,6 @@
                 <a:cs typeface="Microsoft JhengHei" pitchFamily="34" charset="-120"/>
               </a:rPr>
               <a:t> 貼上，按儲存（磁碟片圖示）</a:t>
-            </a:r>
-            <a:endParaRPr lang="en-US" sz="1600" dirty="0"/>
-          </a:p>
-        </p:txBody>
-      </p:sp>
-      <p:sp>
-        <p:nvSpPr>
-          <p:cNvPr id="19" name="Shape 17"/>
-          <p:cNvSpPr/>
-          <p:nvPr/>
-        </p:nvSpPr>
-        <p:spPr>
-          <a:xfrm>
-            <a:off x="548640" y="4436872"/>
-            <a:ext cx="329184" cy="329184"/>
-          </a:xfrm>
-          <a:prstGeom prst="ellipse">
-            <a:avLst/>
-          </a:prstGeom>
-          <a:solidFill>
-            <a:srgbClr val="F1EBFA"/>
-          </a:solidFill>
-          <a:ln/>
-        </p:spPr>
-      </p:sp>
-      <p:sp>
-        <p:nvSpPr>
-          <p:cNvPr id="20" name="Text 18"/>
-          <p:cNvSpPr txBox="1"/>
-          <p:nvPr/>
-        </p:nvSpPr>
-        <p:spPr>
-          <a:xfrm>
-            <a:off x="548640" y="4436872"/>
-            <a:ext cx="329184" cy="329184"/>
-          </a:xfrm>
-          <a:prstGeom prst="rect">
-            <a:avLst/>
-          </a:prstGeom>
-          <a:noFill/>
-          <a:ln/>
-        </p:spPr>
-        <p:txBody>
-          <a:bodyPr wrap="square" lIns="0" tIns="0" rIns="0" bIns="0" rtlCol="0" anchor="ctr"/>
-          <a:lstStyle/>
-          <a:p>
-            <a:pPr algn="ctr" indent="0" marL="0">
-              <a:buNone/>
-            </a:pPr>
-            <a:r>
-              <a:rPr lang="en-US" sz="1300" b="1" dirty="0">
-                <a:solidFill>
-                  <a:srgbClr val="6A35A8"/>
-                </a:solidFill>
-                <a:latin typeface="Microsoft JhengHei" pitchFamily="34" charset="0"/>
-                <a:ea typeface="Microsoft JhengHei" pitchFamily="34" charset="-122"/>
-                <a:cs typeface="Microsoft JhengHei" pitchFamily="34" charset="-120"/>
-              </a:rPr>
-              <a:t>5</a:t>
-            </a:r>
-            <a:endParaRPr lang="en-US" sz="1300" dirty="0"/>
-          </a:p>
-        </p:txBody>
-      </p:sp>
-      <p:sp>
-        <p:nvSpPr>
-          <p:cNvPr id="21" name="Text 19"/>
-          <p:cNvSpPr txBox="1"/>
-          <p:nvPr/>
-        </p:nvSpPr>
-        <p:spPr>
-          <a:xfrm>
-            <a:off x="1060704" y="4418584"/>
-            <a:ext cx="5980176" cy="334264"/>
-          </a:xfrm>
-          <a:prstGeom prst="rect">
-            <a:avLst/>
-          </a:prstGeom>
-          <a:noFill/>
-          <a:ln/>
-        </p:spPr>
-        <p:txBody>
-          <a:bodyPr wrap="square" lIns="0" tIns="0" rIns="0" bIns="0" rtlCol="0" anchor="t"/>
-          <a:lstStyle/>
-          <a:p>
-            <a:pPr algn="l" indent="0" marL="0">
-              <a:lnSpc>
-                <a:spcPct val="112000"/>
-              </a:lnSpc>
-              <a:buNone/>
-            </a:pPr>
-            <a:r>
-              <a:rPr lang="en-US" sz="1600" dirty="0">
-                <a:solidFill>
-                  <a:srgbClr val="1E1A26"/>
-                </a:solidFill>
-                <a:latin typeface="Microsoft JhengHei" pitchFamily="34" charset="0"/>
-                <a:ea typeface="Microsoft JhengHei" pitchFamily="34" charset="-122"/>
-                <a:cs typeface="Microsoft JhengHei" pitchFamily="34" charset="-120"/>
-              </a:rPr>
-              <a:t>左邊齒輪「</a:t>
-            </a:r>
-            <a:pPr algn="l" indent="0" marL="0">
-              <a:lnSpc>
-                <a:spcPct val="112000"/>
-              </a:lnSpc>
-              <a:buNone/>
-            </a:pPr>
-            <a:r>
-              <a:rPr lang="en-US" sz="1600" b="1" dirty="0">
-                <a:solidFill>
-                  <a:srgbClr val="1E1A26"/>
-                </a:solidFill>
-                <a:latin typeface="Microsoft JhengHei" pitchFamily="34" charset="0"/>
-                <a:ea typeface="Microsoft JhengHei" pitchFamily="34" charset="-122"/>
-                <a:cs typeface="Microsoft JhengHei" pitchFamily="34" charset="-120"/>
-              </a:rPr>
-              <a:t>專案設定</a:t>
-            </a:r>
-            <a:pPr algn="l" indent="0" marL="0">
-              <a:lnSpc>
-                <a:spcPct val="112000"/>
-              </a:lnSpc>
-              <a:buNone/>
-            </a:pPr>
-            <a:r>
-              <a:rPr lang="en-US" sz="1600" dirty="0">
-                <a:solidFill>
-                  <a:srgbClr val="1E1A26"/>
-                </a:solidFill>
-                <a:latin typeface="Microsoft JhengHei" pitchFamily="34" charset="0"/>
-                <a:ea typeface="Microsoft JhengHei" pitchFamily="34" charset="-122"/>
-                <a:cs typeface="Microsoft JhengHei" pitchFamily="34" charset="-120"/>
-              </a:rPr>
-              <a:t>」→「時區」選 </a:t>
-            </a:r>
-            <a:pPr algn="l" indent="0" marL="0">
-              <a:lnSpc>
-                <a:spcPct val="112000"/>
-              </a:lnSpc>
-              <a:buNone/>
-            </a:pPr>
-            <a:r>
-              <a:rPr lang="en-US" sz="1600" b="1" dirty="0">
-                <a:solidFill>
-                  <a:srgbClr val="1E1A26"/>
-                </a:solidFill>
-                <a:latin typeface="Microsoft JhengHei" pitchFamily="34" charset="0"/>
-                <a:ea typeface="Microsoft JhengHei" pitchFamily="34" charset="-122"/>
-                <a:cs typeface="Microsoft JhengHei" pitchFamily="34" charset="-120"/>
-              </a:rPr>
-              <a:t>(GMT+08:00) 台北</a:t>
             </a:r>
             <a:endParaRPr lang="en-US" sz="1600" dirty="0"/>
           </a:p>
@@ -10864,6 +11407,17 @@
               <a:buNone/>
             </a:pPr>
             <a:r>
+              <a:rPr lang="en-US" sz="1400" b="1" dirty="0">
+                <a:solidFill>
+                  <a:srgbClr val="1E1A26"/>
+                </a:solidFill>
+                <a:latin typeface="Microsoft JhengHei" pitchFamily="34" charset="0"/>
+                <a:ea typeface="Microsoft JhengHei" pitchFamily="34" charset="-122"/>
+                <a:cs typeface="Microsoft JhengHei" pitchFamily="34" charset="-120"/>
+              </a:rPr>
+              <a:t>時區不用改</a:t>
+            </a:r>
+            <a:r>
               <a:rPr lang="en-US" sz="1400" dirty="0">
                 <a:solidFill>
                   <a:srgbClr val="1E1A26"/>
@@ -10872,1273 +11426,7 @@
                 <a:ea typeface="Microsoft JhengHei" pitchFamily="34" charset="-122"/>
                 <a:cs typeface="Microsoft JhengHei" pitchFamily="34" charset="-120"/>
               </a:rPr>
-              <a:t>專案設定 → 時區：</a:t>
-            </a:r>
-            <a:pPr algn="l" indent="0" marL="0">
-              <a:lnSpc>
-                <a:spcPct val="112000"/>
-              </a:lnSpc>
-              <a:buNone/>
-            </a:pPr>
-            <a:r>
-              <a:rPr lang="en-US" sz="1400" b="1" dirty="0">
-                <a:solidFill>
-                  <a:srgbClr val="1E1A26"/>
-                </a:solidFill>
-                <a:latin typeface="Microsoft JhengHei" pitchFamily="34" charset="0"/>
-                <a:ea typeface="Microsoft JhengHei" pitchFamily="34" charset="-122"/>
-                <a:cs typeface="Microsoft JhengHei" pitchFamily="34" charset="-120"/>
-              </a:rPr>
-              <a:t>(GMT+08:00) 台北</a:t>
-            </a:r>
-            <a:endParaRPr lang="en-US" sz="1400" dirty="0"/>
-          </a:p>
-        </p:txBody>
-      </p:sp>
-    </p:spTree>
-  </p:cSld>
-  <p:clrMapOvr>
-    <a:masterClrMapping/>
-  </p:clrMapOvr>
-</p:sld>
-</file>
-
-<file path=ppt/slides/slide5.xml><?xml version="1.0" encoding="utf-8"?>
-<p:sld xmlns:a="http://schemas.openxmlformats.org/drawingml/2006/main" xmlns:r="http://schemas.openxmlformats.org/officeDocument/2006/relationships" xmlns:p="http://schemas.openxmlformats.org/presentationml/2006/main">
-  <p:cSld name="Slide 5">
-    <p:bg>
-      <p:bgPr>
-        <a:solidFill>
-          <a:srgbClr val="FFFFFF"/>
-        </a:solidFill>
-      </p:bgPr>
-    </p:bg>
-    <p:spTree>
-      <p:nvGrpSpPr>
-        <p:cNvPr id="1" name=""/>
-        <p:cNvGrpSpPr/>
-        <p:nvPr/>
-      </p:nvGrpSpPr>
-      <p:grpSpPr>
-        <a:xfrm>
-          <a:off x="0" y="0"/>
-          <a:ext cx="0" cy="0"/>
-          <a:chOff x="0" y="0"/>
-          <a:chExt cx="0" cy="0"/>
-        </a:xfrm>
-      </p:grpSpPr>
-      <p:sp>
-        <p:nvSpPr>
-          <p:cNvPr id="2" name="Shape 0"/>
-          <p:cNvSpPr/>
-          <p:nvPr/>
-        </p:nvSpPr>
-        <p:spPr>
-          <a:xfrm>
-            <a:off x="548640" y="457200"/>
-            <a:ext cx="749808" cy="749808"/>
-          </a:xfrm>
-          <a:prstGeom prst="ellipse">
-            <a:avLst/>
-          </a:prstGeom>
-          <a:solidFill>
-            <a:srgbClr val="6A35A8"/>
-          </a:solidFill>
-          <a:ln/>
-        </p:spPr>
-      </p:sp>
-      <p:sp>
-        <p:nvSpPr>
-          <p:cNvPr id="3" name="Text 1"/>
-          <p:cNvSpPr txBox="1"/>
-          <p:nvPr/>
-        </p:nvSpPr>
-        <p:spPr>
-          <a:xfrm>
-            <a:off x="548640" y="457200"/>
-            <a:ext cx="749808" cy="749808"/>
-          </a:xfrm>
-          <a:prstGeom prst="rect">
-            <a:avLst/>
-          </a:prstGeom>
-          <a:noFill/>
-          <a:ln/>
-        </p:spPr>
-        <p:txBody>
-          <a:bodyPr wrap="square" lIns="0" tIns="0" rIns="0" bIns="0" rtlCol="0" anchor="ctr"/>
-          <a:lstStyle/>
-          <a:p>
-            <a:pPr algn="ctr" indent="0" marL="0">
-              <a:buNone/>
-            </a:pPr>
-            <a:r>
-              <a:rPr lang="en-US" sz="2800" b="1" dirty="0">
-                <a:solidFill>
-                  <a:srgbClr val="FFFFFF"/>
-                </a:solidFill>
-                <a:latin typeface="Microsoft JhengHei" pitchFamily="34" charset="0"/>
-                <a:ea typeface="Microsoft JhengHei" pitchFamily="34" charset="-122"/>
-                <a:cs typeface="Microsoft JhengHei" pitchFamily="34" charset="-120"/>
-              </a:rPr>
-              <a:t>2</a:t>
-            </a:r>
-            <a:endParaRPr lang="en-US" sz="2800" dirty="0"/>
-          </a:p>
-        </p:txBody>
-      </p:sp>
-      <p:sp>
-        <p:nvSpPr>
-          <p:cNvPr id="4" name="Text 2"/>
-          <p:cNvSpPr txBox="1"/>
-          <p:nvPr/>
-        </p:nvSpPr>
-        <p:spPr>
-          <a:xfrm>
-            <a:off x="1508760" y="420624"/>
-            <a:ext cx="3657600" cy="274320"/>
-          </a:xfrm>
-          <a:prstGeom prst="rect">
-            <a:avLst/>
-          </a:prstGeom>
-          <a:noFill/>
-          <a:ln/>
-        </p:spPr>
-        <p:txBody>
-          <a:bodyPr wrap="square" lIns="0" tIns="0" rIns="0" bIns="0" rtlCol="0" anchor="t"/>
-          <a:lstStyle/>
-          <a:p>
-            <a:pPr algn="l" indent="0" marL="0">
-              <a:lnSpc>
-                <a:spcPct val="112000"/>
-              </a:lnSpc>
-              <a:buNone/>
-            </a:pPr>
-            <a:r>
-              <a:rPr lang="en-US" sz="1200" b="1" dirty="0">
-                <a:solidFill>
-                  <a:srgbClr val="6A35A8"/>
-                </a:solidFill>
-                <a:latin typeface="Microsoft JhengHei" pitchFamily="34" charset="0"/>
-                <a:ea typeface="Microsoft JhengHei" pitchFamily="34" charset="-122"/>
-                <a:cs typeface="Microsoft JhengHei" pitchFamily="34" charset="-120"/>
-              </a:rPr>
-              <a:t>步驟 2 / 7</a:t>
-            </a:r>
-            <a:endParaRPr lang="en-US" sz="1200" dirty="0"/>
-          </a:p>
-        </p:txBody>
-      </p:sp>
-      <p:sp>
-        <p:nvSpPr>
-          <p:cNvPr id="5" name="Text 3"/>
-          <p:cNvSpPr txBox="1"/>
-          <p:nvPr/>
-        </p:nvSpPr>
-        <p:spPr>
-          <a:xfrm>
-            <a:off x="1508760" y="676656"/>
-            <a:ext cx="10134295" cy="566928"/>
-          </a:xfrm>
-          <a:prstGeom prst="rect">
-            <a:avLst/>
-          </a:prstGeom>
-          <a:noFill/>
-          <a:ln/>
-        </p:spPr>
-        <p:txBody>
-          <a:bodyPr wrap="square" lIns="0" tIns="0" rIns="0" bIns="0" rtlCol="0" anchor="t"/>
-          <a:lstStyle/>
-          <a:p>
-            <a:pPr algn="l" indent="0" marL="0">
-              <a:lnSpc>
-                <a:spcPct val="112000"/>
-              </a:lnSpc>
-              <a:buNone/>
-            </a:pPr>
-            <a:r>
-              <a:rPr lang="en-US" sz="3000" b="1" dirty="0">
-                <a:solidFill>
-                  <a:srgbClr val="1E1A26"/>
-                </a:solidFill>
-                <a:latin typeface="Microsoft JhengHei" pitchFamily="34" charset="0"/>
-                <a:ea typeface="Microsoft JhengHei" pitchFamily="34" charset="-122"/>
-                <a:cs typeface="Microsoft JhengHei" pitchFamily="34" charset="-120"/>
-              </a:rPr>
-              <a:t>申請 Gemini 金鑰（免費）</a:t>
-            </a:r>
-            <a:endParaRPr lang="en-US" sz="3000" dirty="0"/>
-          </a:p>
-        </p:txBody>
-      </p:sp>
-      <p:sp>
-        <p:nvSpPr>
-          <p:cNvPr id="6" name="Text 4"/>
-          <p:cNvSpPr txBox="1"/>
-          <p:nvPr/>
-        </p:nvSpPr>
-        <p:spPr>
-          <a:xfrm>
-            <a:off x="1508760" y="1243584"/>
-            <a:ext cx="10134295" cy="329184"/>
-          </a:xfrm>
-          <a:prstGeom prst="rect">
-            <a:avLst/>
-          </a:prstGeom>
-          <a:noFill/>
-          <a:ln/>
-        </p:spPr>
-        <p:txBody>
-          <a:bodyPr wrap="square" lIns="0" tIns="0" rIns="0" bIns="0" rtlCol="0" anchor="t"/>
-          <a:lstStyle/>
-          <a:p>
-            <a:pPr algn="l" indent="0" marL="0">
-              <a:lnSpc>
-                <a:spcPct val="112000"/>
-              </a:lnSpc>
-              <a:buNone/>
-            </a:pPr>
-            <a:r>
-              <a:rPr lang="en-US" sz="1500" dirty="0">
-                <a:solidFill>
-                  <a:srgbClr val="5F586C"/>
-                </a:solidFill>
-                <a:latin typeface="Microsoft JhengHei" pitchFamily="34" charset="0"/>
-                <a:ea typeface="Microsoft JhengHei" pitchFamily="34" charset="-122"/>
-                <a:cs typeface="Microsoft JhengHei" pitchFamily="34" charset="-120"/>
-              </a:rPr>
-              <a:t>讓後端讀得懂票券截圖</a:t>
-            </a:r>
-            <a:endParaRPr lang="en-US" sz="1500" dirty="0"/>
-          </a:p>
-        </p:txBody>
-      </p:sp>
-      <p:sp>
-        <p:nvSpPr>
-          <p:cNvPr id="7" name="Shape 5"/>
-          <p:cNvSpPr/>
-          <p:nvPr/>
-        </p:nvSpPr>
-        <p:spPr>
-          <a:xfrm>
-            <a:off x="548640" y="1892808"/>
-            <a:ext cx="329184" cy="329184"/>
-          </a:xfrm>
-          <a:prstGeom prst="ellipse">
-            <a:avLst/>
-          </a:prstGeom>
-          <a:solidFill>
-            <a:srgbClr val="F1EBFA"/>
-          </a:solidFill>
-          <a:ln/>
-        </p:spPr>
-      </p:sp>
-      <p:sp>
-        <p:nvSpPr>
-          <p:cNvPr id="8" name="Text 6"/>
-          <p:cNvSpPr txBox="1"/>
-          <p:nvPr/>
-        </p:nvSpPr>
-        <p:spPr>
-          <a:xfrm>
-            <a:off x="548640" y="1892808"/>
-            <a:ext cx="329184" cy="329184"/>
-          </a:xfrm>
-          <a:prstGeom prst="rect">
-            <a:avLst/>
-          </a:prstGeom>
-          <a:noFill/>
-          <a:ln/>
-        </p:spPr>
-        <p:txBody>
-          <a:bodyPr wrap="square" lIns="0" tIns="0" rIns="0" bIns="0" rtlCol="0" anchor="ctr"/>
-          <a:lstStyle/>
-          <a:p>
-            <a:pPr algn="ctr" indent="0" marL="0">
-              <a:buNone/>
-            </a:pPr>
-            <a:r>
-              <a:rPr lang="en-US" sz="1300" b="1" dirty="0">
-                <a:solidFill>
-                  <a:srgbClr val="6A35A8"/>
-                </a:solidFill>
-                <a:latin typeface="Microsoft JhengHei" pitchFamily="34" charset="0"/>
-                <a:ea typeface="Microsoft JhengHei" pitchFamily="34" charset="-122"/>
-                <a:cs typeface="Microsoft JhengHei" pitchFamily="34" charset="-120"/>
-              </a:rPr>
-              <a:t>1</a:t>
-            </a:r>
-            <a:endParaRPr lang="en-US" sz="1300" dirty="0"/>
-          </a:p>
-        </p:txBody>
-      </p:sp>
-      <p:sp>
-        <p:nvSpPr>
-          <p:cNvPr id="9" name="Text 7"/>
-          <p:cNvSpPr txBox="1"/>
-          <p:nvPr/>
-        </p:nvSpPr>
-        <p:spPr>
-          <a:xfrm>
-            <a:off x="1060704" y="1874520"/>
-            <a:ext cx="5980176" cy="622808"/>
-          </a:xfrm>
-          <a:prstGeom prst="rect">
-            <a:avLst/>
-          </a:prstGeom>
-          <a:noFill/>
-          <a:ln/>
-        </p:spPr>
-        <p:txBody>
-          <a:bodyPr wrap="square" lIns="0" tIns="0" rIns="0" bIns="0" rtlCol="0" anchor="t"/>
-          <a:lstStyle/>
-          <a:p>
-            <a:pPr algn="l" indent="0" marL="0">
-              <a:lnSpc>
-                <a:spcPct val="112000"/>
-              </a:lnSpc>
-              <a:buNone/>
-            </a:pPr>
-            <a:r>
-              <a:rPr lang="en-US" sz="1600" dirty="0">
-                <a:solidFill>
-                  <a:srgbClr val="1E1A26"/>
-                </a:solidFill>
-                <a:latin typeface="Microsoft JhengHei" pitchFamily="34" charset="0"/>
-                <a:ea typeface="Microsoft JhengHei" pitchFamily="34" charset="-122"/>
-                <a:cs typeface="Microsoft JhengHei" pitchFamily="34" charset="-120"/>
-              </a:rPr>
-              <a:t>打開 </a:t>
-            </a:r>
-            <a:pPr algn="l" indent="0" marL="0">
-              <a:lnSpc>
-                <a:spcPct val="112000"/>
-              </a:lnSpc>
-              <a:buNone/>
-            </a:pPr>
-            <a:r>
-              <a:rPr lang="en-US" sz="1600" b="1" dirty="0">
-                <a:solidFill>
-                  <a:srgbClr val="1E1A26"/>
-                </a:solidFill>
-                <a:latin typeface="Microsoft JhengHei" pitchFamily="34" charset="0"/>
-                <a:ea typeface="Microsoft JhengHei" pitchFamily="34" charset="-122"/>
-                <a:cs typeface="Microsoft JhengHei" pitchFamily="34" charset="-120"/>
-              </a:rPr>
-              <a:t>aistudio.google.com/apikey</a:t>
-            </a:r>
-            <a:pPr algn="l" indent="0" marL="0">
-              <a:lnSpc>
-                <a:spcPct val="112000"/>
-              </a:lnSpc>
-              <a:buNone/>
-            </a:pPr>
-            <a:r>
-              <a:rPr lang="en-US" sz="1600" dirty="0">
-                <a:solidFill>
-                  <a:srgbClr val="1E1A26"/>
-                </a:solidFill>
-                <a:latin typeface="Microsoft JhengHei" pitchFamily="34" charset="0"/>
-                <a:ea typeface="Microsoft JhengHei" pitchFamily="34" charset="-122"/>
-                <a:cs typeface="Microsoft JhengHei" pitchFamily="34" charset="-120"/>
-              </a:rPr>
-              <a:t>（用同一個 Google 帳號登入）</a:t>
-            </a:r>
-            <a:endParaRPr lang="en-US" sz="1600" dirty="0"/>
-          </a:p>
-        </p:txBody>
-      </p:sp>
-      <p:sp>
-        <p:nvSpPr>
-          <p:cNvPr id="10" name="Shape 8"/>
-          <p:cNvSpPr/>
-          <p:nvPr/>
-        </p:nvSpPr>
-        <p:spPr>
-          <a:xfrm>
-            <a:off x="548640" y="2652776"/>
-            <a:ext cx="329184" cy="329184"/>
-          </a:xfrm>
-          <a:prstGeom prst="ellipse">
-            <a:avLst/>
-          </a:prstGeom>
-          <a:solidFill>
-            <a:srgbClr val="F1EBFA"/>
-          </a:solidFill>
-          <a:ln/>
-        </p:spPr>
-      </p:sp>
-      <p:sp>
-        <p:nvSpPr>
-          <p:cNvPr id="11" name="Text 9"/>
-          <p:cNvSpPr txBox="1"/>
-          <p:nvPr/>
-        </p:nvSpPr>
-        <p:spPr>
-          <a:xfrm>
-            <a:off x="548640" y="2652776"/>
-            <a:ext cx="329184" cy="329184"/>
-          </a:xfrm>
-          <a:prstGeom prst="rect">
-            <a:avLst/>
-          </a:prstGeom>
-          <a:noFill/>
-          <a:ln/>
-        </p:spPr>
-        <p:txBody>
-          <a:bodyPr wrap="square" lIns="0" tIns="0" rIns="0" bIns="0" rtlCol="0" anchor="ctr"/>
-          <a:lstStyle/>
-          <a:p>
-            <a:pPr algn="ctr" indent="0" marL="0">
-              <a:buNone/>
-            </a:pPr>
-            <a:r>
-              <a:rPr lang="en-US" sz="1300" b="1" dirty="0">
-                <a:solidFill>
-                  <a:srgbClr val="6A35A8"/>
-                </a:solidFill>
-                <a:latin typeface="Microsoft JhengHei" pitchFamily="34" charset="0"/>
-                <a:ea typeface="Microsoft JhengHei" pitchFamily="34" charset="-122"/>
-                <a:cs typeface="Microsoft JhengHei" pitchFamily="34" charset="-120"/>
-              </a:rPr>
-              <a:t>2</a:t>
-            </a:r>
-            <a:endParaRPr lang="en-US" sz="1300" dirty="0"/>
-          </a:p>
-        </p:txBody>
-      </p:sp>
-      <p:sp>
-        <p:nvSpPr>
-          <p:cNvPr id="12" name="Text 10"/>
-          <p:cNvSpPr txBox="1"/>
-          <p:nvPr/>
-        </p:nvSpPr>
-        <p:spPr>
-          <a:xfrm>
-            <a:off x="1060704" y="2634488"/>
-            <a:ext cx="5980176" cy="622808"/>
-          </a:xfrm>
-          <a:prstGeom prst="rect">
-            <a:avLst/>
-          </a:prstGeom>
-          <a:noFill/>
-          <a:ln/>
-        </p:spPr>
-        <p:txBody>
-          <a:bodyPr wrap="square" lIns="0" tIns="0" rIns="0" bIns="0" rtlCol="0" anchor="t"/>
-          <a:lstStyle/>
-          <a:p>
-            <a:pPr algn="l" indent="0" marL="0">
-              <a:lnSpc>
-                <a:spcPct val="112000"/>
-              </a:lnSpc>
-              <a:buNone/>
-            </a:pPr>
-            <a:r>
-              <a:rPr lang="en-US" sz="1600" dirty="0">
-                <a:solidFill>
-                  <a:srgbClr val="1E1A26"/>
-                </a:solidFill>
-                <a:latin typeface="Microsoft JhengHei" pitchFamily="34" charset="0"/>
-                <a:ea typeface="Microsoft JhengHei" pitchFamily="34" charset="-122"/>
-                <a:cs typeface="Microsoft JhengHei" pitchFamily="34" charset="-120"/>
-              </a:rPr>
-              <a:t>按「</a:t>
-            </a:r>
-            <a:pPr algn="l" indent="0" marL="0">
-              <a:lnSpc>
-                <a:spcPct val="112000"/>
-              </a:lnSpc>
-              <a:buNone/>
-            </a:pPr>
-            <a:r>
-              <a:rPr lang="en-US" sz="1600" b="1" dirty="0">
-                <a:solidFill>
-                  <a:srgbClr val="1E1A26"/>
-                </a:solidFill>
-                <a:latin typeface="Microsoft JhengHei" pitchFamily="34" charset="0"/>
-                <a:ea typeface="Microsoft JhengHei" pitchFamily="34" charset="-122"/>
-                <a:cs typeface="Microsoft JhengHei" pitchFamily="34" charset="-120"/>
-              </a:rPr>
-              <a:t>Create API key</a:t>
-            </a:r>
-            <a:pPr algn="l" indent="0" marL="0">
-              <a:lnSpc>
-                <a:spcPct val="112000"/>
-              </a:lnSpc>
-              <a:buNone/>
-            </a:pPr>
-            <a:r>
-              <a:rPr lang="en-US" sz="1600" dirty="0">
-                <a:solidFill>
-                  <a:srgbClr val="1E1A26"/>
-                </a:solidFill>
-                <a:latin typeface="Microsoft JhengHei" pitchFamily="34" charset="0"/>
-                <a:ea typeface="Microsoft JhengHei" pitchFamily="34" charset="-122"/>
-                <a:cs typeface="Microsoft JhengHei" pitchFamily="34" charset="-120"/>
-              </a:rPr>
-              <a:t>（建立 API 金鑰）」，複製那一串（</a:t>
-            </a:r>
-            <a:pPr algn="l" indent="0" marL="0">
-              <a:lnSpc>
-                <a:spcPct val="112000"/>
-              </a:lnSpc>
-              <a:buNone/>
-            </a:pPr>
-            <a:r>
-              <a:rPr lang="en-US" sz="1600" b="1" dirty="0">
-                <a:solidFill>
-                  <a:srgbClr val="6A35A8"/>
-                </a:solidFill>
-                <a:latin typeface="Courier New" pitchFamily="34" charset="0"/>
-                <a:ea typeface="Courier New" pitchFamily="34" charset="-122"/>
-                <a:cs typeface="Courier New" pitchFamily="34" charset="-120"/>
-              </a:rPr>
-              <a:t>AIza</a:t>
-            </a:r>
-            <a:pPr algn="l" indent="0" marL="0">
-              <a:lnSpc>
-                <a:spcPct val="112000"/>
-              </a:lnSpc>
-              <a:buNone/>
-            </a:pPr>
-            <a:r>
-              <a:rPr lang="en-US" sz="1600" dirty="0">
-                <a:solidFill>
-                  <a:srgbClr val="1E1A26"/>
-                </a:solidFill>
-                <a:latin typeface="Microsoft JhengHei" pitchFamily="34" charset="0"/>
-                <a:ea typeface="Microsoft JhengHei" pitchFamily="34" charset="-122"/>
-                <a:cs typeface="Microsoft JhengHei" pitchFamily="34" charset="-120"/>
-              </a:rPr>
-              <a:t> 開頭）</a:t>
-            </a:r>
-            <a:endParaRPr lang="en-US" sz="1600" dirty="0"/>
-          </a:p>
-        </p:txBody>
-      </p:sp>
-      <p:sp>
-        <p:nvSpPr>
-          <p:cNvPr id="13" name="Shape 11"/>
-          <p:cNvSpPr/>
-          <p:nvPr/>
-        </p:nvSpPr>
-        <p:spPr>
-          <a:xfrm>
-            <a:off x="548640" y="3412744"/>
-            <a:ext cx="329184" cy="329184"/>
-          </a:xfrm>
-          <a:prstGeom prst="ellipse">
-            <a:avLst/>
-          </a:prstGeom>
-          <a:solidFill>
-            <a:srgbClr val="F1EBFA"/>
-          </a:solidFill>
-          <a:ln/>
-        </p:spPr>
-      </p:sp>
-      <p:sp>
-        <p:nvSpPr>
-          <p:cNvPr id="14" name="Text 12"/>
-          <p:cNvSpPr txBox="1"/>
-          <p:nvPr/>
-        </p:nvSpPr>
-        <p:spPr>
-          <a:xfrm>
-            <a:off x="548640" y="3412744"/>
-            <a:ext cx="329184" cy="329184"/>
-          </a:xfrm>
-          <a:prstGeom prst="rect">
-            <a:avLst/>
-          </a:prstGeom>
-          <a:noFill/>
-          <a:ln/>
-        </p:spPr>
-        <p:txBody>
-          <a:bodyPr wrap="square" lIns="0" tIns="0" rIns="0" bIns="0" rtlCol="0" anchor="ctr"/>
-          <a:lstStyle/>
-          <a:p>
-            <a:pPr algn="ctr" indent="0" marL="0">
-              <a:buNone/>
-            </a:pPr>
-            <a:r>
-              <a:rPr lang="en-US" sz="1300" b="1" dirty="0">
-                <a:solidFill>
-                  <a:srgbClr val="6A35A8"/>
-                </a:solidFill>
-                <a:latin typeface="Microsoft JhengHei" pitchFamily="34" charset="0"/>
-                <a:ea typeface="Microsoft JhengHei" pitchFamily="34" charset="-122"/>
-                <a:cs typeface="Microsoft JhengHei" pitchFamily="34" charset="-120"/>
-              </a:rPr>
-              <a:t>3</a:t>
-            </a:r>
-            <a:endParaRPr lang="en-US" sz="1300" dirty="0"/>
-          </a:p>
-        </p:txBody>
-      </p:sp>
-      <p:sp>
-        <p:nvSpPr>
-          <p:cNvPr id="15" name="Text 13"/>
-          <p:cNvSpPr txBox="1"/>
-          <p:nvPr/>
-        </p:nvSpPr>
-        <p:spPr>
-          <a:xfrm>
-            <a:off x="1060704" y="3394456"/>
-            <a:ext cx="5980176" cy="622808"/>
-          </a:xfrm>
-          <a:prstGeom prst="rect">
-            <a:avLst/>
-          </a:prstGeom>
-          <a:noFill/>
-          <a:ln/>
-        </p:spPr>
-        <p:txBody>
-          <a:bodyPr wrap="square" lIns="0" tIns="0" rIns="0" bIns="0" rtlCol="0" anchor="t"/>
-          <a:lstStyle/>
-          <a:p>
-            <a:pPr algn="l" indent="0" marL="0">
-              <a:lnSpc>
-                <a:spcPct val="112000"/>
-              </a:lnSpc>
-              <a:buNone/>
-            </a:pPr>
-            <a:r>
-              <a:rPr lang="en-US" sz="1600" dirty="0">
-                <a:solidFill>
-                  <a:srgbClr val="1E1A26"/>
-                </a:solidFill>
-                <a:latin typeface="Microsoft JhengHei" pitchFamily="34" charset="0"/>
-                <a:ea typeface="Microsoft JhengHei" pitchFamily="34" charset="-122"/>
-                <a:cs typeface="Microsoft JhengHei" pitchFamily="34" charset="-120"/>
-              </a:rPr>
-              <a:t>回到 Apps Script「</a:t>
-            </a:r>
-            <a:pPr algn="l" indent="0" marL="0">
-              <a:lnSpc>
-                <a:spcPct val="112000"/>
-              </a:lnSpc>
-              <a:buNone/>
-            </a:pPr>
-            <a:r>
-              <a:rPr lang="en-US" sz="1600" b="1" dirty="0">
-                <a:solidFill>
-                  <a:srgbClr val="1E1A26"/>
-                </a:solidFill>
-                <a:latin typeface="Microsoft JhengHei" pitchFamily="34" charset="0"/>
-                <a:ea typeface="Microsoft JhengHei" pitchFamily="34" charset="-122"/>
-                <a:cs typeface="Microsoft JhengHei" pitchFamily="34" charset="-120"/>
-              </a:rPr>
-              <a:t>專案設定</a:t>
-            </a:r>
-            <a:pPr algn="l" indent="0" marL="0">
-              <a:lnSpc>
-                <a:spcPct val="112000"/>
-              </a:lnSpc>
-              <a:buNone/>
-            </a:pPr>
-            <a:r>
-              <a:rPr lang="en-US" sz="1600" dirty="0">
-                <a:solidFill>
-                  <a:srgbClr val="1E1A26"/>
-                </a:solidFill>
-                <a:latin typeface="Microsoft JhengHei" pitchFamily="34" charset="0"/>
-                <a:ea typeface="Microsoft JhengHei" pitchFamily="34" charset="-122"/>
-                <a:cs typeface="Microsoft JhengHei" pitchFamily="34" charset="-120"/>
-              </a:rPr>
-              <a:t>」，拉到最下面「</a:t>
-            </a:r>
-            <a:pPr algn="l" indent="0" marL="0">
-              <a:lnSpc>
-                <a:spcPct val="112000"/>
-              </a:lnSpc>
-              <a:buNone/>
-            </a:pPr>
-            <a:r>
-              <a:rPr lang="en-US" sz="1600" b="1" dirty="0">
-                <a:solidFill>
-                  <a:srgbClr val="1E1A26"/>
-                </a:solidFill>
-                <a:latin typeface="Microsoft JhengHei" pitchFamily="34" charset="0"/>
-                <a:ea typeface="Microsoft JhengHei" pitchFamily="34" charset="-122"/>
-                <a:cs typeface="Microsoft JhengHei" pitchFamily="34" charset="-120"/>
-              </a:rPr>
-              <a:t>指令碼屬性</a:t>
-            </a:r>
-            <a:pPr algn="l" indent="0" marL="0">
-              <a:lnSpc>
-                <a:spcPct val="112000"/>
-              </a:lnSpc>
-              <a:buNone/>
-            </a:pPr>
-            <a:r>
-              <a:rPr lang="en-US" sz="1600" dirty="0">
-                <a:solidFill>
-                  <a:srgbClr val="1E1A26"/>
-                </a:solidFill>
-                <a:latin typeface="Microsoft JhengHei" pitchFamily="34" charset="0"/>
-                <a:ea typeface="Microsoft JhengHei" pitchFamily="34" charset="-122"/>
-                <a:cs typeface="Microsoft JhengHei" pitchFamily="34" charset="-120"/>
-              </a:rPr>
-              <a:t>」→「新增指令碼屬性」</a:t>
-            </a:r>
-            <a:endParaRPr lang="en-US" sz="1600" dirty="0"/>
-          </a:p>
-        </p:txBody>
-      </p:sp>
-      <p:sp>
-        <p:nvSpPr>
-          <p:cNvPr id="16" name="Shape 14"/>
-          <p:cNvSpPr/>
-          <p:nvPr/>
-        </p:nvSpPr>
-        <p:spPr>
-          <a:xfrm>
-            <a:off x="548640" y="4172712"/>
-            <a:ext cx="329184" cy="329184"/>
-          </a:xfrm>
-          <a:prstGeom prst="ellipse">
-            <a:avLst/>
-          </a:prstGeom>
-          <a:solidFill>
-            <a:srgbClr val="F1EBFA"/>
-          </a:solidFill>
-          <a:ln/>
-        </p:spPr>
-      </p:sp>
-      <p:sp>
-        <p:nvSpPr>
-          <p:cNvPr id="17" name="Text 15"/>
-          <p:cNvSpPr txBox="1"/>
-          <p:nvPr/>
-        </p:nvSpPr>
-        <p:spPr>
-          <a:xfrm>
-            <a:off x="548640" y="4172712"/>
-            <a:ext cx="329184" cy="329184"/>
-          </a:xfrm>
-          <a:prstGeom prst="rect">
-            <a:avLst/>
-          </a:prstGeom>
-          <a:noFill/>
-          <a:ln/>
-        </p:spPr>
-        <p:txBody>
-          <a:bodyPr wrap="square" lIns="0" tIns="0" rIns="0" bIns="0" rtlCol="0" anchor="ctr"/>
-          <a:lstStyle/>
-          <a:p>
-            <a:pPr algn="ctr" indent="0" marL="0">
-              <a:buNone/>
-            </a:pPr>
-            <a:r>
-              <a:rPr lang="en-US" sz="1300" b="1" dirty="0">
-                <a:solidFill>
-                  <a:srgbClr val="6A35A8"/>
-                </a:solidFill>
-                <a:latin typeface="Microsoft JhengHei" pitchFamily="34" charset="0"/>
-                <a:ea typeface="Microsoft JhengHei" pitchFamily="34" charset="-122"/>
-                <a:cs typeface="Microsoft JhengHei" pitchFamily="34" charset="-120"/>
-              </a:rPr>
-              <a:t>4</a:t>
-            </a:r>
-            <a:endParaRPr lang="en-US" sz="1300" dirty="0"/>
-          </a:p>
-        </p:txBody>
-      </p:sp>
-      <p:sp>
-        <p:nvSpPr>
-          <p:cNvPr id="18" name="Text 16"/>
-          <p:cNvSpPr txBox="1"/>
-          <p:nvPr/>
-        </p:nvSpPr>
-        <p:spPr>
-          <a:xfrm>
-            <a:off x="1060704" y="4154424"/>
-            <a:ext cx="5980176" cy="334264"/>
-          </a:xfrm>
-          <a:prstGeom prst="rect">
-            <a:avLst/>
-          </a:prstGeom>
-          <a:noFill/>
-          <a:ln/>
-        </p:spPr>
-        <p:txBody>
-          <a:bodyPr wrap="square" lIns="0" tIns="0" rIns="0" bIns="0" rtlCol="0" anchor="t"/>
-          <a:lstStyle/>
-          <a:p>
-            <a:pPr algn="l" indent="0" marL="0">
-              <a:lnSpc>
-                <a:spcPct val="112000"/>
-              </a:lnSpc>
-              <a:buNone/>
-            </a:pPr>
-            <a:r>
-              <a:rPr lang="en-US" sz="1600" dirty="0">
-                <a:solidFill>
-                  <a:srgbClr val="1E1A26"/>
-                </a:solidFill>
-                <a:latin typeface="Microsoft JhengHei" pitchFamily="34" charset="0"/>
-                <a:ea typeface="Microsoft JhengHei" pitchFamily="34" charset="-122"/>
-                <a:cs typeface="Microsoft JhengHei" pitchFamily="34" charset="-120"/>
-              </a:rPr>
-              <a:t>照右邊填好 →「</a:t>
-            </a:r>
-            <a:pPr algn="l" indent="0" marL="0">
-              <a:lnSpc>
-                <a:spcPct val="112000"/>
-              </a:lnSpc>
-              <a:buNone/>
-            </a:pPr>
-            <a:r>
-              <a:rPr lang="en-US" sz="1600" b="1" dirty="0">
-                <a:solidFill>
-                  <a:srgbClr val="1E1A26"/>
-                </a:solidFill>
-                <a:latin typeface="Microsoft JhengHei" pitchFamily="34" charset="0"/>
-                <a:ea typeface="Microsoft JhengHei" pitchFamily="34" charset="-122"/>
-                <a:cs typeface="Microsoft JhengHei" pitchFamily="34" charset="-120"/>
-              </a:rPr>
-              <a:t>儲存指令碼屬性</a:t>
-            </a:r>
-            <a:pPr algn="l" indent="0" marL="0">
-              <a:lnSpc>
-                <a:spcPct val="112000"/>
-              </a:lnSpc>
-              <a:buNone/>
-            </a:pPr>
-            <a:r>
-              <a:rPr lang="en-US" sz="1600" dirty="0">
-                <a:solidFill>
-                  <a:srgbClr val="1E1A26"/>
-                </a:solidFill>
-                <a:latin typeface="Microsoft JhengHei" pitchFamily="34" charset="0"/>
-                <a:ea typeface="Microsoft JhengHei" pitchFamily="34" charset="-122"/>
-                <a:cs typeface="Microsoft JhengHei" pitchFamily="34" charset="-120"/>
-              </a:rPr>
-              <a:t>」</a:t>
-            </a:r>
-            <a:endParaRPr lang="en-US" sz="1600" dirty="0"/>
-          </a:p>
-        </p:txBody>
-      </p:sp>
-      <p:sp>
-        <p:nvSpPr>
-          <p:cNvPr id="19" name="Shape 17"/>
-          <p:cNvSpPr/>
-          <p:nvPr/>
-        </p:nvSpPr>
-        <p:spPr>
-          <a:xfrm>
-            <a:off x="7635240" y="1874520"/>
-            <a:ext cx="4023360" cy="2148840"/>
-          </a:xfrm>
-          <a:prstGeom prst="roundRect">
-            <a:avLst>
-              <a:gd name="adj" fmla="val 6809"/>
-            </a:avLst>
-          </a:prstGeom>
-          <a:solidFill>
-            <a:srgbClr val="F1EBFA"/>
-          </a:solidFill>
-          <a:ln/>
-        </p:spPr>
-      </p:sp>
-      <p:sp>
-        <p:nvSpPr>
-          <p:cNvPr id="20" name="Text 18"/>
-          <p:cNvSpPr txBox="1"/>
-          <p:nvPr/>
-        </p:nvSpPr>
-        <p:spPr>
-          <a:xfrm>
-            <a:off x="7909560" y="2057400"/>
-            <a:ext cx="3474720" cy="320040"/>
-          </a:xfrm>
-          <a:prstGeom prst="rect">
-            <a:avLst/>
-          </a:prstGeom>
-          <a:noFill/>
-          <a:ln/>
-        </p:spPr>
-        <p:txBody>
-          <a:bodyPr wrap="square" lIns="0" tIns="0" rIns="0" bIns="0" rtlCol="0" anchor="t"/>
-          <a:lstStyle/>
-          <a:p>
-            <a:pPr algn="l" indent="0" marL="0">
-              <a:lnSpc>
-                <a:spcPct val="112000"/>
-              </a:lnSpc>
-              <a:buNone/>
-            </a:pPr>
-            <a:r>
-              <a:rPr lang="en-US" sz="1400" b="1" dirty="0">
-                <a:solidFill>
-                  <a:srgbClr val="6A35A8"/>
-                </a:solidFill>
-                <a:latin typeface="Microsoft JhengHei" pitchFamily="34" charset="0"/>
-                <a:ea typeface="Microsoft JhengHei" pitchFamily="34" charset="-122"/>
-                <a:cs typeface="Microsoft JhengHei" pitchFamily="34" charset="-120"/>
-              </a:rPr>
-              <a:t>專案設定 → 指令碼屬性</a:t>
-            </a:r>
-            <a:endParaRPr lang="en-US" sz="1400" dirty="0"/>
-          </a:p>
-        </p:txBody>
-      </p:sp>
-      <p:sp>
-        <p:nvSpPr>
-          <p:cNvPr id="21" name="Text 19"/>
-          <p:cNvSpPr txBox="1"/>
-          <p:nvPr/>
-        </p:nvSpPr>
-        <p:spPr>
-          <a:xfrm>
-            <a:off x="7909560" y="2487168"/>
-            <a:ext cx="1737360" cy="274320"/>
-          </a:xfrm>
-          <a:prstGeom prst="rect">
-            <a:avLst/>
-          </a:prstGeom>
-          <a:noFill/>
-          <a:ln/>
-        </p:spPr>
-        <p:txBody>
-          <a:bodyPr wrap="square" lIns="0" tIns="0" rIns="0" bIns="0" rtlCol="0" anchor="t"/>
-          <a:lstStyle/>
-          <a:p>
-            <a:pPr algn="l" indent="0" marL="0">
-              <a:lnSpc>
-                <a:spcPct val="112000"/>
-              </a:lnSpc>
-              <a:buNone/>
-            </a:pPr>
-            <a:r>
-              <a:rPr lang="en-US" sz="1200" dirty="0">
-                <a:solidFill>
-                  <a:srgbClr val="5F586C"/>
-                </a:solidFill>
-                <a:latin typeface="Microsoft JhengHei" pitchFamily="34" charset="0"/>
-                <a:ea typeface="Microsoft JhengHei" pitchFamily="34" charset="-122"/>
-                <a:cs typeface="Microsoft JhengHei" pitchFamily="34" charset="-120"/>
-              </a:rPr>
-              <a:t>屬性</a:t>
-            </a:r>
-            <a:endParaRPr lang="en-US" sz="1200" dirty="0"/>
-          </a:p>
-        </p:txBody>
-      </p:sp>
-      <p:sp>
-        <p:nvSpPr>
-          <p:cNvPr id="22" name="Text 20"/>
-          <p:cNvSpPr txBox="1"/>
-          <p:nvPr/>
-        </p:nvSpPr>
-        <p:spPr>
-          <a:xfrm>
-            <a:off x="9692640" y="2487168"/>
-            <a:ext cx="1737360" cy="274320"/>
-          </a:xfrm>
-          <a:prstGeom prst="rect">
-            <a:avLst/>
-          </a:prstGeom>
-          <a:noFill/>
-          <a:ln/>
-        </p:spPr>
-        <p:txBody>
-          <a:bodyPr wrap="square" lIns="0" tIns="0" rIns="0" bIns="0" rtlCol="0" anchor="t"/>
-          <a:lstStyle/>
-          <a:p>
-            <a:pPr algn="l" indent="0" marL="0">
-              <a:lnSpc>
-                <a:spcPct val="112000"/>
-              </a:lnSpc>
-              <a:buNone/>
-            </a:pPr>
-            <a:r>
-              <a:rPr lang="en-US" sz="1200" dirty="0">
-                <a:solidFill>
-                  <a:srgbClr val="5F586C"/>
-                </a:solidFill>
-                <a:latin typeface="Microsoft JhengHei" pitchFamily="34" charset="0"/>
-                <a:ea typeface="Microsoft JhengHei" pitchFamily="34" charset="-122"/>
-                <a:cs typeface="Microsoft JhengHei" pitchFamily="34" charset="-120"/>
-              </a:rPr>
-              <a:t>值</a:t>
-            </a:r>
-            <a:endParaRPr lang="en-US" sz="1200" dirty="0"/>
-          </a:p>
-        </p:txBody>
-      </p:sp>
-      <p:sp>
-        <p:nvSpPr>
-          <p:cNvPr id="23" name="Shape 21"/>
-          <p:cNvSpPr/>
-          <p:nvPr/>
-        </p:nvSpPr>
-        <p:spPr>
-          <a:xfrm>
-            <a:off x="7909560" y="2788920"/>
-            <a:ext cx="1645920" cy="548640"/>
-          </a:xfrm>
-          <a:prstGeom prst="roundRect">
-            <a:avLst>
-              <a:gd name="adj" fmla="val 13333"/>
-            </a:avLst>
-          </a:prstGeom>
-          <a:solidFill>
-            <a:srgbClr val="FFFFFF"/>
-          </a:solidFill>
-          <a:ln w="12700">
-            <a:solidFill>
-              <a:srgbClr val="E4D9F5"/>
-            </a:solidFill>
-            <a:prstDash val="solid"/>
-          </a:ln>
-        </p:spPr>
-      </p:sp>
-      <p:sp>
-        <p:nvSpPr>
-          <p:cNvPr id="24" name="Text 22"/>
-          <p:cNvSpPr txBox="1"/>
-          <p:nvPr/>
-        </p:nvSpPr>
-        <p:spPr>
-          <a:xfrm>
-            <a:off x="7909560" y="2788920"/>
-            <a:ext cx="1645920" cy="548640"/>
-          </a:xfrm>
-          <a:prstGeom prst="rect">
-            <a:avLst/>
-          </a:prstGeom>
-          <a:noFill/>
-          <a:ln/>
-        </p:spPr>
-        <p:txBody>
-          <a:bodyPr wrap="square" lIns="0" tIns="0" rIns="0" bIns="0" rtlCol="0" anchor="ctr"/>
-          <a:lstStyle/>
-          <a:p>
-            <a:pPr algn="ctr" indent="0" marL="0">
-              <a:buNone/>
-            </a:pPr>
-            <a:r>
-              <a:rPr lang="en-US" sz="1400" b="1" dirty="0">
-                <a:solidFill>
-                  <a:srgbClr val="1E1A26"/>
-                </a:solidFill>
-                <a:latin typeface="Courier New" pitchFamily="34" charset="0"/>
-                <a:ea typeface="Courier New" pitchFamily="34" charset="-122"/>
-                <a:cs typeface="Courier New" pitchFamily="34" charset="-120"/>
-              </a:rPr>
-              <a:t>GEMINI_KEY</a:t>
-            </a:r>
-            <a:endParaRPr lang="en-US" sz="1400" dirty="0"/>
-          </a:p>
-        </p:txBody>
-      </p:sp>
-      <p:sp>
-        <p:nvSpPr>
-          <p:cNvPr id="25" name="Shape 23"/>
-          <p:cNvSpPr/>
-          <p:nvPr/>
-        </p:nvSpPr>
-        <p:spPr>
-          <a:xfrm>
-            <a:off x="9692640" y="2788920"/>
-            <a:ext cx="1691640" cy="548640"/>
-          </a:xfrm>
-          <a:prstGeom prst="roundRect">
-            <a:avLst>
-              <a:gd name="adj" fmla="val 13333"/>
-            </a:avLst>
-          </a:prstGeom>
-          <a:solidFill>
-            <a:srgbClr val="FFFFFF"/>
-          </a:solidFill>
-          <a:ln w="12700">
-            <a:solidFill>
-              <a:srgbClr val="E4D9F5"/>
-            </a:solidFill>
-            <a:prstDash val="solid"/>
-          </a:ln>
-        </p:spPr>
-      </p:sp>
-      <p:sp>
-        <p:nvSpPr>
-          <p:cNvPr id="26" name="Text 24"/>
-          <p:cNvSpPr txBox="1"/>
-          <p:nvPr/>
-        </p:nvSpPr>
-        <p:spPr>
-          <a:xfrm>
-            <a:off x="9692640" y="2788920"/>
-            <a:ext cx="1691640" cy="548640"/>
-          </a:xfrm>
-          <a:prstGeom prst="rect">
-            <a:avLst/>
-          </a:prstGeom>
-          <a:noFill/>
-          <a:ln/>
-        </p:spPr>
-        <p:txBody>
-          <a:bodyPr wrap="square" lIns="0" tIns="0" rIns="0" bIns="0" rtlCol="0" anchor="ctr"/>
-          <a:lstStyle/>
-          <a:p>
-            <a:pPr algn="ctr" indent="0" marL="0">
-              <a:buNone/>
-            </a:pPr>
-            <a:r>
-              <a:rPr lang="en-US" sz="1400" b="1" dirty="0">
-                <a:solidFill>
-                  <a:srgbClr val="1E1A26"/>
-                </a:solidFill>
-                <a:latin typeface="Courier New" pitchFamily="34" charset="0"/>
-                <a:ea typeface="Courier New" pitchFamily="34" charset="-122"/>
-                <a:cs typeface="Courier New" pitchFamily="34" charset="-120"/>
-              </a:rPr>
-              <a:t>AIza…</a:t>
-            </a:r>
-            <a:pPr algn="ctr" indent="0" marL="0">
-              <a:buNone/>
-            </a:pPr>
-            <a:r>
-              <a:rPr lang="en-US" sz="1100" dirty="0">
-                <a:solidFill>
-                  <a:srgbClr val="5F586C"/>
-                </a:solidFill>
-                <a:latin typeface="Microsoft JhengHei" pitchFamily="34" charset="0"/>
-                <a:ea typeface="Microsoft JhengHei" pitchFamily="34" charset="-122"/>
-                <a:cs typeface="Microsoft JhengHei" pitchFamily="34" charset="-120"/>
-              </a:rPr>
-              <a:t>（你的金鑰）</a:t>
-            </a:r>
-            <a:endParaRPr lang="en-US" sz="1400" dirty="0"/>
-          </a:p>
-        </p:txBody>
-      </p:sp>
-      <p:sp>
-        <p:nvSpPr>
-          <p:cNvPr id="27" name="Text 25"/>
-          <p:cNvSpPr txBox="1"/>
-          <p:nvPr/>
-        </p:nvSpPr>
-        <p:spPr>
-          <a:xfrm>
-            <a:off x="7909560" y="3520440"/>
-            <a:ext cx="3474720" cy="274320"/>
-          </a:xfrm>
-          <a:prstGeom prst="rect">
-            <a:avLst/>
-          </a:prstGeom>
-          <a:noFill/>
-          <a:ln/>
-        </p:spPr>
-        <p:txBody>
-          <a:bodyPr wrap="square" lIns="0" tIns="0" rIns="0" bIns="0" rtlCol="0" anchor="t"/>
-          <a:lstStyle/>
-          <a:p>
-            <a:pPr algn="l" indent="0" marL="0">
-              <a:lnSpc>
-                <a:spcPct val="112000"/>
-              </a:lnSpc>
-              <a:buNone/>
-            </a:pPr>
-            <a:r>
-              <a:rPr lang="en-US" sz="1200" dirty="0">
-                <a:solidFill>
-                  <a:srgbClr val="5F586C"/>
-                </a:solidFill>
-                <a:latin typeface="Microsoft JhengHei" pitchFamily="34" charset="0"/>
-                <a:ea typeface="Microsoft JhengHei" pitchFamily="34" charset="-122"/>
-                <a:cs typeface="Microsoft JhengHei" pitchFamily="34" charset="-120"/>
-              </a:rPr>
-              <a:t>名稱要全大寫，值前後不要有空白</a:t>
-            </a:r>
-            <a:endParaRPr lang="en-US" sz="1200" dirty="0"/>
-          </a:p>
-        </p:txBody>
-      </p:sp>
-      <p:sp>
-        <p:nvSpPr>
-          <p:cNvPr id="28" name="Shape 26"/>
-          <p:cNvSpPr/>
-          <p:nvPr/>
-        </p:nvSpPr>
-        <p:spPr>
-          <a:xfrm>
-            <a:off x="7635240" y="4297680"/>
-            <a:ext cx="4023360" cy="1031748"/>
-          </a:xfrm>
-          <a:prstGeom prst="roundRect">
-            <a:avLst>
-              <a:gd name="adj" fmla="val 10635"/>
-            </a:avLst>
-          </a:prstGeom>
-          <a:solidFill>
-            <a:srgbClr val="F1EBFA"/>
-          </a:solidFill>
-          <a:ln/>
-        </p:spPr>
-      </p:sp>
-      <p:pic>
-        <p:nvPicPr>
-          <p:cNvPr id="29" name="Image 0" descr="preencoded.png">    </p:cNvPr>
-          <p:cNvPicPr>
-            <a:picLocks noChangeAspect="1"/>
-          </p:cNvPicPr>
-          <p:nvPr/>
-        </p:nvPicPr>
-        <p:blipFill>
-          <a:blip r:embed="rId1"/>
-          <a:stretch>
-            <a:fillRect/>
-          </a:stretch>
-        </p:blipFill>
-        <p:spPr>
-          <a:xfrm>
-            <a:off x="7863840" y="4630674"/>
-            <a:ext cx="365760" cy="365760"/>
-          </a:xfrm>
-          <a:prstGeom prst="rect">
-            <a:avLst/>
-          </a:prstGeom>
-        </p:spPr>
-      </p:pic>
-      <p:sp>
-        <p:nvSpPr>
-          <p:cNvPr id="30" name="Text 27"/>
-          <p:cNvSpPr txBox="1"/>
-          <p:nvPr/>
-        </p:nvSpPr>
-        <p:spPr>
-          <a:xfrm>
-            <a:off x="8366760" y="4434840"/>
-            <a:ext cx="3154680" cy="757428"/>
-          </a:xfrm>
-          <a:prstGeom prst="rect">
-            <a:avLst/>
-          </a:prstGeom>
-          <a:noFill/>
-          <a:ln/>
-        </p:spPr>
-        <p:txBody>
-          <a:bodyPr wrap="square" lIns="0" tIns="0" rIns="0" bIns="0" rtlCol="0" anchor="ctr"/>
-          <a:lstStyle/>
-          <a:p>
-            <a:pPr algn="l" indent="0" marL="0">
-              <a:lnSpc>
-                <a:spcPct val="112000"/>
-              </a:lnSpc>
-              <a:buNone/>
-            </a:pPr>
-            <a:r>
-              <a:rPr lang="en-US" sz="1400" dirty="0">
-                <a:solidFill>
-                  <a:srgbClr val="3D2A5C"/>
-                </a:solidFill>
-                <a:latin typeface="Microsoft JhengHei" pitchFamily="34" charset="0"/>
-                <a:ea typeface="Microsoft JhengHei" pitchFamily="34" charset="-122"/>
-                <a:cs typeface="Microsoft JhengHei" pitchFamily="34" charset="-120"/>
-              </a:rPr>
-              <a:t>個人用的量在 Gemini 免費額度內。金鑰只放在指令碼屬性裡，不要貼給別人。</a:t>
+              <a:t>：程式固定用台北時間</a:t>
             </a:r>
             <a:endParaRPr lang="en-US" sz="1400" dirty="0"/>
           </a:p>
@@ -12229,7 +11517,7 @@
                 <a:ea typeface="Microsoft JhengHei" pitchFamily="34" charset="-122"/>
                 <a:cs typeface="Microsoft JhengHei" pitchFamily="34" charset="-120"/>
               </a:rPr>
-              <a:t>3</a:t>
+              <a:t>1</a:t>
             </a:r>
             <a:endParaRPr lang="en-US" sz="2800" dirty="0"/>
           </a:p>
@@ -12271,7 +11559,7 @@
                 <a:ea typeface="Microsoft JhengHei" pitchFamily="34" charset="-122"/>
                 <a:cs typeface="Microsoft JhengHei" pitchFamily="34" charset="-120"/>
               </a:rPr>
-              <a:t>步驟 3 / 7</a:t>
+              <a:t>第一步　後端（2/3）</a:t>
             </a:r>
             <a:endParaRPr lang="en-US" sz="1200" dirty="0"/>
           </a:p>
@@ -13391,21 +12679,7 @@
                 <a:ea typeface="Microsoft JhengHei" pitchFamily="34" charset="-122"/>
                 <a:cs typeface="Microsoft JhengHei" pitchFamily="34" charset="-120"/>
               </a:rPr>
-              <a:t>辨識引擎：</a:t>
-            </a:r>
-            <a:pPr indent="0" marL="0">
-              <a:buNone/>
-            </a:pPr>
-            <a:r>
-              <a:rPr lang="en-US" sz="1300" dirty="0">
-                <a:solidFill>
-                  <a:srgbClr val="E9E3F5"/>
-                </a:solidFill>
-                <a:latin typeface="Courier New" pitchFamily="34" charset="0"/>
-                <a:ea typeface="Courier New" pitchFamily="34" charset="-122"/>
-                <a:cs typeface="Courier New" pitchFamily="34" charset="-120"/>
-              </a:rPr>
-              <a:t>Gemini</a:t>
+              <a:t>辨識金鑰：還沒設定（等一下在 App 裡貼）</a:t>
             </a:r>
             <a:endParaRPr lang="en-US" sz="1300" dirty="0"/>
           </a:p>
@@ -13623,7 +12897,7 @@
                 <a:ea typeface="Microsoft JhengHei" pitchFamily="34" charset="-122"/>
                 <a:cs typeface="Microsoft JhengHei" pitchFamily="34" charset="-120"/>
               </a:rPr>
-              <a:t>4</a:t>
+              <a:t>1</a:t>
             </a:r>
             <a:endParaRPr lang="en-US" sz="2800" dirty="0"/>
           </a:p>
@@ -13665,7 +12939,7 @@
                 <a:ea typeface="Microsoft JhengHei" pitchFamily="34" charset="-122"/>
                 <a:cs typeface="Microsoft JhengHei" pitchFamily="34" charset="-120"/>
               </a:rPr>
-              <a:t>步驟 4 / 7</a:t>
+              <a:t>第一步　後端（3/3）</a:t>
             </a:r>
             <a:endParaRPr lang="en-US" sz="1200" dirty="0"/>
           </a:p>
@@ -14958,7 +14232,7 @@
                 <a:ea typeface="Microsoft JhengHei" pitchFamily="34" charset="-122"/>
                 <a:cs typeface="Microsoft JhengHei" pitchFamily="34" charset="-120"/>
               </a:rPr>
-              <a:t>5</a:t>
+              <a:t>2</a:t>
             </a:r>
             <a:endParaRPr lang="en-US" sz="2800" dirty="0"/>
           </a:p>
@@ -15000,7 +14274,7 @@
                 <a:ea typeface="Microsoft JhengHei" pitchFamily="34" charset="-122"/>
                 <a:cs typeface="Microsoft JhengHei" pitchFamily="34" charset="-120"/>
               </a:rPr>
-              <a:t>步驟 5 / 7</a:t>
+              <a:t>第二步　網站</a:t>
             </a:r>
             <a:endParaRPr lang="en-US" sz="1200" dirty="0"/>
           </a:p>
@@ -15042,7 +14316,7 @@
                 <a:ea typeface="Microsoft JhengHei" pitchFamily="34" charset="-122"/>
                 <a:cs typeface="Microsoft JhengHei" pitchFamily="34" charset="-120"/>
               </a:rPr>
-              <a:t>把網站放上 Cloudflare Pages</a:t>
+              <a:t>產生網站，放上 Cloudflare</a:t>
             </a:r>
             <a:endParaRPr lang="en-US" sz="3000" dirty="0"/>
           </a:p>
@@ -15084,7 +14358,7 @@
                 <a:ea typeface="Microsoft JhengHei" pitchFamily="34" charset="-122"/>
                 <a:cs typeface="Microsoft JhengHei" pitchFamily="34" charset="-120"/>
               </a:rPr>
-              <a:t>免費，把 web 資料夾拖進去就好</a:t>
+              <a:t>網站產生器幫你填好後端網址，拖進去一次就好</a:t>
             </a:r>
             <a:endParaRPr lang="en-US" sz="1500" dirty="0"/>
           </a:p>
@@ -15098,7 +14372,7 @@
         </p:nvSpPr>
         <p:spPr>
           <a:xfrm>
-            <a:off x="548640" y="1892808"/>
+            <a:off x="548640" y="1892300"/>
             <a:ext cx="329184" cy="329184"/>
           </a:xfrm>
           <a:prstGeom prst="ellipse">
@@ -15118,7 +14392,7 @@
         </p:nvSpPr>
         <p:spPr>
           <a:xfrm>
-            <a:off x="548640" y="1892808"/>
+            <a:off x="548640" y="1892300"/>
             <a:ext cx="329184" cy="329184"/>
           </a:xfrm>
           <a:prstGeom prst="rect">
@@ -15157,8 +14431,8 @@
         </p:nvSpPr>
         <p:spPr>
           <a:xfrm>
-            <a:off x="1060704" y="1874520"/>
-            <a:ext cx="5980176" cy="316230"/>
+            <a:off x="1060704" y="1879600"/>
+            <a:ext cx="5980176" cy="584200"/>
           </a:xfrm>
           <a:prstGeom prst="rect">
             <a:avLst/>
@@ -15185,14 +14459,8 @@
                 <a:ea typeface="Microsoft JhengHei" pitchFamily="34" charset="-122"/>
                 <a:cs typeface="Microsoft JhengHei" pitchFamily="34" charset="-120"/>
               </a:rPr>
-              <a:t>登入 </a:t>
-            </a:r>
-            <a:pPr algn="l" indent="0" marL="0">
-              <a:lnSpc>
-                <a:spcPct val="112000"/>
-              </a:lnSpc>
-              <a:buNone/>
-            </a:pPr>
+              <a:t xml:space="preserve">打開網站產生器 </a:t>
+            </a:r>
             <a:r>
               <a:rPr lang="en-US" sz="1500" b="1" dirty="0">
                 <a:solidFill>
@@ -15202,14 +14470,8 @@
                 <a:ea typeface="Microsoft JhengHei" pitchFamily="34" charset="-122"/>
                 <a:cs typeface="Microsoft JhengHei" pitchFamily="34" charset="-120"/>
               </a:rPr>
-              <a:t>dash.cloudflare.com</a:t>
-            </a:r>
-            <a:pPr algn="l" indent="0" marL="0">
-              <a:lnSpc>
-                <a:spcPct val="112000"/>
-              </a:lnSpc>
-              <a:buNone/>
-            </a:pPr>
+              <a:t>tickets-37z.pages.dev/kit.html</a:t>
+            </a:r>
             <a:r>
               <a:rPr lang="en-US" sz="1500" dirty="0">
                 <a:solidFill>
@@ -15219,7 +14481,51 @@
                 <a:ea typeface="Microsoft JhengHei" pitchFamily="34" charset="-122"/>
                 <a:cs typeface="Microsoft JhengHei" pitchFamily="34" charset="-120"/>
               </a:rPr>
-              <a:t>（沒有帳號就免費註冊）</a:t>
+              <a:t xml:space="preserve">，貼上 </a:t>
+            </a:r>
+            <a:r>
+              <a:rPr lang="en-US" sz="1500" b="1" dirty="0">
+                <a:solidFill>
+                  <a:srgbClr val="1E1A26"/>
+                </a:solidFill>
+                <a:latin typeface="Microsoft JhengHei" pitchFamily="34" charset="0"/>
+                <a:ea typeface="Microsoft JhengHei" pitchFamily="34" charset="-122"/>
+                <a:cs typeface="Microsoft JhengHei" pitchFamily="34" charset="-120"/>
+              </a:rPr>
+              <a:t>/exec 網址</a:t>
+            </a:r>
+            <a:r>
+              <a:rPr lang="en-US" sz="1500" dirty="0">
+                <a:solidFill>
+                  <a:srgbClr val="1E1A26"/>
+                </a:solidFill>
+                <a:latin typeface="Microsoft JhengHei" pitchFamily="34" charset="0"/>
+                <a:ea typeface="Microsoft JhengHei" pitchFamily="34" charset="-122"/>
+                <a:cs typeface="Microsoft JhengHei" pitchFamily="34" charset="-120"/>
+              </a:rPr>
+              <a:t xml:space="preserve"> →「</a:t>
+            </a:r>
+            <a:r>
+              <a:rPr lang="en-US" sz="1500" b="1" dirty="0">
+                <a:solidFill>
+                  <a:srgbClr val="1E1A26"/>
+                </a:solidFill>
+                <a:latin typeface="Microsoft JhengHei" pitchFamily="34" charset="0"/>
+                <a:ea typeface="Microsoft JhengHei" pitchFamily="34" charset="-122"/>
+                <a:cs typeface="Microsoft JhengHei" pitchFamily="34" charset="-120"/>
+              </a:rPr>
+              <a:t>下載你的網站</a:t>
+            </a:r>
+            <a:r>
+              <a:rPr lang="en-US" sz="1500" dirty="0">
+                <a:solidFill>
+                  <a:srgbClr val="1E1A26"/>
+                </a:solidFill>
+                <a:latin typeface="Microsoft JhengHei" pitchFamily="34" charset="0"/>
+                <a:ea typeface="Microsoft JhengHei" pitchFamily="34" charset="-122"/>
+                <a:cs typeface="Microsoft JhengHei" pitchFamily="34" charset="-120"/>
+              </a:rPr>
+              <a:t>」</a:t>
             </a:r>
             <a:endParaRPr lang="en-US" sz="1500" dirty="0"/>
           </a:p>
@@ -15233,7 +14539,7 @@
         </p:nvSpPr>
         <p:spPr>
           <a:xfrm>
-            <a:off x="548640" y="2404872"/>
+            <a:off x="548640" y="2654300"/>
             <a:ext cx="329184" cy="329184"/>
           </a:xfrm>
           <a:prstGeom prst="ellipse">
@@ -15253,7 +14559,7 @@
         </p:nvSpPr>
         <p:spPr>
           <a:xfrm>
-            <a:off x="548640" y="2404872"/>
+            <a:off x="548640" y="2654300"/>
             <a:ext cx="329184" cy="329184"/>
           </a:xfrm>
           <a:prstGeom prst="rect">
@@ -15292,8 +14598,8 @@
         </p:nvSpPr>
         <p:spPr>
           <a:xfrm>
-            <a:off x="1060704" y="2386584"/>
-            <a:ext cx="5980176" cy="586740"/>
+            <a:off x="1060704" y="2641600"/>
+            <a:ext cx="5980176" cy="317500"/>
           </a:xfrm>
           <a:prstGeom prst="rect">
             <a:avLst/>
@@ -15320,14 +14626,8 @@
                 <a:ea typeface="Microsoft JhengHei" pitchFamily="34" charset="-122"/>
                 <a:cs typeface="Microsoft JhengHei" pitchFamily="34" charset="-120"/>
               </a:rPr>
-              <a:t>左邊「</a:t>
-            </a:r>
-            <a:pPr algn="l" indent="0" marL="0">
-              <a:lnSpc>
-                <a:spcPct val="112000"/>
-              </a:lnSpc>
-              <a:buNone/>
-            </a:pPr>
+              <a:t xml:space="preserve">解壓縮會得到 </a:t>
+            </a:r>
             <a:r>
               <a:rPr lang="en-US" sz="1500" b="1" dirty="0">
                 <a:solidFill>
@@ -15337,14 +14637,8 @@
                 <a:ea typeface="Microsoft JhengHei" pitchFamily="34" charset="-122"/>
                 <a:cs typeface="Microsoft JhengHei" pitchFamily="34" charset="-120"/>
               </a:rPr>
-              <a:t>Workers &amp; Pages</a:t>
-            </a:r>
-            <a:pPr algn="l" indent="0" marL="0">
-              <a:lnSpc>
-                <a:spcPct val="112000"/>
-              </a:lnSpc>
-              <a:buNone/>
-            </a:pPr>
+              <a:t>web 資料夾</a:t>
+            </a:r>
             <a:r>
               <a:rPr lang="en-US" sz="1500" dirty="0">
                 <a:solidFill>
@@ -15354,109 +14648,7 @@
                 <a:ea typeface="Microsoft JhengHei" pitchFamily="34" charset="-122"/>
                 <a:cs typeface="Microsoft JhengHei" pitchFamily="34" charset="-120"/>
               </a:rPr>
-              <a:t>」→「</a:t>
-            </a:r>
-            <a:pPr algn="l" indent="0" marL="0">
-              <a:lnSpc>
-                <a:spcPct val="112000"/>
-              </a:lnSpc>
-              <a:buNone/>
-            </a:pPr>
-            <a:r>
-              <a:rPr lang="en-US" sz="1500" b="1" dirty="0">
-                <a:solidFill>
-                  <a:srgbClr val="1E1A26"/>
-                </a:solidFill>
-                <a:latin typeface="Microsoft JhengHei" pitchFamily="34" charset="0"/>
-                <a:ea typeface="Microsoft JhengHei" pitchFamily="34" charset="-122"/>
-                <a:cs typeface="Microsoft JhengHei" pitchFamily="34" charset="-120"/>
-              </a:rPr>
-              <a:t>Create application</a:t>
-            </a:r>
-            <a:pPr algn="l" indent="0" marL="0">
-              <a:lnSpc>
-                <a:spcPct val="112000"/>
-              </a:lnSpc>
-              <a:buNone/>
-            </a:pPr>
-            <a:r>
-              <a:rPr lang="en-US" sz="1500" dirty="0">
-                <a:solidFill>
-                  <a:srgbClr val="1E1A26"/>
-                </a:solidFill>
-                <a:latin typeface="Microsoft JhengHei" pitchFamily="34" charset="0"/>
-                <a:ea typeface="Microsoft JhengHei" pitchFamily="34" charset="-122"/>
-                <a:cs typeface="Microsoft JhengHei" pitchFamily="34" charset="-120"/>
-              </a:rPr>
-              <a:t>」→ Pages 的「</a:t>
-            </a:r>
-            <a:pPr algn="l" indent="0" marL="0">
-              <a:lnSpc>
-                <a:spcPct val="112000"/>
-              </a:lnSpc>
-              <a:buNone/>
-            </a:pPr>
-            <a:r>
-              <a:rPr lang="en-US" sz="1500" b="1" dirty="0">
-                <a:solidFill>
-                  <a:srgbClr val="1E1A26"/>
-                </a:solidFill>
-                <a:latin typeface="Microsoft JhengHei" pitchFamily="34" charset="0"/>
-                <a:ea typeface="Microsoft JhengHei" pitchFamily="34" charset="-122"/>
-                <a:cs typeface="Microsoft JhengHei" pitchFamily="34" charset="-120"/>
-              </a:rPr>
-              <a:t>Get started</a:t>
-            </a:r>
-            <a:pPr algn="l" indent="0" marL="0">
-              <a:lnSpc>
-                <a:spcPct val="112000"/>
-              </a:lnSpc>
-              <a:buNone/>
-            </a:pPr>
-            <a:r>
-              <a:rPr lang="en-US" sz="1500" dirty="0">
-                <a:solidFill>
-                  <a:srgbClr val="1E1A26"/>
-                </a:solidFill>
-                <a:latin typeface="Microsoft JhengHei" pitchFamily="34" charset="0"/>
-                <a:ea typeface="Microsoft JhengHei" pitchFamily="34" charset="-122"/>
-                <a:cs typeface="Microsoft JhengHei" pitchFamily="34" charset="-120"/>
-              </a:rPr>
-              <a:t>」→「</a:t>
-            </a:r>
-            <a:pPr algn="l" indent="0" marL="0">
-              <a:lnSpc>
-                <a:spcPct val="112000"/>
-              </a:lnSpc>
-              <a:buNone/>
-            </a:pPr>
-            <a:r>
-              <a:rPr lang="en-US" sz="1500" b="1" dirty="0">
-                <a:solidFill>
-                  <a:srgbClr val="1E1A26"/>
-                </a:solidFill>
-                <a:latin typeface="Microsoft JhengHei" pitchFamily="34" charset="0"/>
-                <a:ea typeface="Microsoft JhengHei" pitchFamily="34" charset="-122"/>
-                <a:cs typeface="Microsoft JhengHei" pitchFamily="34" charset="-120"/>
-              </a:rPr>
-              <a:t>Drag and drop your files</a:t>
-            </a:r>
-            <a:pPr algn="l" indent="0" marL="0">
-              <a:lnSpc>
-                <a:spcPct val="112000"/>
-              </a:lnSpc>
-              <a:buNone/>
-            </a:pPr>
-            <a:r>
-              <a:rPr lang="en-US" sz="1500" dirty="0">
-                <a:solidFill>
-                  <a:srgbClr val="1E1A26"/>
-                </a:solidFill>
-                <a:latin typeface="Microsoft JhengHei" pitchFamily="34" charset="0"/>
-                <a:ea typeface="Microsoft JhengHei" pitchFamily="34" charset="-122"/>
-                <a:cs typeface="Microsoft JhengHei" pitchFamily="34" charset="-120"/>
-              </a:rPr>
-              <a:t>」</a:t>
+              <a:t>，裡面已經填好你的後端網址</a:t>
             </a:r>
             <a:endParaRPr lang="en-US" sz="1500" dirty="0"/>
           </a:p>
@@ -15470,7 +14662,7 @@
         </p:nvSpPr>
         <p:spPr>
           <a:xfrm>
-            <a:off x="548640" y="3128772"/>
+            <a:off x="548640" y="3149600"/>
             <a:ext cx="329184" cy="329184"/>
           </a:xfrm>
           <a:prstGeom prst="ellipse">
@@ -15490,7 +14682,7 @@
         </p:nvSpPr>
         <p:spPr>
           <a:xfrm>
-            <a:off x="548640" y="3128772"/>
+            <a:off x="548640" y="3149600"/>
             <a:ext cx="329184" cy="329184"/>
           </a:xfrm>
           <a:prstGeom prst="rect">
@@ -15529,8 +14721,8 @@
         </p:nvSpPr>
         <p:spPr>
           <a:xfrm>
-            <a:off x="1060704" y="3110484"/>
-            <a:ext cx="5980176" cy="316230"/>
+            <a:off x="1060704" y="3136900"/>
+            <a:ext cx="5980176" cy="317500"/>
           </a:xfrm>
           <a:prstGeom prst="rect">
             <a:avLst/>
@@ -15557,14 +14749,296 @@
                 <a:ea typeface="Microsoft JhengHei" pitchFamily="34" charset="-122"/>
                 <a:cs typeface="Microsoft JhengHei" pitchFamily="34" charset="-120"/>
               </a:rPr>
-              <a:t>專案名稱取英文小寫（例如 </a:t>
-            </a:r>
-            <a:pPr algn="l" indent="0" marL="0">
-              <a:lnSpc>
-                <a:spcPct val="112000"/>
-              </a:lnSpc>
-              <a:buNone/>
-            </a:pPr>
+              <a:t xml:space="preserve">登入 </a:t>
+            </a:r>
+            <a:r>
+              <a:rPr lang="en-US" sz="1500" b="1" dirty="0">
+                <a:solidFill>
+                  <a:srgbClr val="1E1A26"/>
+                </a:solidFill>
+                <a:latin typeface="Microsoft JhengHei" pitchFamily="34" charset="0"/>
+                <a:ea typeface="Microsoft JhengHei" pitchFamily="34" charset="-122"/>
+                <a:cs typeface="Microsoft JhengHei" pitchFamily="34" charset="-120"/>
+              </a:rPr>
+              <a:t>dash.cloudflare.com</a:t>
+            </a:r>
+            <a:r>
+              <a:rPr lang="en-US" sz="1500" dirty="0">
+                <a:solidFill>
+                  <a:srgbClr val="1E1A26"/>
+                </a:solidFill>
+                <a:latin typeface="Microsoft JhengHei" pitchFamily="34" charset="0"/>
+                <a:ea typeface="Microsoft JhengHei" pitchFamily="34" charset="-122"/>
+                <a:cs typeface="Microsoft JhengHei" pitchFamily="34" charset="-120"/>
+              </a:rPr>
+              <a:t>（沒有帳號就免費註冊）</a:t>
+            </a:r>
+            <a:endParaRPr lang="en-US" sz="1500" dirty="0"/>
+          </a:p>
+        </p:txBody>
+      </p:sp>
+      <p:sp>
+        <p:nvSpPr>
+          <p:cNvPr id="16" name="Shape 14"/>
+          <p:cNvSpPr/>
+          <p:nvPr/>
+        </p:nvSpPr>
+        <p:spPr>
+          <a:xfrm>
+            <a:off x="548640" y="3644900"/>
+            <a:ext cx="329184" cy="329184"/>
+          </a:xfrm>
+          <a:prstGeom prst="ellipse">
+            <a:avLst/>
+          </a:prstGeom>
+          <a:solidFill>
+            <a:srgbClr val="F1EBFA"/>
+          </a:solidFill>
+          <a:ln/>
+        </p:spPr>
+      </p:sp>
+      <p:sp>
+        <p:nvSpPr>
+          <p:cNvPr id="17" name="Text 15"/>
+          <p:cNvSpPr txBox="1"/>
+          <p:nvPr/>
+        </p:nvSpPr>
+        <p:spPr>
+          <a:xfrm>
+            <a:off x="548640" y="3644900"/>
+            <a:ext cx="329184" cy="329184"/>
+          </a:xfrm>
+          <a:prstGeom prst="rect">
+            <a:avLst/>
+          </a:prstGeom>
+          <a:noFill/>
+          <a:ln/>
+        </p:spPr>
+        <p:txBody>
+          <a:bodyPr wrap="square" lIns="0" tIns="0" rIns="0" bIns="0" rtlCol="0" anchor="ctr"/>
+          <a:lstStyle/>
+          <a:p>
+            <a:pPr algn="ctr" indent="0" marL="0">
+              <a:buNone/>
+            </a:pPr>
+            <a:r>
+              <a:rPr lang="en-US" sz="1300" b="1" dirty="0">
+                <a:solidFill>
+                  <a:srgbClr val="6A35A8"/>
+                </a:solidFill>
+                <a:latin typeface="Microsoft JhengHei" pitchFamily="34" charset="0"/>
+                <a:ea typeface="Microsoft JhengHei" pitchFamily="34" charset="-122"/>
+                <a:cs typeface="Microsoft JhengHei" pitchFamily="34" charset="-120"/>
+              </a:rPr>
+              <a:t>4</a:t>
+            </a:r>
+            <a:endParaRPr lang="en-US" sz="1300" dirty="0"/>
+          </a:p>
+        </p:txBody>
+      </p:sp>
+      <p:sp>
+        <p:nvSpPr>
+          <p:cNvPr id="18" name="Text 16"/>
+          <p:cNvSpPr txBox="1"/>
+          <p:nvPr/>
+        </p:nvSpPr>
+        <p:spPr>
+          <a:xfrm>
+            <a:off x="1060704" y="3632200"/>
+            <a:ext cx="5980176" cy="584200"/>
+          </a:xfrm>
+          <a:prstGeom prst="rect">
+            <a:avLst/>
+          </a:prstGeom>
+          <a:noFill/>
+          <a:ln/>
+        </p:spPr>
+        <p:txBody>
+          <a:bodyPr wrap="square" lIns="0" tIns="0" rIns="0" bIns="0" rtlCol="0" anchor="t"/>
+          <a:lstStyle/>
+          <a:p>
+            <a:pPr algn="l" indent="0" marL="0">
+              <a:lnSpc>
+                <a:spcPct val="112000"/>
+              </a:lnSpc>
+              <a:buNone/>
+            </a:pPr>
+            <a:r>
+              <a:rPr lang="en-US" sz="1500" dirty="0">
+                <a:solidFill>
+                  <a:srgbClr val="1E1A26"/>
+                </a:solidFill>
+                <a:latin typeface="Microsoft JhengHei" pitchFamily="34" charset="0"/>
+                <a:ea typeface="Microsoft JhengHei" pitchFamily="34" charset="-122"/>
+                <a:cs typeface="Microsoft JhengHei" pitchFamily="34" charset="-120"/>
+              </a:rPr>
+              <a:t>左邊「</a:t>
+            </a:r>
+            <a:r>
+              <a:rPr lang="en-US" sz="1500" b="1" dirty="0">
+                <a:solidFill>
+                  <a:srgbClr val="1E1A26"/>
+                </a:solidFill>
+                <a:latin typeface="Microsoft JhengHei" pitchFamily="34" charset="0"/>
+                <a:ea typeface="Microsoft JhengHei" pitchFamily="34" charset="-122"/>
+                <a:cs typeface="Microsoft JhengHei" pitchFamily="34" charset="-120"/>
+              </a:rPr>
+              <a:t>Workers 和 Pages</a:t>
+            </a:r>
+            <a:r>
+              <a:rPr lang="en-US" sz="1500" dirty="0">
+                <a:solidFill>
+                  <a:srgbClr val="1E1A26"/>
+                </a:solidFill>
+                <a:latin typeface="Microsoft JhengHei" pitchFamily="34" charset="0"/>
+                <a:ea typeface="Microsoft JhengHei" pitchFamily="34" charset="-122"/>
+                <a:cs typeface="Microsoft JhengHei" pitchFamily="34" charset="-120"/>
+              </a:rPr>
+              <a:t>」→「</a:t>
+            </a:r>
+            <a:r>
+              <a:rPr lang="en-US" sz="1500" b="1" dirty="0">
+                <a:solidFill>
+                  <a:srgbClr val="1E1A26"/>
+                </a:solidFill>
+                <a:latin typeface="Microsoft JhengHei" pitchFamily="34" charset="0"/>
+                <a:ea typeface="Microsoft JhengHei" pitchFamily="34" charset="-122"/>
+                <a:cs typeface="Microsoft JhengHei" pitchFamily="34" charset="-120"/>
+              </a:rPr>
+              <a:t>建立應用程式</a:t>
+            </a:r>
+            <a:r>
+              <a:rPr lang="en-US" sz="1500" dirty="0">
+                <a:solidFill>
+                  <a:srgbClr val="1E1A26"/>
+                </a:solidFill>
+                <a:latin typeface="Microsoft JhengHei" pitchFamily="34" charset="0"/>
+                <a:ea typeface="Microsoft JhengHei" pitchFamily="34" charset="-122"/>
+                <a:cs typeface="Microsoft JhengHei" pitchFamily="34" charset="-120"/>
+              </a:rPr>
+              <a:t>」</a:t>
+            </a:r>
+            <a:endParaRPr lang="en-US" sz="1500" dirty="0"/>
+          </a:p>
+          <a:p>
+            <a:pPr algn="l" indent="0" marL="0">
+              <a:lnSpc>
+                <a:spcPct val="112000"/>
+              </a:lnSpc>
+              <a:buNone/>
+            </a:pPr>
+            <a:r>
+              <a:rPr lang="en-US" sz="1500" dirty="0">
+                <a:solidFill>
+                  <a:srgbClr val="1E1A26"/>
+                </a:solidFill>
+                <a:latin typeface="Microsoft JhengHei" pitchFamily="34" charset="0"/>
+                <a:ea typeface="Microsoft JhengHei" pitchFamily="34" charset="-122"/>
+                <a:cs typeface="Microsoft JhengHei" pitchFamily="34" charset="-120"/>
+              </a:rPr>
+              <a:t>→ 選 Pages、用直接上傳（拖放檔案）</a:t>
+            </a:r>
+            <a:endParaRPr lang="en-US" sz="1500" dirty="0"/>
+          </a:p>
+        </p:txBody>
+      </p:sp>
+      <p:sp>
+        <p:nvSpPr>
+          <p:cNvPr id="19" name="Shape 17"/>
+          <p:cNvSpPr/>
+          <p:nvPr/>
+        </p:nvSpPr>
+        <p:spPr>
+          <a:xfrm>
+            <a:off x="548640" y="4406900"/>
+            <a:ext cx="329184" cy="329184"/>
+          </a:xfrm>
+          <a:prstGeom prst="ellipse">
+            <a:avLst/>
+          </a:prstGeom>
+          <a:solidFill>
+            <a:srgbClr val="F1EBFA"/>
+          </a:solidFill>
+          <a:ln/>
+        </p:spPr>
+      </p:sp>
+      <p:sp>
+        <p:nvSpPr>
+          <p:cNvPr id="20" name="Text 18"/>
+          <p:cNvSpPr txBox="1"/>
+          <p:nvPr/>
+        </p:nvSpPr>
+        <p:spPr>
+          <a:xfrm>
+            <a:off x="548640" y="4406900"/>
+            <a:ext cx="329184" cy="329184"/>
+          </a:xfrm>
+          <a:prstGeom prst="rect">
+            <a:avLst/>
+          </a:prstGeom>
+          <a:noFill/>
+          <a:ln/>
+        </p:spPr>
+        <p:txBody>
+          <a:bodyPr wrap="square" lIns="0" tIns="0" rIns="0" bIns="0" rtlCol="0" anchor="ctr"/>
+          <a:lstStyle/>
+          <a:p>
+            <a:pPr algn="ctr" indent="0" marL="0">
+              <a:buNone/>
+            </a:pPr>
+            <a:r>
+              <a:rPr lang="en-US" sz="1300" b="1" dirty="0">
+                <a:solidFill>
+                  <a:srgbClr val="6A35A8"/>
+                </a:solidFill>
+                <a:latin typeface="Microsoft JhengHei" pitchFamily="34" charset="0"/>
+                <a:ea typeface="Microsoft JhengHei" pitchFamily="34" charset="-122"/>
+                <a:cs typeface="Microsoft JhengHei" pitchFamily="34" charset="-120"/>
+              </a:rPr>
+              <a:t>5</a:t>
+            </a:r>
+            <a:endParaRPr lang="en-US" sz="1300" dirty="0"/>
+          </a:p>
+        </p:txBody>
+      </p:sp>
+      <p:sp>
+        <p:nvSpPr>
+          <p:cNvPr id="21" name="Text 19"/>
+          <p:cNvSpPr txBox="1"/>
+          <p:nvPr/>
+        </p:nvSpPr>
+        <p:spPr>
+          <a:xfrm>
+            <a:off x="1060704" y="4394200"/>
+            <a:ext cx="5980176" cy="317500"/>
+          </a:xfrm>
+          <a:prstGeom prst="rect">
+            <a:avLst/>
+          </a:prstGeom>
+          <a:noFill/>
+          <a:ln/>
+        </p:spPr>
+        <p:txBody>
+          <a:bodyPr wrap="square" lIns="0" tIns="0" rIns="0" bIns="0" rtlCol="0" anchor="t"/>
+          <a:lstStyle/>
+          <a:p>
+            <a:pPr algn="l" indent="0" marL="0">
+              <a:lnSpc>
+                <a:spcPct val="112000"/>
+              </a:lnSpc>
+              <a:buNone/>
+            </a:pPr>
+            <a:r>
+              <a:rPr lang="en-US" sz="1500" dirty="0">
+                <a:solidFill>
+                  <a:srgbClr val="1E1A26"/>
+                </a:solidFill>
+                <a:latin typeface="Microsoft JhengHei" pitchFamily="34" charset="0"/>
+                <a:ea typeface="Microsoft JhengHei" pitchFamily="34" charset="-122"/>
+                <a:cs typeface="Microsoft JhengHei" pitchFamily="34" charset="-120"/>
+              </a:rPr>
+              <a:t xml:space="preserve">專案名稱取英文小寫，例如 </a:t>
+            </a:r>
             <a:r>
               <a:rPr lang="en-US" sz="1500" b="1" dirty="0">
                 <a:solidFill>
@@ -15575,310 +15049,6 @@
                 <a:cs typeface="Courier New" pitchFamily="34" charset="-120"/>
               </a:rPr>
               <a:t>my-tickets</a:t>
-            </a:r>
-            <a:pPr algn="l" indent="0" marL="0">
-              <a:lnSpc>
-                <a:spcPct val="112000"/>
-              </a:lnSpc>
-              <a:buNone/>
-            </a:pPr>
-            <a:r>
-              <a:rPr lang="en-US" sz="1500" dirty="0">
-                <a:solidFill>
-                  <a:srgbClr val="1E1A26"/>
-                </a:solidFill>
-                <a:latin typeface="Microsoft JhengHei" pitchFamily="34" charset="0"/>
-                <a:ea typeface="Microsoft JhengHei" pitchFamily="34" charset="-122"/>
-                <a:cs typeface="Microsoft JhengHei" pitchFamily="34" charset="-120"/>
-              </a:rPr>
-              <a:t>）</a:t>
-            </a:r>
-            <a:endParaRPr lang="en-US" sz="1500" dirty="0"/>
-          </a:p>
-        </p:txBody>
-      </p:sp>
-      <p:sp>
-        <p:nvSpPr>
-          <p:cNvPr id="16" name="Shape 14"/>
-          <p:cNvSpPr/>
-          <p:nvPr/>
-        </p:nvSpPr>
-        <p:spPr>
-          <a:xfrm>
-            <a:off x="548640" y="3640836"/>
-            <a:ext cx="329184" cy="329184"/>
-          </a:xfrm>
-          <a:prstGeom prst="ellipse">
-            <a:avLst/>
-          </a:prstGeom>
-          <a:solidFill>
-            <a:srgbClr val="F1EBFA"/>
-          </a:solidFill>
-          <a:ln/>
-        </p:spPr>
-      </p:sp>
-      <p:sp>
-        <p:nvSpPr>
-          <p:cNvPr id="17" name="Text 15"/>
-          <p:cNvSpPr txBox="1"/>
-          <p:nvPr/>
-        </p:nvSpPr>
-        <p:spPr>
-          <a:xfrm>
-            <a:off x="548640" y="3640836"/>
-            <a:ext cx="329184" cy="329184"/>
-          </a:xfrm>
-          <a:prstGeom prst="rect">
-            <a:avLst/>
-          </a:prstGeom>
-          <a:noFill/>
-          <a:ln/>
-        </p:spPr>
-        <p:txBody>
-          <a:bodyPr wrap="square" lIns="0" tIns="0" rIns="0" bIns="0" rtlCol="0" anchor="ctr"/>
-          <a:lstStyle/>
-          <a:p>
-            <a:pPr algn="ctr" indent="0" marL="0">
-              <a:buNone/>
-            </a:pPr>
-            <a:r>
-              <a:rPr lang="en-US" sz="1300" b="1" dirty="0">
-                <a:solidFill>
-                  <a:srgbClr val="6A35A8"/>
-                </a:solidFill>
-                <a:latin typeface="Microsoft JhengHei" pitchFamily="34" charset="0"/>
-                <a:ea typeface="Microsoft JhengHei" pitchFamily="34" charset="-122"/>
-                <a:cs typeface="Microsoft JhengHei" pitchFamily="34" charset="-120"/>
-              </a:rPr>
-              <a:t>4</a:t>
-            </a:r>
-            <a:endParaRPr lang="en-US" sz="1300" dirty="0"/>
-          </a:p>
-        </p:txBody>
-      </p:sp>
-      <p:sp>
-        <p:nvSpPr>
-          <p:cNvPr id="18" name="Text 16"/>
-          <p:cNvSpPr txBox="1"/>
-          <p:nvPr/>
-        </p:nvSpPr>
-        <p:spPr>
-          <a:xfrm>
-            <a:off x="1060704" y="3622548"/>
-            <a:ext cx="5980176" cy="316230"/>
-          </a:xfrm>
-          <a:prstGeom prst="rect">
-            <a:avLst/>
-          </a:prstGeom>
-          <a:noFill/>
-          <a:ln/>
-        </p:spPr>
-        <p:txBody>
-          <a:bodyPr wrap="square" lIns="0" tIns="0" rIns="0" bIns="0" rtlCol="0" anchor="t"/>
-          <a:lstStyle/>
-          <a:p>
-            <a:pPr algn="l" indent="0" marL="0">
-              <a:lnSpc>
-                <a:spcPct val="112000"/>
-              </a:lnSpc>
-              <a:buNone/>
-            </a:pPr>
-            <a:r>
-              <a:rPr lang="en-US" sz="1500" dirty="0">
-                <a:solidFill>
-                  <a:srgbClr val="1E1A26"/>
-                </a:solidFill>
-                <a:latin typeface="Microsoft JhengHei" pitchFamily="34" charset="0"/>
-                <a:ea typeface="Microsoft JhengHei" pitchFamily="34" charset="-122"/>
-                <a:cs typeface="Microsoft JhengHei" pitchFamily="34" charset="-120"/>
-              </a:rPr>
-              <a:t>把整個 </a:t>
-            </a:r>
-            <a:pPr algn="l" indent="0" marL="0">
-              <a:lnSpc>
-                <a:spcPct val="112000"/>
-              </a:lnSpc>
-              <a:buNone/>
-            </a:pPr>
-            <a:r>
-              <a:rPr lang="en-US" sz="1500" b="1" dirty="0">
-                <a:solidFill>
-                  <a:srgbClr val="1E1A26"/>
-                </a:solidFill>
-                <a:latin typeface="Microsoft JhengHei" pitchFamily="34" charset="0"/>
-                <a:ea typeface="Microsoft JhengHei" pitchFamily="34" charset="-122"/>
-                <a:cs typeface="Microsoft JhengHei" pitchFamily="34" charset="-120"/>
-              </a:rPr>
-              <a:t>web 資料夾</a:t>
-            </a:r>
-            <a:pPr algn="l" indent="0" marL="0">
-              <a:lnSpc>
-                <a:spcPct val="112000"/>
-              </a:lnSpc>
-              <a:buNone/>
-            </a:pPr>
-            <a:r>
-              <a:rPr lang="en-US" sz="1500" dirty="0">
-                <a:solidFill>
-                  <a:srgbClr val="1E1A26"/>
-                </a:solidFill>
-                <a:latin typeface="Microsoft JhengHei" pitchFamily="34" charset="0"/>
-                <a:ea typeface="Microsoft JhengHei" pitchFamily="34" charset="-122"/>
-                <a:cs typeface="Microsoft JhengHei" pitchFamily="34" charset="-120"/>
-              </a:rPr>
-              <a:t>拖進去 →「</a:t>
-            </a:r>
-            <a:pPr algn="l" indent="0" marL="0">
-              <a:lnSpc>
-                <a:spcPct val="112000"/>
-              </a:lnSpc>
-              <a:buNone/>
-            </a:pPr>
-            <a:r>
-              <a:rPr lang="en-US" sz="1500" b="1" dirty="0">
-                <a:solidFill>
-                  <a:srgbClr val="1E1A26"/>
-                </a:solidFill>
-                <a:latin typeface="Microsoft JhengHei" pitchFamily="34" charset="0"/>
-                <a:ea typeface="Microsoft JhengHei" pitchFamily="34" charset="-122"/>
-                <a:cs typeface="Microsoft JhengHei" pitchFamily="34" charset="-120"/>
-              </a:rPr>
-              <a:t>Deploy site</a:t>
-            </a:r>
-            <a:pPr algn="l" indent="0" marL="0">
-              <a:lnSpc>
-                <a:spcPct val="112000"/>
-              </a:lnSpc>
-              <a:buNone/>
-            </a:pPr>
-            <a:r>
-              <a:rPr lang="en-US" sz="1500" dirty="0">
-                <a:solidFill>
-                  <a:srgbClr val="1E1A26"/>
-                </a:solidFill>
-                <a:latin typeface="Microsoft JhengHei" pitchFamily="34" charset="0"/>
-                <a:ea typeface="Microsoft JhengHei" pitchFamily="34" charset="-122"/>
-                <a:cs typeface="Microsoft JhengHei" pitchFamily="34" charset="-120"/>
-              </a:rPr>
-              <a:t>」</a:t>
-            </a:r>
-            <a:endParaRPr lang="en-US" sz="1500" dirty="0"/>
-          </a:p>
-        </p:txBody>
-      </p:sp>
-      <p:sp>
-        <p:nvSpPr>
-          <p:cNvPr id="19" name="Shape 17"/>
-          <p:cNvSpPr/>
-          <p:nvPr/>
-        </p:nvSpPr>
-        <p:spPr>
-          <a:xfrm>
-            <a:off x="548640" y="4152900"/>
-            <a:ext cx="329184" cy="329184"/>
-          </a:xfrm>
-          <a:prstGeom prst="ellipse">
-            <a:avLst/>
-          </a:prstGeom>
-          <a:solidFill>
-            <a:srgbClr val="F1EBFA"/>
-          </a:solidFill>
-          <a:ln/>
-        </p:spPr>
-      </p:sp>
-      <p:sp>
-        <p:nvSpPr>
-          <p:cNvPr id="20" name="Text 18"/>
-          <p:cNvSpPr txBox="1"/>
-          <p:nvPr/>
-        </p:nvSpPr>
-        <p:spPr>
-          <a:xfrm>
-            <a:off x="548640" y="4152900"/>
-            <a:ext cx="329184" cy="329184"/>
-          </a:xfrm>
-          <a:prstGeom prst="rect">
-            <a:avLst/>
-          </a:prstGeom>
-          <a:noFill/>
-          <a:ln/>
-        </p:spPr>
-        <p:txBody>
-          <a:bodyPr wrap="square" lIns="0" tIns="0" rIns="0" bIns="0" rtlCol="0" anchor="ctr"/>
-          <a:lstStyle/>
-          <a:p>
-            <a:pPr algn="ctr" indent="0" marL="0">
-              <a:buNone/>
-            </a:pPr>
-            <a:r>
-              <a:rPr lang="en-US" sz="1300" b="1" dirty="0">
-                <a:solidFill>
-                  <a:srgbClr val="6A35A8"/>
-                </a:solidFill>
-                <a:latin typeface="Microsoft JhengHei" pitchFamily="34" charset="0"/>
-                <a:ea typeface="Microsoft JhengHei" pitchFamily="34" charset="-122"/>
-                <a:cs typeface="Microsoft JhengHei" pitchFamily="34" charset="-120"/>
-              </a:rPr>
-              <a:t>5</a:t>
-            </a:r>
-            <a:endParaRPr lang="en-US" sz="1300" dirty="0"/>
-          </a:p>
-        </p:txBody>
-      </p:sp>
-      <p:sp>
-        <p:nvSpPr>
-          <p:cNvPr id="21" name="Text 19"/>
-          <p:cNvSpPr txBox="1"/>
-          <p:nvPr/>
-        </p:nvSpPr>
-        <p:spPr>
-          <a:xfrm>
-            <a:off x="1060704" y="4134612"/>
-            <a:ext cx="5980176" cy="316230"/>
-          </a:xfrm>
-          <a:prstGeom prst="rect">
-            <a:avLst/>
-          </a:prstGeom>
-          <a:noFill/>
-          <a:ln/>
-        </p:spPr>
-        <p:txBody>
-          <a:bodyPr wrap="square" lIns="0" tIns="0" rIns="0" bIns="0" rtlCol="0" anchor="t"/>
-          <a:lstStyle/>
-          <a:p>
-            <a:pPr algn="l" indent="0" marL="0">
-              <a:lnSpc>
-                <a:spcPct val="112000"/>
-              </a:lnSpc>
-              <a:buNone/>
-            </a:pPr>
-            <a:r>
-              <a:rPr lang="en-US" sz="1500" dirty="0">
-                <a:solidFill>
-                  <a:srgbClr val="1E1A26"/>
-                </a:solidFill>
-                <a:latin typeface="Microsoft JhengHei" pitchFamily="34" charset="0"/>
-                <a:ea typeface="Microsoft JhengHei" pitchFamily="34" charset="-122"/>
-                <a:cs typeface="Microsoft JhengHei" pitchFamily="34" charset="-120"/>
-              </a:rPr>
-              <a:t>完成後會拿到你的網址：</a:t>
-            </a:r>
-            <a:pPr algn="l" indent="0" marL="0">
-              <a:lnSpc>
-                <a:spcPct val="112000"/>
-              </a:lnSpc>
-              <a:buNone/>
-            </a:pPr>
-            <a:r>
-              <a:rPr lang="en-US" sz="1500" b="1" dirty="0">
-                <a:solidFill>
-                  <a:srgbClr val="6A35A8"/>
-                </a:solidFill>
-                <a:latin typeface="Courier New" pitchFamily="34" charset="0"/>
-                <a:ea typeface="Courier New" pitchFamily="34" charset="-122"/>
-                <a:cs typeface="Courier New" pitchFamily="34" charset="-120"/>
-              </a:rPr>
-              <a:t>https://my-tickets.pages.dev</a:t>
             </a:r>
             <a:endParaRPr lang="en-US" sz="1500" dirty="0"/>
           </a:p>
@@ -16028,7 +15198,7 @@
                 <a:ea typeface="Microsoft JhengHei" pitchFamily="34" charset="-122"/>
                 <a:cs typeface="Microsoft JhengHei" pitchFamily="34" charset="-120"/>
               </a:rPr>
-              <a:t>裡面的檔案都不用改，整個拖進去</a:t>
+              <a:t>已經填好後端網址，整個拖進去</a:t>
             </a:r>
             <a:endParaRPr lang="en-US" sz="1250" dirty="0"/>
           </a:p>
@@ -16206,238 +15376,41 @@
                 <a:ea typeface="Microsoft JhengHei" pitchFamily="34" charset="-122"/>
                 <a:cs typeface="Microsoft JhengHei" pitchFamily="34" charset="-120"/>
               </a:rPr>
-              <a:t>先記下這個網址，下一步設定分享連結、最後手機打開都會用到。</a:t>
+              <a:t>記下這個網址，第三步要打開它。</a:t>
             </a:r>
             <a:endParaRPr lang="en-US" sz="1400" dirty="0"/>
           </a:p>
-        </p:txBody>
-      </p:sp>
-    </p:spTree>
-  </p:cSld>
-  <p:clrMapOvr>
-    <a:masterClrMapping/>
-  </p:clrMapOvr>
-</p:sld>
-</file>
-
-<file path=ppt/slides/slide9.xml><?xml version="1.0" encoding="utf-8"?>
-<p:sld xmlns:a="http://schemas.openxmlformats.org/drawingml/2006/main" xmlns:r="http://schemas.openxmlformats.org/officeDocument/2006/relationships" xmlns:p="http://schemas.openxmlformats.org/presentationml/2006/main">
-  <p:cSld name="Slide 9">
-    <p:bg>
-      <p:bgPr>
-        <a:solidFill>
-          <a:srgbClr val="FFFFFF"/>
-        </a:solidFill>
-      </p:bgPr>
-    </p:bg>
-    <p:spTree>
-      <p:nvGrpSpPr>
-        <p:cNvPr id="1" name=""/>
-        <p:cNvGrpSpPr/>
-        <p:nvPr/>
-      </p:nvGrpSpPr>
-      <p:grpSpPr>
-        <a:xfrm>
-          <a:off x="0" y="0"/>
-          <a:ext cx="0" cy="0"/>
-          <a:chOff x="0" y="0"/>
-          <a:chExt cx="0" cy="0"/>
-        </a:xfrm>
-      </p:grpSpPr>
-      <p:sp>
-        <p:nvSpPr>
-          <p:cNvPr id="2" name="Shape 0"/>
+          <a:p>
+            <a:pPr algn="l" indent="0" marL="0">
+              <a:lnSpc>
+                <a:spcPct val="112000"/>
+              </a:lnSpc>
+              <a:buNone/>
+            </a:pPr>
+            <a:r>
+              <a:rPr lang="en-US" sz="1400" dirty="0">
+                <a:solidFill>
+                  <a:srgbClr val="3D2A5C"/>
+                </a:solidFill>
+                <a:latin typeface="Microsoft JhengHei" pitchFamily="34" charset="0"/>
+                <a:ea typeface="Microsoft JhengHei" pitchFamily="34" charset="-122"/>
+                <a:cs typeface="Microsoft JhengHei" pitchFamily="34" charset="-120"/>
+              </a:rPr>
+              <a:t>分享短網址 App 會自己設好。</a:t>
+            </a:r>
+            <a:endParaRPr lang="en-US" sz="1400" dirty="0"/>
+          </a:p>
+        </p:txBody>
+      </p:sp>
+      <p:sp>
+        <p:nvSpPr>
+          <p:cNvPr id="95" name="Shape 6b"/>
           <p:cNvSpPr/>
           <p:nvPr/>
         </p:nvSpPr>
         <p:spPr>
           <a:xfrm>
-            <a:off x="548640" y="457200"/>
-            <a:ext cx="749808" cy="749808"/>
-          </a:xfrm>
-          <a:prstGeom prst="ellipse">
-            <a:avLst/>
-          </a:prstGeom>
-          <a:solidFill>
-            <a:srgbClr val="6A35A8"/>
-          </a:solidFill>
-          <a:ln/>
-        </p:spPr>
-      </p:sp>
-      <p:sp>
-        <p:nvSpPr>
-          <p:cNvPr id="3" name="Text 1"/>
-          <p:cNvSpPr txBox="1"/>
-          <p:nvPr/>
-        </p:nvSpPr>
-        <p:spPr>
-          <a:xfrm>
-            <a:off x="548640" y="457200"/>
-            <a:ext cx="749808" cy="749808"/>
-          </a:xfrm>
-          <a:prstGeom prst="rect">
-            <a:avLst/>
-          </a:prstGeom>
-          <a:noFill/>
-          <a:ln/>
-        </p:spPr>
-        <p:txBody>
-          <a:bodyPr wrap="square" lIns="0" tIns="0" rIns="0" bIns="0" rtlCol="0" anchor="ctr"/>
-          <a:lstStyle/>
-          <a:p>
-            <a:pPr algn="ctr" indent="0" marL="0">
-              <a:buNone/>
-            </a:pPr>
-            <a:r>
-              <a:rPr lang="en-US" sz="2800" b="1" dirty="0">
-                <a:solidFill>
-                  <a:srgbClr val="FFFFFF"/>
-                </a:solidFill>
-                <a:latin typeface="Microsoft JhengHei" pitchFamily="34" charset="0"/>
-                <a:ea typeface="Microsoft JhengHei" pitchFamily="34" charset="-122"/>
-                <a:cs typeface="Microsoft JhengHei" pitchFamily="34" charset="-120"/>
-              </a:rPr>
-              <a:t>6</a:t>
-            </a:r>
-            <a:endParaRPr lang="en-US" sz="2800" dirty="0"/>
-          </a:p>
-        </p:txBody>
-      </p:sp>
-      <p:sp>
-        <p:nvSpPr>
-          <p:cNvPr id="4" name="Text 2"/>
-          <p:cNvSpPr txBox="1"/>
-          <p:nvPr/>
-        </p:nvSpPr>
-        <p:spPr>
-          <a:xfrm>
-            <a:off x="1508760" y="420624"/>
-            <a:ext cx="3657600" cy="274320"/>
-          </a:xfrm>
-          <a:prstGeom prst="rect">
-            <a:avLst/>
-          </a:prstGeom>
-          <a:noFill/>
-          <a:ln/>
-        </p:spPr>
-        <p:txBody>
-          <a:bodyPr wrap="square" lIns="0" tIns="0" rIns="0" bIns="0" rtlCol="0" anchor="t"/>
-          <a:lstStyle/>
-          <a:p>
-            <a:pPr algn="l" indent="0" marL="0">
-              <a:lnSpc>
-                <a:spcPct val="112000"/>
-              </a:lnSpc>
-              <a:buNone/>
-            </a:pPr>
-            <a:r>
-              <a:rPr lang="en-US" sz="1200" b="1" dirty="0">
-                <a:solidFill>
-                  <a:srgbClr val="6A35A8"/>
-                </a:solidFill>
-                <a:latin typeface="Microsoft JhengHei" pitchFamily="34" charset="0"/>
-                <a:ea typeface="Microsoft JhengHei" pitchFamily="34" charset="-122"/>
-                <a:cs typeface="Microsoft JhengHei" pitchFamily="34" charset="-120"/>
-              </a:rPr>
-              <a:t>步驟 6 / 7</a:t>
-            </a:r>
-            <a:endParaRPr lang="en-US" sz="1200" dirty="0"/>
-          </a:p>
-        </p:txBody>
-      </p:sp>
-      <p:sp>
-        <p:nvSpPr>
-          <p:cNvPr id="5" name="Text 3"/>
-          <p:cNvSpPr txBox="1"/>
-          <p:nvPr/>
-        </p:nvSpPr>
-        <p:spPr>
-          <a:xfrm>
-            <a:off x="1508760" y="676656"/>
-            <a:ext cx="10134295" cy="566928"/>
-          </a:xfrm>
-          <a:prstGeom prst="rect">
-            <a:avLst/>
-          </a:prstGeom>
-          <a:noFill/>
-          <a:ln/>
-        </p:spPr>
-        <p:txBody>
-          <a:bodyPr wrap="square" lIns="0" tIns="0" rIns="0" bIns="0" rtlCol="0" anchor="t"/>
-          <a:lstStyle/>
-          <a:p>
-            <a:pPr algn="l" indent="0" marL="0">
-              <a:lnSpc>
-                <a:spcPct val="112000"/>
-              </a:lnSpc>
-              <a:buNone/>
-            </a:pPr>
-            <a:r>
-              <a:rPr lang="en-US" sz="3000" b="1" dirty="0">
-                <a:solidFill>
-                  <a:srgbClr val="1E1A26"/>
-                </a:solidFill>
-                <a:latin typeface="Microsoft JhengHei" pitchFamily="34" charset="0"/>
-                <a:ea typeface="Microsoft JhengHei" pitchFamily="34" charset="-122"/>
-                <a:cs typeface="Microsoft JhengHei" pitchFamily="34" charset="-120"/>
-              </a:rPr>
-              <a:t>設定分享連結</a:t>
-            </a:r>
-            <a:endParaRPr lang="en-US" sz="3000" dirty="0"/>
-          </a:p>
-        </p:txBody>
-      </p:sp>
-      <p:sp>
-        <p:nvSpPr>
-          <p:cNvPr id="6" name="Text 4"/>
-          <p:cNvSpPr txBox="1"/>
-          <p:nvPr/>
-        </p:nvSpPr>
-        <p:spPr>
-          <a:xfrm>
-            <a:off x="1508760" y="1243584"/>
-            <a:ext cx="10134295" cy="329184"/>
-          </a:xfrm>
-          <a:prstGeom prst="rect">
-            <a:avLst/>
-          </a:prstGeom>
-          <a:noFill/>
-          <a:ln/>
-        </p:spPr>
-        <p:txBody>
-          <a:bodyPr wrap="square" lIns="0" tIns="0" rIns="0" bIns="0" rtlCol="0" anchor="t"/>
-          <a:lstStyle/>
-          <a:p>
-            <a:pPr algn="l" indent="0" marL="0">
-              <a:lnSpc>
-                <a:spcPct val="112000"/>
-              </a:lnSpc>
-              <a:buNone/>
-            </a:pPr>
-            <a:r>
-              <a:rPr lang="en-US" sz="1500" dirty="0">
-                <a:solidFill>
-                  <a:srgbClr val="5F586C"/>
-                </a:solidFill>
-                <a:latin typeface="Microsoft JhengHei" pitchFamily="34" charset="0"/>
-                <a:ea typeface="Microsoft JhengHei" pitchFamily="34" charset="-122"/>
-                <a:cs typeface="Microsoft JhengHei" pitchFamily="34" charset="-120"/>
-              </a:rPr>
-              <a:t>讓分享連結變短，朋友打開也不會碰到 Google 的錯誤頁</a:t>
-            </a:r>
-            <a:endParaRPr lang="en-US" sz="1500" dirty="0"/>
-          </a:p>
-        </p:txBody>
-      </p:sp>
-      <p:sp>
-        <p:nvSpPr>
-          <p:cNvPr id="7" name="Shape 5"/>
-          <p:cNvSpPr/>
-          <p:nvPr/>
-        </p:nvSpPr>
-        <p:spPr>
-          <a:xfrm>
-            <a:off x="548640" y="1892808"/>
+            <a:off x="548640" y="4902200"/>
             <a:ext cx="329184" cy="329184"/>
           </a:xfrm>
           <a:prstGeom prst="ellipse">
@@ -16451,13 +15424,13 @@
       </p:sp>
       <p:sp>
         <p:nvSpPr>
-          <p:cNvPr id="8" name="Text 6"/>
-          <p:cNvSpPr txBox="1"/>
-          <p:nvPr/>
-        </p:nvSpPr>
-        <p:spPr>
-          <a:xfrm>
-            <a:off x="548640" y="1892808"/>
+          <p:cNvPr id="96" name="Text 6n"/>
+          <p:cNvSpPr txBox="1"/>
+          <p:nvPr/>
+        </p:nvSpPr>
+        <p:spPr>
+          <a:xfrm>
+            <a:off x="548640" y="4902200"/>
             <a:ext cx="329184" cy="329184"/>
           </a:xfrm>
           <a:prstGeom prst="rect">
@@ -16482,7 +15455,7 @@
                 <a:ea typeface="Microsoft JhengHei" pitchFamily="34" charset="-122"/>
                 <a:cs typeface="Microsoft JhengHei" pitchFamily="34" charset="-120"/>
               </a:rPr>
-              <a:t>1</a:t>
+              <a:t>6</a:t>
             </a:r>
             <a:endParaRPr lang="en-US" sz="1300" dirty="0"/>
           </a:p>
@@ -16490,14 +15463,14 @@
       </p:sp>
       <p:sp>
         <p:nvSpPr>
-          <p:cNvPr id="9" name="Text 7"/>
-          <p:cNvSpPr txBox="1"/>
-          <p:nvPr/>
-        </p:nvSpPr>
-        <p:spPr>
-          <a:xfrm>
-            <a:off x="1060704" y="1874520"/>
-            <a:ext cx="5980176" cy="586740"/>
+          <p:cNvPr id="97" name="Text 6t"/>
+          <p:cNvSpPr txBox="1"/>
+          <p:nvPr/>
+        </p:nvSpPr>
+        <p:spPr>
+          <a:xfrm>
+            <a:off x="1060704" y="4889500"/>
+            <a:ext cx="5980176" cy="317500"/>
           </a:xfrm>
           <a:prstGeom prst="rect">
             <a:avLst/>
@@ -16524,14 +15497,8 @@
                 <a:ea typeface="Microsoft JhengHei" pitchFamily="34" charset="-122"/>
                 <a:cs typeface="Microsoft JhengHei" pitchFamily="34" charset="-120"/>
               </a:rPr>
-              <a:t>同一個 Pages 專案 →「</a:t>
-            </a:r>
-            <a:pPr algn="l" indent="0" marL="0">
-              <a:lnSpc>
-                <a:spcPct val="112000"/>
-              </a:lnSpc>
-              <a:buNone/>
-            </a:pPr>
+              <a:t xml:space="preserve">把整個 </a:t>
+            </a:r>
             <a:r>
               <a:rPr lang="en-US" sz="1500" b="1" dirty="0">
                 <a:solidFill>
@@ -16541,14 +15508,8 @@
                 <a:ea typeface="Microsoft JhengHei" pitchFamily="34" charset="-122"/>
                 <a:cs typeface="Microsoft JhengHei" pitchFamily="34" charset="-120"/>
               </a:rPr>
-              <a:t>Settings</a:t>
-            </a:r>
-            <a:pPr algn="l" indent="0" marL="0">
-              <a:lnSpc>
-                <a:spcPct val="112000"/>
-              </a:lnSpc>
-              <a:buNone/>
-            </a:pPr>
+              <a:t>web 資料夾</a:t>
+            </a:r>
             <a:r>
               <a:rPr lang="en-US" sz="1500" dirty="0">
                 <a:solidFill>
@@ -16558,14 +15519,8 @@
                 <a:ea typeface="Microsoft JhengHei" pitchFamily="34" charset="-122"/>
                 <a:cs typeface="Microsoft JhengHei" pitchFamily="34" charset="-120"/>
               </a:rPr>
-              <a:t>」→「</a:t>
-            </a:r>
-            <a:pPr algn="l" indent="0" marL="0">
-              <a:lnSpc>
-                <a:spcPct val="112000"/>
-              </a:lnSpc>
-              <a:buNone/>
-            </a:pPr>
+              <a:t>拖進去 →「</a:t>
+            </a:r>
             <a:r>
               <a:rPr lang="en-US" sz="1500" b="1" dirty="0">
                 <a:solidFill>
@@ -16575,14 +15530,8 @@
                 <a:ea typeface="Microsoft JhengHei" pitchFamily="34" charset="-122"/>
                 <a:cs typeface="Microsoft JhengHei" pitchFamily="34" charset="-120"/>
               </a:rPr>
-              <a:t>Variables and Secrets</a:t>
-            </a:r>
-            <a:pPr algn="l" indent="0" marL="0">
-              <a:lnSpc>
-                <a:spcPct val="112000"/>
-              </a:lnSpc>
-              <a:buNone/>
-            </a:pPr>
+              <a:t>部署</a:t>
+            </a:r>
             <a:r>
               <a:rPr lang="en-US" sz="1500" dirty="0">
                 <a:solidFill>
@@ -16592,41 +15541,7 @@
                 <a:ea typeface="Microsoft JhengHei" pitchFamily="34" charset="-122"/>
                 <a:cs typeface="Microsoft JhengHei" pitchFamily="34" charset="-120"/>
               </a:rPr>
-              <a:t>」→「</a:t>
-            </a:r>
-            <a:pPr algn="l" indent="0" marL="0">
-              <a:lnSpc>
-                <a:spcPct val="112000"/>
-              </a:lnSpc>
-              <a:buNone/>
-            </a:pPr>
-            <a:r>
-              <a:rPr lang="en-US" sz="1500" b="1" dirty="0">
-                <a:solidFill>
-                  <a:srgbClr val="1E1A26"/>
-                </a:solidFill>
-                <a:latin typeface="Microsoft JhengHei" pitchFamily="34" charset="0"/>
-                <a:ea typeface="Microsoft JhengHei" pitchFamily="34" charset="-122"/>
-                <a:cs typeface="Microsoft JhengHei" pitchFamily="34" charset="-120"/>
-              </a:rPr>
-              <a:t>Add</a:t>
-            </a:r>
-            <a:pPr algn="l" indent="0" marL="0">
-              <a:lnSpc>
-                <a:spcPct val="112000"/>
-              </a:lnSpc>
-              <a:buNone/>
-            </a:pPr>
-            <a:r>
-              <a:rPr lang="en-US" sz="1500" dirty="0">
-                <a:solidFill>
-                  <a:srgbClr val="1E1A26"/>
-                </a:solidFill>
-                <a:latin typeface="Microsoft JhengHei" pitchFamily="34" charset="0"/>
-                <a:ea typeface="Microsoft JhengHei" pitchFamily="34" charset="-122"/>
-                <a:cs typeface="Microsoft JhengHei" pitchFamily="34" charset="-120"/>
-              </a:rPr>
-              <a:t>」</a:t>
+              <a:t>」，就拿到你的網址</a:t>
             </a:r>
             <a:endParaRPr lang="en-US" sz="1500" dirty="0"/>
           </a:p>
@@ -16634,73 +15549,14 @@
       </p:sp>
       <p:sp>
         <p:nvSpPr>
-          <p:cNvPr id="10" name="Shape 8"/>
-          <p:cNvSpPr/>
-          <p:nvPr/>
-        </p:nvSpPr>
-        <p:spPr>
-          <a:xfrm>
-            <a:off x="548640" y="2616708"/>
-            <a:ext cx="329184" cy="329184"/>
-          </a:xfrm>
-          <a:prstGeom prst="ellipse">
-            <a:avLst/>
-          </a:prstGeom>
-          <a:solidFill>
-            <a:srgbClr val="F1EBFA"/>
-          </a:solidFill>
-          <a:ln/>
-        </p:spPr>
-      </p:sp>
-      <p:sp>
-        <p:nvSpPr>
-          <p:cNvPr id="11" name="Text 9"/>
-          <p:cNvSpPr txBox="1"/>
-          <p:nvPr/>
-        </p:nvSpPr>
-        <p:spPr>
-          <a:xfrm>
-            <a:off x="548640" y="2616708"/>
-            <a:ext cx="329184" cy="329184"/>
-          </a:xfrm>
-          <a:prstGeom prst="rect">
-            <a:avLst/>
-          </a:prstGeom>
-          <a:noFill/>
-          <a:ln/>
-        </p:spPr>
-        <p:txBody>
-          <a:bodyPr wrap="square" lIns="0" tIns="0" rIns="0" bIns="0" rtlCol="0" anchor="ctr"/>
-          <a:lstStyle/>
-          <a:p>
-            <a:pPr algn="ctr" indent="0" marL="0">
-              <a:buNone/>
-            </a:pPr>
-            <a:r>
-              <a:rPr lang="en-US" sz="1300" b="1" dirty="0">
-                <a:solidFill>
-                  <a:srgbClr val="6A35A8"/>
-                </a:solidFill>
-                <a:latin typeface="Microsoft JhengHei" pitchFamily="34" charset="0"/>
-                <a:ea typeface="Microsoft JhengHei" pitchFamily="34" charset="-122"/>
-                <a:cs typeface="Microsoft JhengHei" pitchFamily="34" charset="-120"/>
-              </a:rPr>
-              <a:t>2</a:t>
-            </a:r>
-            <a:endParaRPr lang="en-US" sz="1300" dirty="0"/>
-          </a:p>
-        </p:txBody>
-      </p:sp>
-      <p:sp>
-        <p:nvSpPr>
-          <p:cNvPr id="12" name="Text 10"/>
-          <p:cNvSpPr txBox="1"/>
-          <p:nvPr/>
-        </p:nvSpPr>
-        <p:spPr>
-          <a:xfrm>
-            <a:off x="1060704" y="2598420"/>
-            <a:ext cx="5980176" cy="316230"/>
+          <p:cNvPr id="90" name="EN Note"/>
+          <p:cNvSpPr txBox="1"/>
+          <p:nvPr/>
+        </p:nvSpPr>
+        <p:spPr>
+          <a:xfrm>
+            <a:off x="1066800" y="5384800"/>
+            <a:ext cx="5981700" cy="254000"/>
           </a:xfrm>
           <a:prstGeom prst="rect">
             <a:avLst/>
@@ -16719,1077 +15575,17 @@
               <a:buNone/>
             </a:pPr>
             <a:r>
-              <a:rPr lang="en-US" sz="1500" dirty="0">
-                <a:solidFill>
-                  <a:srgbClr val="1E1A26"/>
-                </a:solidFill>
-                <a:latin typeface="Microsoft JhengHei" pitchFamily="34" charset="0"/>
-                <a:ea typeface="Microsoft JhengHei" pitchFamily="34" charset="-122"/>
-                <a:cs typeface="Microsoft JhengHei" pitchFamily="34" charset="-120"/>
-              </a:rPr>
-              <a:t>名稱填 </a:t>
-            </a:r>
-            <a:pPr algn="l" indent="0" marL="0">
-              <a:lnSpc>
-                <a:spcPct val="112000"/>
-              </a:lnSpc>
-              <a:buNone/>
-            </a:pPr>
-            <a:r>
-              <a:rPr lang="en-US" sz="1500" b="1" dirty="0">
-                <a:solidFill>
-                  <a:srgbClr val="6A35A8"/>
-                </a:solidFill>
-                <a:latin typeface="Courier New" pitchFamily="34" charset="0"/>
-                <a:ea typeface="Courier New" pitchFamily="34" charset="-122"/>
-                <a:cs typeface="Courier New" pitchFamily="34" charset="-120"/>
-              </a:rPr>
-              <a:t>EXEC_URL</a:t>
-            </a:r>
-            <a:pPr algn="l" indent="0" marL="0">
-              <a:lnSpc>
-                <a:spcPct val="112000"/>
-              </a:lnSpc>
-              <a:buNone/>
-            </a:pPr>
-            <a:r>
-              <a:rPr lang="en-US" sz="1500" dirty="0">
-                <a:solidFill>
-                  <a:srgbClr val="1E1A26"/>
-                </a:solidFill>
-                <a:latin typeface="Microsoft JhengHei" pitchFamily="34" charset="0"/>
-                <a:ea typeface="Microsoft JhengHei" pitchFamily="34" charset="-122"/>
-                <a:cs typeface="Microsoft JhengHei" pitchFamily="34" charset="-120"/>
-              </a:rPr>
-              <a:t>，值貼你的 </a:t>
-            </a:r>
-            <a:pPr algn="l" indent="0" marL="0">
-              <a:lnSpc>
-                <a:spcPct val="112000"/>
-              </a:lnSpc>
-              <a:buNone/>
-            </a:pPr>
-            <a:r>
-              <a:rPr lang="en-US" sz="1500" b="1" dirty="0">
-                <a:solidFill>
-                  <a:srgbClr val="1E1A26"/>
-                </a:solidFill>
-                <a:latin typeface="Microsoft JhengHei" pitchFamily="34" charset="0"/>
-                <a:ea typeface="Microsoft JhengHei" pitchFamily="34" charset="-122"/>
-                <a:cs typeface="Microsoft JhengHei" pitchFamily="34" charset="-120"/>
-              </a:rPr>
-              <a:t>/exec 網址</a:t>
-            </a:r>
-            <a:pPr algn="l" indent="0" marL="0">
-              <a:lnSpc>
-                <a:spcPct val="112000"/>
-              </a:lnSpc>
-              <a:buNone/>
-            </a:pPr>
-            <a:r>
-              <a:rPr lang="en-US" sz="1500" dirty="0">
-                <a:solidFill>
-                  <a:srgbClr val="1E1A26"/>
-                </a:solidFill>
-                <a:latin typeface="Microsoft JhengHei" pitchFamily="34" charset="0"/>
-                <a:ea typeface="Microsoft JhengHei" pitchFamily="34" charset="-122"/>
-                <a:cs typeface="Microsoft JhengHei" pitchFamily="34" charset="-120"/>
-              </a:rPr>
-              <a:t> →「</a:t>
-            </a:r>
-            <a:pPr algn="l" indent="0" marL="0">
-              <a:lnSpc>
-                <a:spcPct val="112000"/>
-              </a:lnSpc>
-              <a:buNone/>
-            </a:pPr>
-            <a:r>
-              <a:rPr lang="en-US" sz="1500" b="1" dirty="0">
-                <a:solidFill>
-                  <a:srgbClr val="1E1A26"/>
-                </a:solidFill>
-                <a:latin typeface="Microsoft JhengHei" pitchFamily="34" charset="0"/>
-                <a:ea typeface="Microsoft JhengHei" pitchFamily="34" charset="-122"/>
-                <a:cs typeface="Microsoft JhengHei" pitchFamily="34" charset="-120"/>
-              </a:rPr>
-              <a:t>Save</a:t>
-            </a:r>
-            <a:pPr algn="l" indent="0" marL="0">
-              <a:lnSpc>
-                <a:spcPct val="112000"/>
-              </a:lnSpc>
-              <a:buNone/>
-            </a:pPr>
-            <a:r>
-              <a:rPr lang="en-US" sz="1500" dirty="0">
-                <a:solidFill>
-                  <a:srgbClr val="1E1A26"/>
-                </a:solidFill>
-                <a:latin typeface="Microsoft JhengHei" pitchFamily="34" charset="0"/>
-                <a:ea typeface="Microsoft JhengHei" pitchFamily="34" charset="-122"/>
-                <a:cs typeface="Microsoft JhengHei" pitchFamily="34" charset="-120"/>
-              </a:rPr>
-              <a:t>」</a:t>
-            </a:r>
-            <a:endParaRPr lang="en-US" sz="1500" dirty="0"/>
-          </a:p>
-        </p:txBody>
-      </p:sp>
-      <p:sp>
-        <p:nvSpPr>
-          <p:cNvPr id="13" name="Shape 11"/>
-          <p:cNvSpPr/>
-          <p:nvPr/>
-        </p:nvSpPr>
-        <p:spPr>
-          <a:xfrm>
-            <a:off x="548640" y="3128772"/>
-            <a:ext cx="329184" cy="329184"/>
-          </a:xfrm>
-          <a:prstGeom prst="ellipse">
-            <a:avLst/>
-          </a:prstGeom>
-          <a:solidFill>
-            <a:srgbClr val="F1EBFA"/>
-          </a:solidFill>
-          <a:ln/>
-        </p:spPr>
-      </p:sp>
-      <p:sp>
-        <p:nvSpPr>
-          <p:cNvPr id="14" name="Text 12"/>
-          <p:cNvSpPr txBox="1"/>
-          <p:nvPr/>
-        </p:nvSpPr>
-        <p:spPr>
-          <a:xfrm>
-            <a:off x="548640" y="3128772"/>
-            <a:ext cx="329184" cy="329184"/>
-          </a:xfrm>
-          <a:prstGeom prst="rect">
-            <a:avLst/>
-          </a:prstGeom>
-          <a:noFill/>
-          <a:ln/>
-        </p:spPr>
-        <p:txBody>
-          <a:bodyPr wrap="square" lIns="0" tIns="0" rIns="0" bIns="0" rtlCol="0" anchor="ctr"/>
-          <a:lstStyle/>
-          <a:p>
-            <a:pPr algn="ctr" indent="0" marL="0">
-              <a:buNone/>
-            </a:pPr>
-            <a:r>
-              <a:rPr lang="en-US" sz="1300" b="1" dirty="0">
-                <a:solidFill>
-                  <a:srgbClr val="6A35A8"/>
-                </a:solidFill>
-                <a:latin typeface="Microsoft JhengHei" pitchFamily="34" charset="0"/>
-                <a:ea typeface="Microsoft JhengHei" pitchFamily="34" charset="-122"/>
-                <a:cs typeface="Microsoft JhengHei" pitchFamily="34" charset="-120"/>
-              </a:rPr>
-              <a:t>3</a:t>
-            </a:r>
-            <a:endParaRPr lang="en-US" sz="1300" dirty="0"/>
-          </a:p>
-        </p:txBody>
-      </p:sp>
-      <p:sp>
-        <p:nvSpPr>
-          <p:cNvPr id="15" name="Text 13"/>
-          <p:cNvSpPr txBox="1"/>
-          <p:nvPr/>
-        </p:nvSpPr>
-        <p:spPr>
-          <a:xfrm>
-            <a:off x="1060704" y="3110484"/>
-            <a:ext cx="5980176" cy="586740"/>
-          </a:xfrm>
-          <a:prstGeom prst="rect">
-            <a:avLst/>
-          </a:prstGeom>
-          <a:noFill/>
-          <a:ln/>
-        </p:spPr>
-        <p:txBody>
-          <a:bodyPr wrap="square" lIns="0" tIns="0" rIns="0" bIns="0" rtlCol="0" anchor="t"/>
-          <a:lstStyle/>
-          <a:p>
-            <a:pPr algn="l" indent="0" marL="0">
-              <a:lnSpc>
-                <a:spcPct val="112000"/>
-              </a:lnSpc>
-              <a:buNone/>
-            </a:pPr>
-            <a:r>
-              <a:rPr lang="en-US" sz="1500" dirty="0">
-                <a:solidFill>
-                  <a:srgbClr val="1E1A26"/>
-                </a:solidFill>
-                <a:latin typeface="Microsoft JhengHei" pitchFamily="34" charset="0"/>
-                <a:ea typeface="Microsoft JhengHei" pitchFamily="34" charset="-122"/>
-                <a:cs typeface="Microsoft JhengHei" pitchFamily="34" charset="-120"/>
-              </a:rPr>
-              <a:t>設定要重新部署才生效：「</a:t>
-            </a:r>
-            <a:pPr algn="l" indent="0" marL="0">
-              <a:lnSpc>
-                <a:spcPct val="112000"/>
-              </a:lnSpc>
-              <a:buNone/>
-            </a:pPr>
-            <a:r>
-              <a:rPr lang="en-US" sz="1500" b="1" dirty="0">
-                <a:solidFill>
-                  <a:srgbClr val="1E1A26"/>
-                </a:solidFill>
-                <a:latin typeface="Microsoft JhengHei" pitchFamily="34" charset="0"/>
-                <a:ea typeface="Microsoft JhengHei" pitchFamily="34" charset="-122"/>
-                <a:cs typeface="Microsoft JhengHei" pitchFamily="34" charset="-120"/>
-              </a:rPr>
-              <a:t>Deployments</a:t>
-            </a:r>
-            <a:pPr algn="l" indent="0" marL="0">
-              <a:lnSpc>
-                <a:spcPct val="112000"/>
-              </a:lnSpc>
-              <a:buNone/>
-            </a:pPr>
-            <a:r>
-              <a:rPr lang="en-US" sz="1500" dirty="0">
-                <a:solidFill>
-                  <a:srgbClr val="1E1A26"/>
-                </a:solidFill>
-                <a:latin typeface="Microsoft JhengHei" pitchFamily="34" charset="0"/>
-                <a:ea typeface="Microsoft JhengHei" pitchFamily="34" charset="-122"/>
-                <a:cs typeface="Microsoft JhengHei" pitchFamily="34" charset="-120"/>
-              </a:rPr>
-              <a:t>」→「</a:t>
-            </a:r>
-            <a:pPr algn="l" indent="0" marL="0">
-              <a:lnSpc>
-                <a:spcPct val="112000"/>
-              </a:lnSpc>
-              <a:buNone/>
-            </a:pPr>
-            <a:r>
-              <a:rPr lang="en-US" sz="1500" b="1" dirty="0">
-                <a:solidFill>
-                  <a:srgbClr val="1E1A26"/>
-                </a:solidFill>
-                <a:latin typeface="Microsoft JhengHei" pitchFamily="34" charset="0"/>
-                <a:ea typeface="Microsoft JhengHei" pitchFamily="34" charset="-122"/>
-                <a:cs typeface="Microsoft JhengHei" pitchFamily="34" charset="-120"/>
-              </a:rPr>
-              <a:t>Create new deployment</a:t>
-            </a:r>
-            <a:pPr algn="l" indent="0" marL="0">
-              <a:lnSpc>
-                <a:spcPct val="112000"/>
-              </a:lnSpc>
-              <a:buNone/>
-            </a:pPr>
-            <a:r>
-              <a:rPr lang="en-US" sz="1500" dirty="0">
-                <a:solidFill>
-                  <a:srgbClr val="1E1A26"/>
-                </a:solidFill>
-                <a:latin typeface="Microsoft JhengHei" pitchFamily="34" charset="0"/>
-                <a:ea typeface="Microsoft JhengHei" pitchFamily="34" charset="-122"/>
-                <a:cs typeface="Microsoft JhengHei" pitchFamily="34" charset="-120"/>
-              </a:rPr>
-              <a:t>」→ 再把 web 資料夾拖一次</a:t>
-            </a:r>
-            <a:endParaRPr lang="en-US" sz="1500" dirty="0"/>
-          </a:p>
-        </p:txBody>
-      </p:sp>
-      <p:sp>
-        <p:nvSpPr>
-          <p:cNvPr id="16" name="Shape 14"/>
-          <p:cNvSpPr/>
-          <p:nvPr/>
-        </p:nvSpPr>
-        <p:spPr>
-          <a:xfrm>
-            <a:off x="548640" y="3852672"/>
-            <a:ext cx="329184" cy="329184"/>
-          </a:xfrm>
-          <a:prstGeom prst="ellipse">
-            <a:avLst/>
-          </a:prstGeom>
-          <a:solidFill>
-            <a:srgbClr val="F1EBFA"/>
-          </a:solidFill>
-          <a:ln/>
-        </p:spPr>
-      </p:sp>
-      <p:sp>
-        <p:nvSpPr>
-          <p:cNvPr id="17" name="Text 15"/>
-          <p:cNvSpPr txBox="1"/>
-          <p:nvPr/>
-        </p:nvSpPr>
-        <p:spPr>
-          <a:xfrm>
-            <a:off x="548640" y="3852672"/>
-            <a:ext cx="329184" cy="329184"/>
-          </a:xfrm>
-          <a:prstGeom prst="rect">
-            <a:avLst/>
-          </a:prstGeom>
-          <a:noFill/>
-          <a:ln/>
-        </p:spPr>
-        <p:txBody>
-          <a:bodyPr wrap="square" lIns="0" tIns="0" rIns="0" bIns="0" rtlCol="0" anchor="ctr"/>
-          <a:lstStyle/>
-          <a:p>
-            <a:pPr algn="ctr" indent="0" marL="0">
-              <a:buNone/>
-            </a:pPr>
-            <a:r>
-              <a:rPr lang="en-US" sz="1300" b="1" dirty="0">
-                <a:solidFill>
-                  <a:srgbClr val="6A35A8"/>
-                </a:solidFill>
-                <a:latin typeface="Microsoft JhengHei" pitchFamily="34" charset="0"/>
-                <a:ea typeface="Microsoft JhengHei" pitchFamily="34" charset="-122"/>
-                <a:cs typeface="Microsoft JhengHei" pitchFamily="34" charset="-120"/>
-              </a:rPr>
-              <a:t>4</a:t>
-            </a:r>
-            <a:endParaRPr lang="en-US" sz="1300" dirty="0"/>
-          </a:p>
-        </p:txBody>
-      </p:sp>
-      <p:sp>
-        <p:nvSpPr>
-          <p:cNvPr id="18" name="Text 16"/>
-          <p:cNvSpPr txBox="1"/>
-          <p:nvPr/>
-        </p:nvSpPr>
-        <p:spPr>
-          <a:xfrm>
-            <a:off x="1060704" y="3834384"/>
-            <a:ext cx="5980176" cy="586740"/>
-          </a:xfrm>
-          <a:prstGeom prst="rect">
-            <a:avLst/>
-          </a:prstGeom>
-          <a:noFill/>
-          <a:ln/>
-        </p:spPr>
-        <p:txBody>
-          <a:bodyPr wrap="square" lIns="0" tIns="0" rIns="0" bIns="0" rtlCol="0" anchor="t"/>
-          <a:lstStyle/>
-          <a:p>
-            <a:pPr algn="l" indent="0" marL="0">
-              <a:lnSpc>
-                <a:spcPct val="112000"/>
-              </a:lnSpc>
-              <a:buNone/>
-            </a:pPr>
-            <a:r>
-              <a:rPr lang="en-US" sz="1500" dirty="0">
-                <a:solidFill>
-                  <a:srgbClr val="1E1A26"/>
-                </a:solidFill>
-                <a:latin typeface="Microsoft JhengHei" pitchFamily="34" charset="0"/>
-                <a:ea typeface="Microsoft JhengHei" pitchFamily="34" charset="-122"/>
-                <a:cs typeface="Microsoft JhengHei" pitchFamily="34" charset="-120"/>
-              </a:rPr>
-              <a:t>回 Apps Script 的指令碼屬性，照右邊新增 </a:t>
-            </a:r>
-            <a:pPr algn="l" indent="0" marL="0">
-              <a:lnSpc>
-                <a:spcPct val="112000"/>
-              </a:lnSpc>
-              <a:buNone/>
-            </a:pPr>
-            <a:r>
-              <a:rPr lang="en-US" sz="1500" b="1" dirty="0">
-                <a:solidFill>
-                  <a:srgbClr val="6A35A8"/>
-                </a:solidFill>
-                <a:latin typeface="Courier New" pitchFamily="34" charset="0"/>
-                <a:ea typeface="Courier New" pitchFamily="34" charset="-122"/>
-                <a:cs typeface="Courier New" pitchFamily="34" charset="-120"/>
-              </a:rPr>
-              <a:t>SHORT_BASE</a:t>
-            </a:r>
-            <a:pPr algn="l" indent="0" marL="0">
-              <a:lnSpc>
-                <a:spcPct val="112000"/>
-              </a:lnSpc>
-              <a:buNone/>
-            </a:pPr>
-            <a:r>
-              <a:rPr lang="en-US" sz="1500" dirty="0">
-                <a:solidFill>
-                  <a:srgbClr val="1E1A26"/>
-                </a:solidFill>
-                <a:latin typeface="Microsoft JhengHei" pitchFamily="34" charset="0"/>
-                <a:ea typeface="Microsoft JhengHei" pitchFamily="34" charset="-122"/>
-                <a:cs typeface="Microsoft JhengHei" pitchFamily="34" charset="-120"/>
-              </a:rPr>
-              <a:t>（結尾要有 /s/）</a:t>
-            </a:r>
-            <a:endParaRPr lang="en-US" sz="1500" dirty="0"/>
-          </a:p>
-        </p:txBody>
-      </p:sp>
-      <p:sp>
-        <p:nvSpPr>
-          <p:cNvPr id="19" name="Shape 17"/>
-          <p:cNvSpPr/>
-          <p:nvPr/>
-        </p:nvSpPr>
-        <p:spPr>
-          <a:xfrm>
-            <a:off x="7635240" y="1874520"/>
-            <a:ext cx="4023360" cy="1371600"/>
-          </a:xfrm>
-          <a:prstGeom prst="roundRect">
-            <a:avLst>
-              <a:gd name="adj" fmla="val 10667"/>
-            </a:avLst>
-          </a:prstGeom>
-          <a:solidFill>
-            <a:srgbClr val="F1EBFA"/>
-          </a:solidFill>
-          <a:ln/>
-        </p:spPr>
-      </p:sp>
-      <p:sp>
-        <p:nvSpPr>
-          <p:cNvPr id="20" name="Text 18"/>
-          <p:cNvSpPr txBox="1"/>
-          <p:nvPr/>
-        </p:nvSpPr>
-        <p:spPr>
-          <a:xfrm>
-            <a:off x="7909560" y="2002536"/>
-            <a:ext cx="3474720" cy="274320"/>
-          </a:xfrm>
-          <a:prstGeom prst="rect">
-            <a:avLst/>
-          </a:prstGeom>
-          <a:noFill/>
-          <a:ln/>
-        </p:spPr>
-        <p:txBody>
-          <a:bodyPr wrap="square" lIns="0" tIns="0" rIns="0" bIns="0" rtlCol="0" anchor="t"/>
-          <a:lstStyle/>
-          <a:p>
-            <a:pPr algn="l" indent="0" marL="0">
-              <a:lnSpc>
-                <a:spcPct val="112000"/>
-              </a:lnSpc>
-              <a:buNone/>
-            </a:pPr>
-            <a:r>
-              <a:rPr lang="en-US" sz="1300" b="1" dirty="0">
-                <a:solidFill>
-                  <a:srgbClr val="6A35A8"/>
-                </a:solidFill>
-                <a:latin typeface="Microsoft JhengHei" pitchFamily="34" charset="0"/>
-                <a:ea typeface="Microsoft JhengHei" pitchFamily="34" charset="-122"/>
-                <a:cs typeface="Microsoft JhengHei" pitchFamily="34" charset="-120"/>
-              </a:rPr>
-              <a:t>Cloudflare → Variables and Secrets</a:t>
-            </a:r>
-            <a:endParaRPr lang="en-US" sz="1300" dirty="0"/>
-          </a:p>
-        </p:txBody>
-      </p:sp>
-      <p:sp>
-        <p:nvSpPr>
-          <p:cNvPr id="21" name="Shape 19"/>
-          <p:cNvSpPr/>
-          <p:nvPr/>
-        </p:nvSpPr>
-        <p:spPr>
-          <a:xfrm>
-            <a:off x="7909560" y="2331720"/>
-            <a:ext cx="3474720" cy="384048"/>
-          </a:xfrm>
-          <a:prstGeom prst="roundRect">
-            <a:avLst>
-              <a:gd name="adj" fmla="val 19048"/>
-            </a:avLst>
-          </a:prstGeom>
-          <a:solidFill>
-            <a:srgbClr val="FFFFFF"/>
-          </a:solidFill>
-          <a:ln w="12700">
-            <a:solidFill>
-              <a:srgbClr val="E4D9F5"/>
-            </a:solidFill>
-            <a:prstDash val="solid"/>
-          </a:ln>
-        </p:spPr>
-      </p:sp>
-      <p:sp>
-        <p:nvSpPr>
-          <p:cNvPr id="22" name="Text 20"/>
-          <p:cNvSpPr txBox="1"/>
-          <p:nvPr/>
-        </p:nvSpPr>
-        <p:spPr>
-          <a:xfrm>
-            <a:off x="7909560" y="2331720"/>
-            <a:ext cx="3474720" cy="384048"/>
-          </a:xfrm>
-          <a:prstGeom prst="rect">
-            <a:avLst/>
-          </a:prstGeom>
-          <a:noFill/>
-          <a:ln/>
-        </p:spPr>
-        <p:txBody>
-          <a:bodyPr wrap="square" lIns="0" tIns="0" rIns="0" bIns="0" rtlCol="0" anchor="ctr"/>
-          <a:lstStyle/>
-          <a:p>
-            <a:pPr algn="ctr" indent="0" marL="0">
-              <a:buNone/>
-            </a:pPr>
-            <a:r>
-              <a:rPr lang="en-US" sz="1300" b="1" dirty="0">
-                <a:solidFill>
-                  <a:srgbClr val="1E1A26"/>
-                </a:solidFill>
-                <a:latin typeface="Courier New" pitchFamily="34" charset="0"/>
-                <a:ea typeface="Courier New" pitchFamily="34" charset="-122"/>
-                <a:cs typeface="Courier New" pitchFamily="34" charset="-120"/>
-              </a:rPr>
-              <a:t>EXEC_URL</a:t>
-            </a:r>
-            <a:endParaRPr lang="en-US" sz="1300" dirty="0"/>
-          </a:p>
-        </p:txBody>
-      </p:sp>
-      <p:sp>
-        <p:nvSpPr>
-          <p:cNvPr id="23" name="Text 21"/>
-          <p:cNvSpPr txBox="1"/>
-          <p:nvPr/>
-        </p:nvSpPr>
-        <p:spPr>
-          <a:xfrm>
-            <a:off x="7909560" y="2770632"/>
-            <a:ext cx="3474720" cy="365760"/>
-          </a:xfrm>
-          <a:prstGeom prst="rect">
-            <a:avLst/>
-          </a:prstGeom>
-          <a:noFill/>
-          <a:ln/>
-        </p:spPr>
-        <p:txBody>
-          <a:bodyPr wrap="square" lIns="0" tIns="0" rIns="0" bIns="0" rtlCol="0" anchor="ctr"/>
-          <a:lstStyle/>
-          <a:p>
-            <a:pPr algn="ctr" indent="0" marL="0">
-              <a:buNone/>
-            </a:pPr>
-            <a:r>
               <a:rPr lang="en-US" sz="1100" dirty="0">
                 <a:solidFill>
-                  <a:srgbClr val="1E1A26"/>
-                </a:solidFill>
-                <a:latin typeface="Courier New" pitchFamily="34" charset="0"/>
-                <a:ea typeface="Courier New" pitchFamily="34" charset="-122"/>
-                <a:cs typeface="Courier New" pitchFamily="34" charset="-120"/>
-              </a:rPr>
-              <a:t>https://script.google.com/macros/s/…/exec</a:t>
+                  <a:srgbClr val="5F586C"/>
+                </a:solidFill>
+                <a:latin typeface="Microsoft JhengHei" pitchFamily="34" charset="0"/>
+                <a:ea typeface="Microsoft JhengHei" pitchFamily="34" charset="-122"/>
+                <a:cs typeface="Microsoft JhengHei" pitchFamily="34" charset="-120"/>
+              </a:rPr>
+              <a:t>英文介面：Workers &amp; Pages → Create application → Pages → Upload assets → Deploy site</a:t>
             </a:r>
             <a:endParaRPr lang="en-US" sz="1100" dirty="0"/>
-          </a:p>
-        </p:txBody>
-      </p:sp>
-      <p:sp>
-        <p:nvSpPr>
-          <p:cNvPr id="24" name="Shape 22"/>
-          <p:cNvSpPr/>
-          <p:nvPr/>
-        </p:nvSpPr>
-        <p:spPr>
-          <a:xfrm>
-            <a:off x="7635240" y="3383280"/>
-            <a:ext cx="4023360" cy="1371600"/>
-          </a:xfrm>
-          <a:prstGeom prst="roundRect">
-            <a:avLst>
-              <a:gd name="adj" fmla="val 10667"/>
-            </a:avLst>
-          </a:prstGeom>
-          <a:solidFill>
-            <a:srgbClr val="F1EBFA"/>
-          </a:solidFill>
-          <a:ln/>
-        </p:spPr>
-      </p:sp>
-      <p:sp>
-        <p:nvSpPr>
-          <p:cNvPr id="25" name="Text 23"/>
-          <p:cNvSpPr txBox="1"/>
-          <p:nvPr/>
-        </p:nvSpPr>
-        <p:spPr>
-          <a:xfrm>
-            <a:off x="7909560" y="3511296"/>
-            <a:ext cx="3474720" cy="274320"/>
-          </a:xfrm>
-          <a:prstGeom prst="rect">
-            <a:avLst/>
-          </a:prstGeom>
-          <a:noFill/>
-          <a:ln/>
-        </p:spPr>
-        <p:txBody>
-          <a:bodyPr wrap="square" lIns="0" tIns="0" rIns="0" bIns="0" rtlCol="0" anchor="t"/>
-          <a:lstStyle/>
-          <a:p>
-            <a:pPr algn="l" indent="0" marL="0">
-              <a:lnSpc>
-                <a:spcPct val="112000"/>
-              </a:lnSpc>
-              <a:buNone/>
-            </a:pPr>
-            <a:r>
-              <a:rPr lang="en-US" sz="1300" b="1" dirty="0">
-                <a:solidFill>
-                  <a:srgbClr val="6A35A8"/>
-                </a:solidFill>
-                <a:latin typeface="Microsoft JhengHei" pitchFamily="34" charset="0"/>
-                <a:ea typeface="Microsoft JhengHei" pitchFamily="34" charset="-122"/>
-                <a:cs typeface="Microsoft JhengHei" pitchFamily="34" charset="-120"/>
-              </a:rPr>
-              <a:t>Apps Script → 指令碼屬性</a:t>
-            </a:r>
-            <a:endParaRPr lang="en-US" sz="1300" dirty="0"/>
-          </a:p>
-        </p:txBody>
-      </p:sp>
-      <p:sp>
-        <p:nvSpPr>
-          <p:cNvPr id="26" name="Shape 24"/>
-          <p:cNvSpPr/>
-          <p:nvPr/>
-        </p:nvSpPr>
-        <p:spPr>
-          <a:xfrm>
-            <a:off x="7909560" y="3840480"/>
-            <a:ext cx="3474720" cy="384048"/>
-          </a:xfrm>
-          <a:prstGeom prst="roundRect">
-            <a:avLst>
-              <a:gd name="adj" fmla="val 19048"/>
-            </a:avLst>
-          </a:prstGeom>
-          <a:solidFill>
-            <a:srgbClr val="FFFFFF"/>
-          </a:solidFill>
-          <a:ln w="12700">
-            <a:solidFill>
-              <a:srgbClr val="E4D9F5"/>
-            </a:solidFill>
-            <a:prstDash val="solid"/>
-          </a:ln>
-        </p:spPr>
-      </p:sp>
-      <p:sp>
-        <p:nvSpPr>
-          <p:cNvPr id="27" name="Text 25"/>
-          <p:cNvSpPr txBox="1"/>
-          <p:nvPr/>
-        </p:nvSpPr>
-        <p:spPr>
-          <a:xfrm>
-            <a:off x="7909560" y="3840480"/>
-            <a:ext cx="3474720" cy="384048"/>
-          </a:xfrm>
-          <a:prstGeom prst="rect">
-            <a:avLst/>
-          </a:prstGeom>
-          <a:noFill/>
-          <a:ln/>
-        </p:spPr>
-        <p:txBody>
-          <a:bodyPr wrap="square" lIns="0" tIns="0" rIns="0" bIns="0" rtlCol="0" anchor="ctr"/>
-          <a:lstStyle/>
-          <a:p>
-            <a:pPr algn="ctr" indent="0" marL="0">
-              <a:buNone/>
-            </a:pPr>
-            <a:r>
-              <a:rPr lang="en-US" sz="1300" b="1" dirty="0">
-                <a:solidFill>
-                  <a:srgbClr val="1E1A26"/>
-                </a:solidFill>
-                <a:latin typeface="Courier New" pitchFamily="34" charset="0"/>
-                <a:ea typeface="Courier New" pitchFamily="34" charset="-122"/>
-                <a:cs typeface="Courier New" pitchFamily="34" charset="-120"/>
-              </a:rPr>
-              <a:t>SHORT_BASE</a:t>
-            </a:r>
-            <a:endParaRPr lang="en-US" sz="1300" dirty="0"/>
-          </a:p>
-        </p:txBody>
-      </p:sp>
-      <p:sp>
-        <p:nvSpPr>
-          <p:cNvPr id="28" name="Text 26"/>
-          <p:cNvSpPr txBox="1"/>
-          <p:nvPr/>
-        </p:nvSpPr>
-        <p:spPr>
-          <a:xfrm>
-            <a:off x="7909560" y="4279392"/>
-            <a:ext cx="3474720" cy="365760"/>
-          </a:xfrm>
-          <a:prstGeom prst="rect">
-            <a:avLst/>
-          </a:prstGeom>
-          <a:noFill/>
-          <a:ln/>
-        </p:spPr>
-        <p:txBody>
-          <a:bodyPr wrap="square" lIns="0" tIns="0" rIns="0" bIns="0" rtlCol="0" anchor="ctr"/>
-          <a:lstStyle/>
-          <a:p>
-            <a:pPr algn="ctr" indent="0" marL="0">
-              <a:buNone/>
-            </a:pPr>
-            <a:r>
-              <a:rPr lang="en-US" sz="1100" dirty="0">
-                <a:solidFill>
-                  <a:srgbClr val="1E1A26"/>
-                </a:solidFill>
-                <a:latin typeface="Courier New" pitchFamily="34" charset="0"/>
-                <a:ea typeface="Courier New" pitchFamily="34" charset="-122"/>
-                <a:cs typeface="Courier New" pitchFamily="34" charset="-120"/>
-              </a:rPr>
-              <a:t>https://my-tickets.pages.dev</a:t>
-            </a:r>
-            <a:pPr algn="ctr" indent="0" marL="0">
-              <a:buNone/>
-            </a:pPr>
-            <a:r>
-              <a:rPr lang="en-US" sz="1100" b="1" dirty="0">
-                <a:solidFill>
-                  <a:srgbClr val="B83227"/>
-                </a:solidFill>
-                <a:latin typeface="Courier New" pitchFamily="34" charset="0"/>
-                <a:ea typeface="Courier New" pitchFamily="34" charset="-122"/>
-                <a:cs typeface="Courier New" pitchFamily="34" charset="-120"/>
-              </a:rPr>
-              <a:t>/s/</a:t>
-            </a:r>
-            <a:endParaRPr lang="en-US" sz="1100" dirty="0"/>
-          </a:p>
-        </p:txBody>
-      </p:sp>
-      <p:sp>
-        <p:nvSpPr>
-          <p:cNvPr id="29" name="Shape 27"/>
-          <p:cNvSpPr/>
-          <p:nvPr/>
-        </p:nvSpPr>
-        <p:spPr>
-          <a:xfrm>
-            <a:off x="7635240" y="4892040"/>
-            <a:ext cx="4023360" cy="1188720"/>
-          </a:xfrm>
-          <a:prstGeom prst="roundRect">
-            <a:avLst>
-              <a:gd name="adj" fmla="val 12308"/>
-            </a:avLst>
-          </a:prstGeom>
-          <a:solidFill>
-            <a:srgbClr val="FFFFFF"/>
-          </a:solidFill>
-          <a:ln w="12700">
-            <a:solidFill>
-              <a:srgbClr val="E4D9F5"/>
-            </a:solidFill>
-            <a:prstDash val="solid"/>
-          </a:ln>
-        </p:spPr>
-      </p:sp>
-      <p:sp>
-        <p:nvSpPr>
-          <p:cNvPr id="30" name="Shape 28"/>
-          <p:cNvSpPr/>
-          <p:nvPr/>
-        </p:nvSpPr>
-        <p:spPr>
-          <a:xfrm>
-            <a:off x="7863840" y="5029200"/>
-            <a:ext cx="457200" cy="457200"/>
-          </a:xfrm>
-          <a:prstGeom prst="ellipse">
-            <a:avLst/>
-          </a:prstGeom>
-          <a:solidFill>
-            <a:srgbClr val="F1EBFA"/>
-          </a:solidFill>
-          <a:ln/>
-        </p:spPr>
-      </p:sp>
-      <p:pic>
-        <p:nvPicPr>
-          <p:cNvPr id="31" name="Image 0" descr="preencoded.png">    </p:cNvPr>
-          <p:cNvPicPr>
-            <a:picLocks noChangeAspect="1"/>
-          </p:cNvPicPr>
-          <p:nvPr/>
-        </p:nvPicPr>
-        <p:blipFill>
-          <a:blip r:embed="rId1"/>
-          <a:stretch>
-            <a:fillRect/>
-          </a:stretch>
-        </p:blipFill>
-        <p:spPr>
-          <a:xfrm>
-            <a:off x="7968996" y="5134356"/>
-            <a:ext cx="246888" cy="246888"/>
-          </a:xfrm>
-          <a:prstGeom prst="rect">
-            <a:avLst/>
-          </a:prstGeom>
-        </p:spPr>
-      </p:pic>
-      <p:sp>
-        <p:nvSpPr>
-          <p:cNvPr id="32" name="Text 29"/>
-          <p:cNvSpPr txBox="1"/>
-          <p:nvPr/>
-        </p:nvSpPr>
-        <p:spPr>
-          <a:xfrm>
-            <a:off x="8458200" y="5120640"/>
-            <a:ext cx="3017520" cy="274320"/>
-          </a:xfrm>
-          <a:prstGeom prst="rect">
-            <a:avLst/>
-          </a:prstGeom>
-          <a:noFill/>
-          <a:ln/>
-        </p:spPr>
-        <p:txBody>
-          <a:bodyPr wrap="square" lIns="0" tIns="0" rIns="0" bIns="0" rtlCol="0" anchor="t"/>
-          <a:lstStyle/>
-          <a:p>
-            <a:pPr algn="l" indent="0" marL="0">
-              <a:lnSpc>
-                <a:spcPct val="112000"/>
-              </a:lnSpc>
-              <a:buNone/>
-            </a:pPr>
-            <a:r>
-              <a:rPr lang="en-US" sz="1300" b="1" dirty="0">
-                <a:solidFill>
-                  <a:srgbClr val="1E1A26"/>
-                </a:solidFill>
-                <a:latin typeface="Microsoft JhengHei" pitchFamily="34" charset="0"/>
-                <a:ea typeface="Microsoft JhengHei" pitchFamily="34" charset="-122"/>
-                <a:cs typeface="Microsoft JhengHei" pitchFamily="34" charset="-120"/>
-              </a:rPr>
-              <a:t>檢查一下</a:t>
-            </a:r>
-            <a:pPr algn="l" indent="0" marL="0">
-              <a:lnSpc>
-                <a:spcPct val="112000"/>
-              </a:lnSpc>
-              <a:buNone/>
-            </a:pPr>
-            <a:r>
-              <a:rPr lang="en-US" sz="1300" dirty="0">
-                <a:solidFill>
-                  <a:srgbClr val="1E1A26"/>
-                </a:solidFill>
-                <a:latin typeface="Microsoft JhengHei" pitchFamily="34" charset="0"/>
-                <a:ea typeface="Microsoft JhengHei" pitchFamily="34" charset="-122"/>
-                <a:cs typeface="Microsoft JhengHei" pitchFamily="34" charset="-120"/>
-              </a:rPr>
-              <a:t>：瀏覽器打開</a:t>
-            </a:r>
-            <a:endParaRPr lang="en-US" sz="1300" dirty="0"/>
-          </a:p>
-        </p:txBody>
-      </p:sp>
-      <p:sp>
-        <p:nvSpPr>
-          <p:cNvPr id="33" name="Text 30"/>
-          <p:cNvSpPr txBox="1"/>
-          <p:nvPr/>
-        </p:nvSpPr>
-        <p:spPr>
-          <a:xfrm>
-            <a:off x="7909560" y="5468112"/>
-            <a:ext cx="3611880" cy="256032"/>
-          </a:xfrm>
-          <a:prstGeom prst="rect">
-            <a:avLst/>
-          </a:prstGeom>
-          <a:noFill/>
-          <a:ln/>
-        </p:spPr>
-        <p:txBody>
-          <a:bodyPr wrap="square" lIns="0" tIns="0" rIns="0" bIns="0" rtlCol="0" anchor="t"/>
-          <a:lstStyle/>
-          <a:p>
-            <a:pPr algn="l" indent="0" marL="0">
-              <a:lnSpc>
-                <a:spcPct val="112000"/>
-              </a:lnSpc>
-              <a:buNone/>
-            </a:pPr>
-            <a:r>
-              <a:rPr lang="en-US" sz="1150" b="1" dirty="0">
-                <a:solidFill>
-                  <a:srgbClr val="6A35A8"/>
-                </a:solidFill>
-                <a:latin typeface="Courier New" pitchFamily="34" charset="0"/>
-                <a:ea typeface="Courier New" pitchFamily="34" charset="-122"/>
-                <a:cs typeface="Courier New" pitchFamily="34" charset="-120"/>
-              </a:rPr>
-              <a:t>https://my-tickets.pages.dev/s/test</a:t>
-            </a:r>
-            <a:endParaRPr lang="en-US" sz="1150" dirty="0"/>
-          </a:p>
-        </p:txBody>
-      </p:sp>
-      <p:sp>
-        <p:nvSpPr>
-          <p:cNvPr id="34" name="Text 31"/>
-          <p:cNvSpPr txBox="1"/>
-          <p:nvPr/>
-        </p:nvSpPr>
-        <p:spPr>
-          <a:xfrm>
-            <a:off x="7909560" y="5742432"/>
-            <a:ext cx="3611880" cy="274320"/>
-          </a:xfrm>
-          <a:prstGeom prst="rect">
-            <a:avLst/>
-          </a:prstGeom>
-          <a:noFill/>
-          <a:ln/>
-        </p:spPr>
-        <p:txBody>
-          <a:bodyPr wrap="square" lIns="0" tIns="0" rIns="0" bIns="0" rtlCol="0" anchor="t"/>
-          <a:lstStyle/>
-          <a:p>
-            <a:pPr algn="l" indent="0" marL="0">
-              <a:lnSpc>
-                <a:spcPct val="112000"/>
-              </a:lnSpc>
-              <a:buNone/>
-            </a:pPr>
-            <a:r>
-              <a:rPr lang="en-US" sz="1250" dirty="0">
-                <a:solidFill>
-                  <a:srgbClr val="1E1A26"/>
-                </a:solidFill>
-                <a:latin typeface="Microsoft JhengHei" pitchFamily="34" charset="0"/>
-                <a:ea typeface="Microsoft JhengHei" pitchFamily="34" charset="-122"/>
-                <a:cs typeface="Microsoft JhengHei" pitchFamily="34" charset="-120"/>
-              </a:rPr>
-              <a:t>看到「這個分享連結不存在」就代表通了</a:t>
-            </a:r>
-            <a:endParaRPr lang="en-US" sz="1250" dirty="0"/>
-          </a:p>
-        </p:txBody>
-      </p:sp>
-      <p:sp>
-        <p:nvSpPr>
-          <p:cNvPr id="35" name="Shape 32"/>
-          <p:cNvSpPr/>
-          <p:nvPr/>
-        </p:nvSpPr>
-        <p:spPr>
-          <a:xfrm>
-            <a:off x="548640" y="4892040"/>
-            <a:ext cx="6720840" cy="779272"/>
-          </a:xfrm>
-          <a:prstGeom prst="roundRect">
-            <a:avLst>
-              <a:gd name="adj" fmla="val 14081"/>
-            </a:avLst>
-          </a:prstGeom>
-          <a:solidFill>
-            <a:srgbClr val="F1EBFA"/>
-          </a:solidFill>
-          <a:ln/>
-        </p:spPr>
-      </p:sp>
-      <p:pic>
-        <p:nvPicPr>
-          <p:cNvPr id="36" name="Image 1" descr="preencoded.png">    </p:cNvPr>
-          <p:cNvPicPr>
-            <a:picLocks noChangeAspect="1"/>
-          </p:cNvPicPr>
-          <p:nvPr/>
-        </p:nvPicPr>
-        <p:blipFill>
-          <a:blip r:embed="rId2"/>
-          <a:stretch>
-            <a:fillRect/>
-          </a:stretch>
-        </p:blipFill>
-        <p:spPr>
-          <a:xfrm>
-            <a:off x="777240" y="5098796"/>
-            <a:ext cx="365760" cy="365760"/>
-          </a:xfrm>
-          <a:prstGeom prst="rect">
-            <a:avLst/>
-          </a:prstGeom>
-        </p:spPr>
-      </p:pic>
-      <p:sp>
-        <p:nvSpPr>
-          <p:cNvPr id="37" name="Text 33"/>
-          <p:cNvSpPr txBox="1"/>
-          <p:nvPr/>
-        </p:nvSpPr>
-        <p:spPr>
-          <a:xfrm>
-            <a:off x="1280160" y="5029200"/>
-            <a:ext cx="5852160" cy="504952"/>
-          </a:xfrm>
-          <a:prstGeom prst="rect">
-            <a:avLst/>
-          </a:prstGeom>
-          <a:noFill/>
-          <a:ln/>
-        </p:spPr>
-        <p:txBody>
-          <a:bodyPr wrap="square" lIns="0" tIns="0" rIns="0" bIns="0" rtlCol="0" anchor="ctr"/>
-          <a:lstStyle/>
-          <a:p>
-            <a:pPr algn="l" indent="0" marL="0">
-              <a:lnSpc>
-                <a:spcPct val="112000"/>
-              </a:lnSpc>
-              <a:buNone/>
-            </a:pPr>
-            <a:r>
-              <a:rPr lang="en-US" sz="1400" dirty="0">
-                <a:solidFill>
-                  <a:srgbClr val="3D2A5C"/>
-                </a:solidFill>
-                <a:latin typeface="Microsoft JhengHei" pitchFamily="34" charset="0"/>
-                <a:ea typeface="Microsoft JhengHei" pitchFamily="34" charset="-122"/>
-                <a:cs typeface="Microsoft JhengHei" pitchFamily="34" charset="-120"/>
-              </a:rPr>
-              <a:t>網址放在 Cloudflare 的設定裡，以後更新網站直接整個 web 資料夾上傳就好，不用改任何檔案。</a:t>
-            </a:r>
-            <a:endParaRPr lang="en-US" sz="1400" dirty="0"/>
           </a:p>
         </p:txBody>
       </p:sp>

--- a/票券-自己架一套/安裝說明.pptx
+++ b/票券-自己架一套/安裝說明.pptx
@@ -4097,7 +4097,27 @@
                 <a:ea typeface="Microsoft JhengHei" pitchFamily="34" charset="-122"/>
                 <a:cs typeface="Microsoft JhengHei" pitchFamily="34" charset="-120"/>
               </a:rPr>
-              <a:t>依到期日排好，快到期的在最上面；標題旁的數字是還能用的張數</a:t>
+              <a:t>依到期日排好，快到期的在最上面</a:t>
+            </a:r>
+            <a:endParaRPr lang="en-US" sz="1300" dirty="0"/>
+          </a:p>
+          <a:p>
+            <a:pPr algn="ctr" indent="0" marL="0">
+              <a:lnSpc>
+                <a:spcPct val="112000"/>
+              </a:lnSpc>
+              <a:buNone/>
+            </a:pPr>
+            <a:r>
+              <a:rPr lang="en-US" sz="1300" dirty="0">
+                <a:solidFill>
+                  <a:srgbClr val="1E1A26"/>
+                </a:solidFill>
+                <a:latin typeface="Microsoft JhengHei" pitchFamily="34" charset="0"/>
+                <a:ea typeface="Microsoft JhengHei" pitchFamily="34" charset="-122"/>
+                <a:cs typeface="Microsoft JhengHei" pitchFamily="34" charset="-120"/>
+              </a:rPr>
+              <a:t>搜尋框旁的數字是還能用的張數</a:t>
             </a:r>
             <a:endParaRPr lang="en-US" sz="1300" dirty="0"/>
           </a:p>
@@ -4185,7 +4205,27 @@
                 <a:ea typeface="Microsoft JhengHei" pitchFamily="34" charset="-122"/>
                 <a:cs typeface="Microsoft JhengHei" pitchFamily="34" charset="-120"/>
               </a:rPr>
-              <a:t>點進去出示：截圖可以放大、轉橫的，條碼更好掃</a:t>
+              <a:t>點進去：截圖可以放大、轉橫的</a:t>
+            </a:r>
+            <a:endParaRPr lang="en-US" sz="1300" dirty="0"/>
+          </a:p>
+          <a:p>
+            <a:pPr algn="ctr" indent="0" marL="0">
+              <a:lnSpc>
+                <a:spcPct val="112000"/>
+              </a:lnSpc>
+              <a:buNone/>
+            </a:pPr>
+            <a:r>
+              <a:rPr lang="en-US" sz="1300" dirty="0">
+                <a:solidFill>
+                  <a:srgbClr val="1E1A26"/>
+                </a:solidFill>
+                <a:latin typeface="Microsoft JhengHei" pitchFamily="34" charset="0"/>
+                <a:ea typeface="Microsoft JhengHei" pitchFamily="34" charset="-122"/>
+                <a:cs typeface="Microsoft JhengHei" pitchFamily="34" charset="-120"/>
+              </a:rPr>
+              <a:t>用掉了按上面的「標記已使用」</a:t>
             </a:r>
             <a:endParaRPr lang="en-US" sz="1300" dirty="0"/>
           </a:p>
